--- a/docs/resources/AI-Demo-Overview.pptx
+++ b/docs/resources/AI-Demo-Overview.pptx
@@ -25,9 +25,12 @@
     <p:sldId id="273" r:id="rId19"/>
     <p:sldId id="274" r:id="rId20"/>
     <p:sldId id="275" r:id="rId21"/>
+    <p:sldId id="276" r:id="rId22"/>
+    <p:sldId id="277" r:id="rId23"/>
+    <p:sldId id="278" r:id="rId24"/>
   </p:sldIdLst>
   <p:notesMasterIdLst>
-    <p:notesMasterId r:id="rId22"/>
+    <p:notesMasterId r:id="rId25"/>
   </p:notesMasterIdLst>
   <p:sldSz cx="9144000" cy="5143500"/>
   <p:notesSz cx="5143500" cy="9144000"/>
@@ -896,12 +899,11 @@
           <a:p>
             <a:r>
               <a:rPr lang="en-US" dirty="0"/>
-              <a:t>Diagrams: SequenceReelDiagram.jsx draws the live sequence diagram from the token-chain trace (tokenChainTraceStore, deriveLifelineSteps.js); lane names repeat at the foot (#3231) and it draws only steps that ran. Pages: /transaction-trace, /architecture/* (token-flow, token-chain, system). Sources: docs/diagrams/*.mmd built by npm run build:diagrams; 24 drawio files in docs/.
-Secret rotation: /secret-rotation (pages/SecretRotationPage.jsx, routes/secretRotation.js) runs scripts/rotate-app-secret.js detached: regenerate in PingOne, write the vault, then .env; the page prints the k8s step rather than patching k8s itself. PingOne keeps no previous secret, so the old one dies at once. The worker app is refused; 20 apps are rotatable (refresh-service-envs.js). The API is gated at user level, not admin (a recorded owner decision). Never rotate 'PingOne Privilege' (a6219652): nothing in code blocks it by hand. Recreate containers after .env changes; a restart keeps the old value.
-Light/dark: THEMING.md; dark is :root[data-theme="dark"], never prefers-color-scheme. ThemeContext.js stores ba_dark_mode; the toggle is in TopNav. themingRatchet.test.js caps unthemed stylesheets at 136 of 314. /sdk-login and the Protocol Playground keep their own themes.
-Sessions: LMDB session store (services/lmdb/sessionStore.js), not Redis, despite leftover connect-redis dependencies and k8s docs. Cookie connect.sid, httpOnly, 24h, no cookie domain (single host). Tokens refresh within 5 minutes of expiry (middleware/tokenRefresh.js). Logout revokes tokens (RFC 7009), ends PingOne SSO and clears auth cookies. Kill switch: services/killSwitchService.js, shown at /ai-control-plane, resets after 10 minutes. Known issue: a long request can overwrite concurrent session saves (TECH_DEBT.md).
-User login: Demo AI App - User Login, PKCE-only since 2026-08-24 (routes/oauthUser.js). Passkeys via routes/mfa.js; step-up on a 428. Pages: /davinci-login-guide (widget), /davinci-sdk-login (Orchestration SDK), /sdk-login (OIDC SDK, tokens in the browser). The passkey rp.id needs a public TLD, hence local.ping-devops.com:4000.
-Admin login: Demo AI App - Admin Login. Admin is granted at login by any of four checks (username allowlist, population, custom claim, role-claim resolver; routes/oauthUser.js:565-607) and re-checked per request via the token's azp or session role (middleware/auth.js). auth-requirements.json marks 18 routes and 14 use cases admin; npm run authz:verify keeps App.js guards in line. Note: a failed login lands on the saved page or / with ?error=, not the login page.</a:t>
+              <a:t>Widget (/davinci-login-guide, DavinciLoginGuidePage.jsx; routes/davinciLogin.js): the BFF's /sdk-token posts to orchestrate-api.pingone.com/v1/company/{id}/sdktoken with the DaVinci API key (read from configStore and the vault), keeps nonce, state and PKCE verifier in the session, and the page loads assets.pingone.com/davinci/latest/davinci.js to render DaVinci's screens. Config keys: PINGONE_DAVINCI_LOGIN_COMPANY_ID, PINGONE_DAVINCI_LOGIN_POLICY_ID_V1/_V2, PINGONE_DAVINCI_API_KEY; config davinci_login_flow_version. Gotcha: successCallback gets whatever the flow's last node returns, not an authorization code. Open PR #3245 replaces today's hand-off (a DV-ST cookie plus an /authorize hop that doesn't sign the user in unless a PingOne session already exists) with POST /api/davinci-login/widget-session, which verifies the flow's returned tokens; widget sessions will then end when the access token expires.
+Orchestration SDK (/davinci-sdk-login, DavinciSdkLoginPage.jsx, lib/davinciSdkClient.js, routes/davinciSdkLogin.js): @forgerock/davinci-client calls /as/authorize with response_mode=pi.flow and gets JSON nodes; the page renders collectors (Text, Password, Submit, Flow) and calls next(); the code comes back in the JSON body and the BFF exchanges it as a public client with PKCE, no secret. Key: PINGONE_DAVINCI_LOGIN_APP_ID. Request the Demo API scopes: OIDC-only scopes gave a token for api.pingone.com and every later call 401'd (#3224). An existing PingOne session shows a 'reused' panel (#3228). The flow policy must be assigned to the app, or /as/authorize returns 500. UC-LEARN10 points at the static /orchestration-sdk explainer.
+Transaction step-up (ff_davinci_orchestration, off): routes/transactions.js calls confirmChallengeViaDaVinci (services/transactionConsentChallenge.js). Errors fall back to the built-in OTP/MFA path, but a non-PERMIT decision returns 403 davinci_denied. Not demo-ready: services/davinciFlowClient.js sends clientId:clientSecret as the bearer, a placeholder that will 401 against a real tenant. Mid-flow callbacks hit POST /webhook/davinci, unauthenticated by design (the same accepted trade-off as the PingOne webhook). Flow exports: docs/Super_Banking_Transaction_Authorization_DaVinci.json, docs/Super_Banking_MCP_Tool_Authorization_DaVinci.json.
+Also: Verified Trust (UC37, ff_verified_trust_a2a, off) starts a DaVinci flow by API key; there is no flow for it on the tenant yet. 'Demo AI App - CIBA (DaVinci)' exists only as manual setup steps. ADMIN10–12 use the hosted PingOne MCP, with no offline mock data.
+In flight: PR #3245 (widget), and another session is building a shared lesson layout so the widget and SDK lessons look alike. Stale: docs/DAVINCI_ORCHESTRATION_STATUS.md describes pages that no longer exist.</a:t>
             </a:r>
             <a:endParaRPr lang="en-US" dirty="0"/>
           </a:p>
@@ -989,8 +991,12 @@
           <a:p>
             <a:r>
               <a:rPr lang="en-US" dirty="0"/>
-              <a:t>All services run from the main checkout's docker-compose.yml. Never run docker compose up from a git worktree: a worktree has no .env files, so services start unconfigured while PingGateway still reports healthy. Use npm run serve:worktree to try worktree code in the running stack.
-Each service directory has its own CLAUDE.md with versions and hard rules.</a:t>
+              <a:t>Diagrams: SequenceReelDiagram.jsx draws the live sequence diagram from the token-chain trace (tokenChainTraceStore, deriveLifelineSteps.js); lane names repeat at the foot (#3231) and it draws only steps that ran. Pages: /transaction-trace, /architecture/* (token-flow, token-chain, system). Sources: docs/diagrams/*.mmd built by npm run build:diagrams; 24 drawio files in docs/.
+Secret rotation: /secret-rotation (pages/SecretRotationPage.jsx, routes/secretRotation.js) runs scripts/rotate-app-secret.js detached: regenerate in PingOne, write the vault, then .env; the page prints the k8s step rather than patching k8s itself. PingOne keeps no previous secret, so the old one dies at once. The worker app is refused; 20 apps are rotatable (refresh-service-envs.js). The API is gated at user level, not admin (a recorded owner decision). Never rotate 'PingOne Privilege' (a6219652): nothing in code blocks it by hand. Recreate containers after .env changes; a restart keeps the old value.
+Light/dark: THEMING.md; dark is :root[data-theme="dark"], never prefers-color-scheme. ThemeContext.js stores ba_dark_mode; the toggle is in TopNav. themingRatchet.test.js caps unthemed stylesheets at 136 of 314. /sdk-login and the Protocol Playground keep their own themes.
+Sessions: LMDB session store (services/lmdb/sessionStore.js), not Redis, despite leftover connect-redis dependencies and k8s docs. Cookie connect.sid, httpOnly, 24h, no cookie domain (single host). Tokens refresh within 5 minutes of expiry (middleware/tokenRefresh.js). Logout revokes tokens (RFC 7009), ends PingOne SSO and clears auth cookies. Kill switch: services/killSwitchService.js, shown at /ai-control-plane, resets after 10 minutes. Known issue: a long request can overwrite concurrent session saves (TECH_DEBT.md).
+User login: Demo AI App - User Login, PKCE-only since 2026-08-24 (routes/oauthUser.js). Passkeys via routes/mfa.js; step-up on a 428. Pages: /davinci-login-guide (widget), /davinci-sdk-login (Orchestration SDK), /sdk-login (OIDC SDK, tokens in the browser). The passkey rp.id needs a public TLD, hence local.ping-devops.com:4000.
+Admin login: Demo AI App - Admin Login. Admin is granted at login by any of four checks (username allowlist, population, custom claim, role-claim resolver; routes/oauthUser.js:565-607) and re-checked per request via the token's azp or session role (middleware/auth.js). auth-requirements.json marks 18 routes and 14 use cases admin; npm run authz:verify keeps App.js guards in line. Note: a failed login lands on the saved page or / with ?error=, not the login page.</a:t>
             </a:r>
             <a:endParaRPr lang="en-US" dirty="0"/>
           </a:p>
@@ -1078,10 +1084,12 @@
           <a:p>
             <a:r>
               <a:rPr lang="en-US" dirty="0"/>
-              <a:t>Flags live in FLAG_REGISTRY in demo_api_server/routes/featureFlags.js; defaults in demo_api_server/services/configStore.js. Change them from the admin Feature Flags page.
-Some flags are pinned by environment variables (for example FF_MCP_GATEWAY_PINGGATEWAY). While the variable is set, the UI toggle has no effect.
-After switching gateways, run ./run-docker.sh demo-sync so the containers match the flags.
-Full list, plus environment switches (LLM_BACKEND, MCP_MTLS_ON, authorize_mode): docs/FAQ.md.</a:t>
+              <a:t>What it is: secrets.vault at the repo root, homegrown code, not sops, age or HashiCorp Vault. Argon2id key derivation via the argon2 npm package (demo_api_server/lib/vault/crypto.js:30-36), AES-256-GCM per entry from Node's built-in crypto, an HMAC over the whole file, a seq counter against the audit log to catch restored old copies, atomic saves. Gitignored (.gitignore:195-209), mode 0600. Two old encrypted copies remain in git history (docs/incident-response/vault-history-exposure.md).
+Flow: npm run vault:set NAME reads the value from stdin. VAULT_PASSWORD comes from demo_api_server/.env via compose env_file; run-docker.sh test-decrypts first, and the BFF exits if the vault exists but the password is missing. vaultLoader copies entries into configStore memory and deletes VAULT_PASSWORD from the process. configStore.getEffective reads .env first, then vault, then LMDB; BFF_INTERNAL_SECRET and INTENT_TOKEN_SECRET are forced from the vault. refresh-service-envs.js writes per-service .env files (client secrets come live from PingOne; only the two shared secrets come from the vault). k8s/create-secrets.sh ships vault values and aborts on drift. Rotation: /secret-rotation runs scripts/rotate-app-secret.js, which checks the vault opens, regenerates in PingOne, writes the vault, re-derives .env files and verifies.
+Commands: vault:create, vault:get, vault:set, vault:list, vault:delete, vault:rotate, vault:migrate-from-env (demo_api_server/package.json). Docs: docs/vault.md, docs/secret-rotation/.
+dotenvx is the replacement, not part of the vault: server.js boots dotenvx, several services (gateway, agent service, oauth-mcp) already moved, and docs/superpowers/plans/2026-08-18-vault-dotenvx-full-replace.md deletes the vault last.
+Traps: a stale .env line silently overrides the vault in the BFF. After a PingOne rotation, create-secrets.sh can report drift even when the vault holds the dead value; probe which value PingOne accepts first. Likely bug (untested): the BFF deletes VAULT_PASSWORD at boot and the rotation child inherits that environment, so a rotation started from the page inside Docker may refuse with 'no vault password available'.
+Stale docs: docker-compose.yml and run-docker.sh call it a committed file (it isn't); docs/vault.md still documents a removed /admin/vault page.</a:t>
             </a:r>
             <a:endParaRPr lang="en-US" dirty="0"/>
           </a:p>
@@ -1169,12 +1177,14 @@
           <a:p>
             <a:r>
               <a:rPr lang="en-US" dirty="0"/>
-              <a:t>All apps are in the main demo environment (01d89b06) unless noted. App names verified against the live app list on 2026-09-13.
-Full table, with the config keys each app is read from and which services use it: docs/FAQ.md, section 'Which PingOne app does what'.
-Two traps:
-- The live environment has no dedicated 'Demo AI App - CIBA' app, so CIBA falls back to the Admin Login app.
-- Management API calls try PINGONE_MGMT_* and PINGONE_MANAGEMENT_* first, then the Admin Login app, and only then the worker (services/configStore.js). A Management API failure can therefore be the Admin Login app.
-Privilege AI Gateway sign-in uses a client in the Privilege tenant (0428ba4f), not this environment; its secret lives in the vault.</a:t>
+              <a:t>Versions and where each is used come from package.json, requirements/pyproject files and compose image tags; licenses were read from installed package metadata where available.
+Agent frameworks: LangChain/LangGraph (langchain_agent, plus LangGraph JS in the BFF and agent service; MIT), OpenAI Agents SDK (openai_agent), Pydantic AI (pydantic_agent; MIT), Mastra with the Vercel AI SDK (mastra_agent; Apache-2.0), LlamaIndex (the RAG agent over Weaviate), Guardrails AI (grounding validators in the Python agents; Apache-2.0).
+Protocols: @modelcontextprotocol/sdk (oauth-mcp, hostile-mcp-server; MIT), FastMCP (JWT verifier), @a2a-js/sdk (A2A server, client and Agent Card signing; Apache-2.0), AG-UI (agent event protocol), @dangahagan/weather-mcp (wrapped in a stdio-to-HTTP bridge), the OpenSearch MCP server image, pingone-mcp-server (Go binary behind Privilege).
+Models and runtime: llama.cpp llama-server (local models and embeddings), oMLX and mlx_lm on Apple Silicon, Phi-4-mini-instruct (tier 1), gpt-oss-20b (agent tier), nomic-embed-text-v1.5 (RAG embeddings), protectai/deberta-v3-base-prompt-injection-v2 (injection classifier in demo_mcp_promptguard).
+Data: Weaviate (vector DB), LMDB (BFF config and sessions), SQLite via node:sqlite (per-vertical demo data), argon2 (vault key derivation), jose/jsonwebtoken/PyJWT. Observability and test: Prometheus, Alertmanager, Grafana, Loki, Alloy, Jaeger, OpenTelemetry, promptfoo, Playwright (also the headless ungoverned agent), Jest, Vitest. Web and infra: React, Vite, Express, Mermaid, React Flow, elkjs, Monaco, Docker Compose, Kubernetes, Helm, nginx, mkcert, dotenvx, Sealed Secrets, LibreChat, OpenCLI, ForgeRock davinci-client and oidc-client.
+Our own spin-outs: github.com/curtismu7/llm-gateway (demo_llm_proxy), mcp-inspector and ai-gateway-client (standalone/). Their package.json says MIT, but none has a LICENSE file yet; add one before promoting them.
+License flags: model licenses aren't recorded anywhere in the repo; elkjs is EPL-2.0 (weak copyleft); the LibreChat stack's mongo:4.4.18 needs a check; cjmuir710/opensearch-mcp-server is a personal Docker Hub image; several images use :latest tags.
+Not open source, though easy to mistake: the PingGateway image, the Privilege gateway images and Helm chart, PingOne and Helix, New Relic's service, OrbStack, LM Studio, and the Brave Search API.</a:t>
             </a:r>
             <a:endParaRPr lang="en-US" dirty="0"/>
           </a:p>
@@ -1262,13 +1272,8 @@
           <a:p>
             <a:r>
               <a:rPr lang="en-US" dirty="0"/>
-              <a:t>The 24 Demo Steps are the same for all 11 customer verticals (demo_api_ui/src/config/demoUseCaseSteps.js); details come from demo_api_server/config/useCases.js.
-- UC7: the PingOne MFA client used for step-up wasn't traced.
-- UC14b: the PAR push uses the AI Agent Actor app (routes/intentBinding.js). UC14 sends the actor and admin client IDs in the context header; Authorize applies the RarMaxAmount rule.
-- UC12: the simulation replays a token at the gateway; it doesn't send a DPoP proof.
-- UC2 / UC2.5: the second agent is that vertical's Specialist Agent app (banking = Demo AI App - Investment Advisor Agent). Authorize checks the act chain depth.
-- UC22: CIBA uses PINGONE_CIBA_CLIENT_ID if set; the environment has no CIBA app, so it falls back to Admin Login, then to simulated CIBA.
-Symptom-to-app lookup and the full app inventory: docs/FAQ.md, 'Which PingOne app does what'.</a:t>
+              <a:t>All services run from the main checkout's docker-compose.yml. Never run docker compose up from a git worktree: a worktree has no .env files, so services start unconfigured while PingGateway still reports healthy. Use npm run serve:worktree to try worktree code in the running stack.
+Each service directory has its own CLAUDE.md with versions and hard rules.</a:t>
             </a:r>
             <a:endParaRPr lang="en-US" dirty="0"/>
           </a:p>
@@ -1356,12 +1361,10 @@
           <a:p>
             <a:r>
               <a:rPr lang="en-US" dirty="0"/>
-              <a:t>- UC11: the exchange client oauthService uses by default wasn't traced.
-- UC5 and UC18 run against the Node Demo Agent Gateway.
-- UC30–UC32: the PingGateway weather route has no OAuth filter, so no PingOne app is involved.
-- UC40: PingOne doesn't issue native ID-JAG yet; routes/enterpriseIdp.js signs the grant after a PingOne group check done with the worker. Needs ff_enterprise_managed_mcp_auth, which Demo Steps doesn't auto-arm for public steps.
-- UC38: the worker creates the agent app through the Management API (agentBuilderService.js); the exchange client wasn't traced. Only airlines gets the chip.
-- The other 38 catalog use cases aren't Demo Steps; most of them run the standard chain.</a:t>
+              <a:t>Flags live in FLAG_REGISTRY in demo_api_server/routes/featureFlags.js; defaults in demo_api_server/services/configStore.js. Change them from the admin Feature Flags page.
+Some flags are pinned by environment variables (for example FF_MCP_GATEWAY_PINGGATEWAY). While the variable is set, the UI toggle has no effect.
+After switching gateways, run ./run-docker.sh demo-sync so the containers match the flags.
+Full list, plus environment switches (LLM_BACKEND, MCP_MTLS_ON, authorize_mode): docs/FAQ.md.</a:t>
             </a:r>
             <a:endParaRPr lang="en-US" dirty="0"/>
           </a:p>
@@ -1449,9 +1452,12 @@
           <a:p>
             <a:r>
               <a:rPr lang="en-US" dirty="0"/>
-              <a:t>ADMIN1–13 are admin-gated and pass through neither the gateway nor Authorize (demo_api_server/config/admin/demoSteps.js, pingone-admin/tools.js).
-They sign in with PingOne's built-in pingone-mcp-server client over a loopback redirect and call https://mcp.pingone.&lt;region&gt;/admin/&lt;envId&gt;/mcp. When that fails, most fall back to the Management API with the worker, then to a mock.
-ADMIN13 links to /privilege-mcp-client; what that page calls wasn't traced.</a:t>
+              <a:t>All apps are in the main demo environment (01d89b06) unless noted. App names verified against the live app list on 2026-09-13.
+Full table, with the config keys each app is read from and which services use it: docs/FAQ.md, section 'Which PingOne app does what'.
+Two traps:
+- The live environment has no dedicated 'Demo AI App - CIBA' app, so CIBA falls back to the Admin Login app.
+- Management API calls try PINGONE_MGMT_* and PINGONE_MANAGEMENT_* first, then the Admin Login app, and only then the worker (services/configStore.js). A Management API failure can therefore be the Admin Login app.
+Privilege AI Gateway sign-in uses a client in the Privilege tenant (0428ba4f), not this environment; its secret lives in the vault.</a:t>
             </a:r>
             <a:endParaRPr lang="en-US" dirty="0"/>
           </a:p>
@@ -1631,7 +1637,13 @@
           <a:p>
             <a:r>
               <a:rPr lang="en-US" dirty="0"/>
-              <a:t>The three standalone repos run with no PingOne tenant and no demo stack; their canonical source is in this repo (standalone/ and demo_llm_proxy/).</a:t>
+              <a:t>The 24 Demo Steps are the same for all 11 customer verticals (demo_api_ui/src/config/demoUseCaseSteps.js); details come from demo_api_server/config/useCases.js.
+- UC7: the PingOne MFA client used for step-up wasn't traced.
+- UC14b: the PAR push uses the AI Agent Actor app (routes/intentBinding.js). UC14 sends the actor and admin client IDs in the context header; Authorize applies the RarMaxAmount rule.
+- UC12: the simulation replays a token at the gateway; it doesn't send a DPoP proof.
+- UC2 / UC2.5: the second agent is that vertical's Specialist Agent app (banking = Demo AI App - Investment Advisor Agent). Authorize checks the act chain depth.
+- UC22: CIBA uses PINGONE_CIBA_CLIENT_ID if set; the environment has no CIBA app, so it falls back to Admin Login, then to simulated CIBA.
+Symptom-to-app lookup and the full app inventory: docs/FAQ.md, 'Which PingOne app does what'.</a:t>
             </a:r>
             <a:endParaRPr lang="en-US" dirty="0"/>
           </a:p>
@@ -1655,6 +1667,277 @@
             <a:fld id="{F7021451-1387-4CA6-816F-3879F97B5CBC}" type="slidenum">
               <a:rPr lang="en-US"/>
               <a:t>20</a:t>
+            </a:fld>
+            <a:endParaRPr lang="en-US"/>
+          </a:p>
+        </p:txBody>
+      </p:sp>
+    </p:spTree>
+    <p:extLst>
+      <p:ext uri="{BB962C8B-B14F-4D97-AF65-F5344CB8AC3E}">
+        <p14:creationId xmlns:p14="http://schemas.microsoft.com/office/powerpoint/2010/main" val="1024086991"/>
+      </p:ext>
+    </p:extLst>
+  </p:cSld>
+  <p:clrMapOvr>
+    <a:masterClrMapping/>
+  </p:clrMapOvr>
+</p:notes>
+</file>
+
+<file path=ppt/notesSlides/notesSlide21.xml><?xml version="1.0" encoding="utf-8"?>
+<p:notes xmlns:a="http://schemas.openxmlformats.org/drawingml/2006/main" xmlns:r="http://schemas.openxmlformats.org/officeDocument/2006/relationships" xmlns:p="http://schemas.openxmlformats.org/presentationml/2006/main">
+  <p:cSld>
+    <p:spTree>
+      <p:nvGrpSpPr>
+        <p:cNvPr id="1" name=""/>
+        <p:cNvGrpSpPr/>
+        <p:nvPr/>
+      </p:nvGrpSpPr>
+      <p:grpSpPr>
+        <a:xfrm>
+          <a:off x="0" y="0"/>
+          <a:ext cx="0" cy="0"/>
+          <a:chOff x="0" y="0"/>
+          <a:chExt cx="0" cy="0"/>
+        </a:xfrm>
+      </p:grpSpPr>
+      <p:sp>
+        <p:nvSpPr>
+          <p:cNvPr id="2" name="Slide Image Placeholder 1"/>
+          <p:cNvSpPr>
+            <a:spLocks noGrp="1" noRot="1" noChangeAspect="1"/>
+          </p:cNvSpPr>
+          <p:nvPr>
+            <p:ph type="sldImg"/>
+          </p:nvPr>
+        </p:nvSpPr>
+        <p:spPr/>
+      </p:sp>
+      <p:sp>
+        <p:nvSpPr>
+          <p:cNvPr id="3" name="Notes Placeholder 2"/>
+          <p:cNvSpPr>
+            <a:spLocks noGrp="1"/>
+          </p:cNvSpPr>
+          <p:nvPr>
+            <p:ph type="body" idx="1"/>
+          </p:nvPr>
+        </p:nvSpPr>
+        <p:spPr/>
+        <p:txBody>
+          <a:bodyPr/>
+          <a:lstStyle/>
+          <a:p>
+            <a:r>
+              <a:rPr lang="en-US" dirty="0"/>
+              <a:t>- UC11: the exchange client oauthService uses by default wasn't traced.
+- UC5 and UC18 run against the Node Demo Agent Gateway.
+- UC30–UC32: the PingGateway weather route has no OAuth filter, so no PingOne app is involved.
+- UC40: PingOne doesn't issue native ID-JAG yet; routes/enterpriseIdp.js signs the grant after a PingOne group check done with the worker. Needs ff_enterprise_managed_mcp_auth, which Demo Steps doesn't auto-arm for public steps.
+- UC38: the worker creates the agent app through the Management API (agentBuilderService.js); the exchange client wasn't traced. Only airlines gets the chip.
+- The other 38 catalog use cases aren't Demo Steps; most of them run the standard chain.</a:t>
+            </a:r>
+            <a:endParaRPr lang="en-US" dirty="0"/>
+          </a:p>
+        </p:txBody>
+      </p:sp>
+      <p:sp>
+        <p:nvSpPr>
+          <p:cNvPr id="4" name="Slide Number Placeholder 3"/>
+          <p:cNvSpPr>
+            <a:spLocks noGrp="1"/>
+          </p:cNvSpPr>
+          <p:nvPr>
+            <p:ph type="sldNum" sz="quarter" idx="10"/>
+          </p:nvPr>
+        </p:nvSpPr>
+        <p:spPr/>
+        <p:txBody>
+          <a:bodyPr/>
+          <a:lstStyle/>
+          <a:p>
+            <a:fld id="{F7021451-1387-4CA6-816F-3879F97B5CBC}" type="slidenum">
+              <a:rPr lang="en-US"/>
+              <a:t>21</a:t>
+            </a:fld>
+            <a:endParaRPr lang="en-US"/>
+          </a:p>
+        </p:txBody>
+      </p:sp>
+    </p:spTree>
+    <p:extLst>
+      <p:ext uri="{BB962C8B-B14F-4D97-AF65-F5344CB8AC3E}">
+        <p14:creationId xmlns:p14="http://schemas.microsoft.com/office/powerpoint/2010/main" val="1024086991"/>
+      </p:ext>
+    </p:extLst>
+  </p:cSld>
+  <p:clrMapOvr>
+    <a:masterClrMapping/>
+  </p:clrMapOvr>
+</p:notes>
+</file>
+
+<file path=ppt/notesSlides/notesSlide22.xml><?xml version="1.0" encoding="utf-8"?>
+<p:notes xmlns:a="http://schemas.openxmlformats.org/drawingml/2006/main" xmlns:r="http://schemas.openxmlformats.org/officeDocument/2006/relationships" xmlns:p="http://schemas.openxmlformats.org/presentationml/2006/main">
+  <p:cSld>
+    <p:spTree>
+      <p:nvGrpSpPr>
+        <p:cNvPr id="1" name=""/>
+        <p:cNvGrpSpPr/>
+        <p:nvPr/>
+      </p:nvGrpSpPr>
+      <p:grpSpPr>
+        <a:xfrm>
+          <a:off x="0" y="0"/>
+          <a:ext cx="0" cy="0"/>
+          <a:chOff x="0" y="0"/>
+          <a:chExt cx="0" cy="0"/>
+        </a:xfrm>
+      </p:grpSpPr>
+      <p:sp>
+        <p:nvSpPr>
+          <p:cNvPr id="2" name="Slide Image Placeholder 1"/>
+          <p:cNvSpPr>
+            <a:spLocks noGrp="1" noRot="1" noChangeAspect="1"/>
+          </p:cNvSpPr>
+          <p:nvPr>
+            <p:ph type="sldImg"/>
+          </p:nvPr>
+        </p:nvSpPr>
+        <p:spPr/>
+      </p:sp>
+      <p:sp>
+        <p:nvSpPr>
+          <p:cNvPr id="3" name="Notes Placeholder 2"/>
+          <p:cNvSpPr>
+            <a:spLocks noGrp="1"/>
+          </p:cNvSpPr>
+          <p:nvPr>
+            <p:ph type="body" idx="1"/>
+          </p:nvPr>
+        </p:nvSpPr>
+        <p:spPr/>
+        <p:txBody>
+          <a:bodyPr/>
+          <a:lstStyle/>
+          <a:p>
+            <a:r>
+              <a:rPr lang="en-US" dirty="0"/>
+              <a:t>ADMIN1–13 are admin-gated and pass through neither the gateway nor Authorize (demo_api_server/config/admin/demoSteps.js, pingone-admin/tools.js).
+They sign in with PingOne's built-in pingone-mcp-server client over a loopback redirect and call https://mcp.pingone.&lt;region&gt;/admin/&lt;envId&gt;/mcp. When that fails, most fall back to the Management API with the worker, then to a mock.
+ADMIN13 links to /privilege-mcp-client; what that page calls wasn't traced.</a:t>
+            </a:r>
+            <a:endParaRPr lang="en-US" dirty="0"/>
+          </a:p>
+        </p:txBody>
+      </p:sp>
+      <p:sp>
+        <p:nvSpPr>
+          <p:cNvPr id="4" name="Slide Number Placeholder 3"/>
+          <p:cNvSpPr>
+            <a:spLocks noGrp="1"/>
+          </p:cNvSpPr>
+          <p:nvPr>
+            <p:ph type="sldNum" sz="quarter" idx="10"/>
+          </p:nvPr>
+        </p:nvSpPr>
+        <p:spPr/>
+        <p:txBody>
+          <a:bodyPr/>
+          <a:lstStyle/>
+          <a:p>
+            <a:fld id="{F7021451-1387-4CA6-816F-3879F97B5CBC}" type="slidenum">
+              <a:rPr lang="en-US"/>
+              <a:t>22</a:t>
+            </a:fld>
+            <a:endParaRPr lang="en-US"/>
+          </a:p>
+        </p:txBody>
+      </p:sp>
+    </p:spTree>
+    <p:extLst>
+      <p:ext uri="{BB962C8B-B14F-4D97-AF65-F5344CB8AC3E}">
+        <p14:creationId xmlns:p14="http://schemas.microsoft.com/office/powerpoint/2010/main" val="1024086991"/>
+      </p:ext>
+    </p:extLst>
+  </p:cSld>
+  <p:clrMapOvr>
+    <a:masterClrMapping/>
+  </p:clrMapOvr>
+</p:notes>
+</file>
+
+<file path=ppt/notesSlides/notesSlide23.xml><?xml version="1.0" encoding="utf-8"?>
+<p:notes xmlns:a="http://schemas.openxmlformats.org/drawingml/2006/main" xmlns:r="http://schemas.openxmlformats.org/officeDocument/2006/relationships" xmlns:p="http://schemas.openxmlformats.org/presentationml/2006/main">
+  <p:cSld>
+    <p:spTree>
+      <p:nvGrpSpPr>
+        <p:cNvPr id="1" name=""/>
+        <p:cNvGrpSpPr/>
+        <p:nvPr/>
+      </p:nvGrpSpPr>
+      <p:grpSpPr>
+        <a:xfrm>
+          <a:off x="0" y="0"/>
+          <a:ext cx="0" cy="0"/>
+          <a:chOff x="0" y="0"/>
+          <a:chExt cx="0" cy="0"/>
+        </a:xfrm>
+      </p:grpSpPr>
+      <p:sp>
+        <p:nvSpPr>
+          <p:cNvPr id="2" name="Slide Image Placeholder 1"/>
+          <p:cNvSpPr>
+            <a:spLocks noGrp="1" noRot="1" noChangeAspect="1"/>
+          </p:cNvSpPr>
+          <p:nvPr>
+            <p:ph type="sldImg"/>
+          </p:nvPr>
+        </p:nvSpPr>
+        <p:spPr/>
+      </p:sp>
+      <p:sp>
+        <p:nvSpPr>
+          <p:cNvPr id="3" name="Notes Placeholder 2"/>
+          <p:cNvSpPr>
+            <a:spLocks noGrp="1"/>
+          </p:cNvSpPr>
+          <p:nvPr>
+            <p:ph type="body" idx="1"/>
+          </p:nvPr>
+        </p:nvSpPr>
+        <p:spPr/>
+        <p:txBody>
+          <a:bodyPr/>
+          <a:lstStyle/>
+          <a:p>
+            <a:r>
+              <a:rPr lang="en-US" dirty="0"/>
+              <a:t>The three standalone repos run with no PingOne tenant and no demo stack; their canonical source is in this repo (standalone/ and demo_llm_proxy/).</a:t>
+            </a:r>
+            <a:endParaRPr lang="en-US" dirty="0"/>
+          </a:p>
+        </p:txBody>
+      </p:sp>
+      <p:sp>
+        <p:nvSpPr>
+          <p:cNvPr id="4" name="Slide Number Placeholder 3"/>
+          <p:cNvSpPr>
+            <a:spLocks noGrp="1"/>
+          </p:cNvSpPr>
+          <p:nvPr>
+            <p:ph type="sldNum" sz="quarter" idx="10"/>
+          </p:nvPr>
+        </p:nvSpPr>
+        <p:spPr/>
+        <p:txBody>
+          <a:bodyPr/>
+          <a:lstStyle/>
+          <a:p>
+            <a:fld id="{F7021451-1387-4CA6-816F-3879F97B5CBC}" type="slidenum">
+              <a:rPr lang="en-US"/>
+              <a:t>23</a:t>
             </a:fld>
             <a:endParaRPr lang="en-US"/>
           </a:p>
@@ -12725,7 +13008,1202 @@
                 <a:ea typeface="Montserrat" pitchFamily="34" charset="-122"/>
                 <a:cs typeface="Montserrat" pitchFamily="34" charset="-120"/>
               </a:rPr>
-              <a:t>11  ·  PLATFORM EXTRAS</a:t>
+              <a:t>11  ·  DAVINCI</a:t>
+            </a:r>
+            <a:endParaRPr lang="en-US" sz="1000" dirty="0"/>
+          </a:p>
+        </p:txBody>
+      </p:sp>
+      <p:sp>
+        <p:nvSpPr>
+          <p:cNvPr id="4" name="Text 2"/>
+          <p:cNvSpPr/>
+          <p:nvPr/>
+        </p:nvSpPr>
+        <p:spPr>
+          <a:xfrm>
+            <a:off x="457200" y="603504"/>
+            <a:ext cx="8229600" cy="786384"/>
+          </a:xfrm>
+          <a:prstGeom prst="rect">
+            <a:avLst/>
+          </a:prstGeom>
+          <a:noFill/>
+          <a:ln/>
+        </p:spPr>
+        <p:txBody>
+          <a:bodyPr wrap="square" lIns="0" tIns="0" rIns="0" bIns="0" rtlCol="0" anchor="t"/>
+          <a:lstStyle/>
+          <a:p>
+            <a:pPr indent="0" marL="0">
+              <a:buNone/>
+            </a:pPr>
+            <a:r>
+              <a:rPr lang="en-US" sz="2100" b="1" dirty="0">
+                <a:solidFill>
+                  <a:srgbClr val="0B1A2E"/>
+                </a:solidFill>
+                <a:latin typeface="Montserrat" pitchFamily="34" charset="0"/>
+                <a:ea typeface="Montserrat" pitchFamily="34" charset="-122"/>
+                <a:cs typeface="Montserrat" pitchFamily="34" charset="-120"/>
+              </a:rPr>
+              <a:t>Three ways to run a DaVinci flow: the hosted widget, the Orchestration SDK, and server-side step-up</a:t>
+            </a:r>
+            <a:endParaRPr lang="en-US" sz="2100" dirty="0"/>
+          </a:p>
+        </p:txBody>
+      </p:sp>
+      <p:sp>
+        <p:nvSpPr>
+          <p:cNvPr id="5" name="Text 3"/>
+          <p:cNvSpPr/>
+          <p:nvPr/>
+        </p:nvSpPr>
+        <p:spPr>
+          <a:xfrm>
+            <a:off x="8229600" y="4846320"/>
+            <a:ext cx="457200" cy="182880"/>
+          </a:xfrm>
+          <a:prstGeom prst="rect">
+            <a:avLst/>
+          </a:prstGeom>
+          <a:noFill/>
+          <a:ln/>
+        </p:spPr>
+        <p:txBody>
+          <a:bodyPr wrap="square" lIns="0" tIns="0" rIns="0" bIns="0" rtlCol="0" anchor="ctr"/>
+          <a:lstStyle/>
+          <a:p>
+            <a:pPr algn="r" indent="0" marL="0">
+              <a:buNone/>
+            </a:pPr>
+            <a:r>
+              <a:rPr lang="en-US" sz="900" dirty="0">
+                <a:solidFill>
+                  <a:srgbClr val="4F5E71"/>
+                </a:solidFill>
+                <a:latin typeface="Calibri" pitchFamily="34" charset="0"/>
+                <a:ea typeface="Calibri" pitchFamily="34" charset="-122"/>
+                <a:cs typeface="Calibri" pitchFamily="34" charset="-120"/>
+              </a:rPr>
+              <a:t>13</a:t>
+            </a:r>
+            <a:endParaRPr lang="en-US" sz="900" dirty="0"/>
+          </a:p>
+        </p:txBody>
+      </p:sp>
+      <p:sp>
+        <p:nvSpPr>
+          <p:cNvPr id="7" name="Shape 4"/>
+          <p:cNvSpPr/>
+          <p:nvPr/>
+        </p:nvSpPr>
+        <p:spPr>
+          <a:xfrm>
+            <a:off x="457200" y="1481328"/>
+            <a:ext cx="2590800" cy="2514600"/>
+          </a:xfrm>
+          <a:prstGeom prst="rect">
+            <a:avLst/>
+          </a:prstGeom>
+          <a:solidFill>
+            <a:srgbClr val="FFFFFF"/>
+          </a:solidFill>
+          <a:ln w="9525">
+            <a:solidFill>
+              <a:srgbClr val="D5DBE3"/>
+            </a:solidFill>
+            <a:prstDash val="solid"/>
+          </a:ln>
+        </p:spPr>
+      </p:sp>
+      <p:sp>
+        <p:nvSpPr>
+          <p:cNvPr id="8" name="Shape 5"/>
+          <p:cNvSpPr/>
+          <p:nvPr/>
+        </p:nvSpPr>
+        <p:spPr>
+          <a:xfrm>
+            <a:off x="603504" y="1627632"/>
+            <a:ext cx="384048" cy="384048"/>
+          </a:xfrm>
+          <a:prstGeom prst="ellipse">
+            <a:avLst/>
+          </a:prstGeom>
+          <a:solidFill>
+            <a:srgbClr val="0B1A2E"/>
+          </a:solidFill>
+          <a:ln/>
+        </p:spPr>
+      </p:sp>
+      <p:pic>
+        <p:nvPicPr>
+          <p:cNvPr id="9" name="Image 0" descr="preencoded.png">    </p:cNvPr>
+          <p:cNvPicPr>
+            <a:picLocks noChangeAspect="1"/>
+          </p:cNvPicPr>
+          <p:nvPr/>
+        </p:nvPicPr>
+        <p:blipFill>
+          <a:blip r:embed="rId1"/>
+          <a:stretch>
+            <a:fillRect/>
+          </a:stretch>
+        </p:blipFill>
+        <p:spPr>
+          <a:xfrm>
+            <a:off x="707197" y="1731325"/>
+            <a:ext cx="176662" cy="176662"/>
+          </a:xfrm>
+          <a:prstGeom prst="rect">
+            <a:avLst/>
+          </a:prstGeom>
+        </p:spPr>
+      </p:pic>
+      <p:sp>
+        <p:nvSpPr>
+          <p:cNvPr id="10" name="Text 6"/>
+          <p:cNvSpPr/>
+          <p:nvPr/>
+        </p:nvSpPr>
+        <p:spPr>
+          <a:xfrm>
+            <a:off x="1078992" y="1627632"/>
+            <a:ext cx="1859280" cy="384048"/>
+          </a:xfrm>
+          <a:prstGeom prst="rect">
+            <a:avLst/>
+          </a:prstGeom>
+          <a:noFill/>
+          <a:ln/>
+        </p:spPr>
+        <p:txBody>
+          <a:bodyPr wrap="square" lIns="0" tIns="0" rIns="0" bIns="0" rtlCol="0" anchor="ctr"/>
+          <a:lstStyle/>
+          <a:p>
+            <a:pPr indent="0" marL="0">
+              <a:buNone/>
+            </a:pPr>
+            <a:r>
+              <a:rPr lang="en-US" sz="1200" b="1" dirty="0">
+                <a:solidFill>
+                  <a:srgbClr val="0B1A2E"/>
+                </a:solidFill>
+                <a:latin typeface="Montserrat" pitchFamily="34" charset="0"/>
+                <a:ea typeface="Montserrat" pitchFamily="34" charset="-122"/>
+                <a:cs typeface="Montserrat" pitchFamily="34" charset="-120"/>
+              </a:rPr>
+              <a:t>Hosted widget</a:t>
+            </a:r>
+            <a:endParaRPr lang="en-US" sz="1200" dirty="0"/>
+          </a:p>
+        </p:txBody>
+      </p:sp>
+      <p:sp>
+        <p:nvSpPr>
+          <p:cNvPr id="11" name="Shape 7"/>
+          <p:cNvSpPr/>
+          <p:nvPr/>
+        </p:nvSpPr>
+        <p:spPr>
+          <a:xfrm>
+            <a:off x="603504" y="2139696"/>
+            <a:ext cx="1481328" cy="237744"/>
+          </a:xfrm>
+          <a:prstGeom prst="roundRect">
+            <a:avLst>
+              <a:gd name="adj" fmla="val 50000"/>
+            </a:avLst>
+          </a:prstGeom>
+          <a:solidFill>
+            <a:srgbClr val="E8ECF2"/>
+          </a:solidFill>
+          <a:ln/>
+        </p:spPr>
+      </p:sp>
+      <p:sp>
+        <p:nvSpPr>
+          <p:cNvPr id="12" name="Text 8"/>
+          <p:cNvSpPr/>
+          <p:nvPr/>
+        </p:nvSpPr>
+        <p:spPr>
+          <a:xfrm>
+            <a:off x="603504" y="2139696"/>
+            <a:ext cx="1481328" cy="237744"/>
+          </a:xfrm>
+          <a:prstGeom prst="rect">
+            <a:avLst/>
+          </a:prstGeom>
+          <a:noFill/>
+          <a:ln/>
+        </p:spPr>
+        <p:txBody>
+          <a:bodyPr wrap="square" lIns="0" tIns="0" rIns="0" bIns="0" rtlCol="0" anchor="ctr"/>
+          <a:lstStyle/>
+          <a:p>
+            <a:pPr algn="ctr" indent="0" marL="0">
+              <a:buNone/>
+            </a:pPr>
+            <a:r>
+              <a:rPr lang="en-US" sz="850" b="1" dirty="0">
+                <a:solidFill>
+                  <a:srgbClr val="0B1A2E"/>
+                </a:solidFill>
+                <a:latin typeface="Montserrat" pitchFamily="34" charset="0"/>
+                <a:ea typeface="Montserrat" pitchFamily="34" charset="-122"/>
+                <a:cs typeface="Montserrat" pitchFamily="34" charset="-120"/>
+              </a:rPr>
+              <a:t>Changing in PR #3245</a:t>
+            </a:r>
+            <a:endParaRPr lang="en-US" sz="850" dirty="0"/>
+          </a:p>
+        </p:txBody>
+      </p:sp>
+      <p:sp>
+        <p:nvSpPr>
+          <p:cNvPr id="13" name="Text 9"/>
+          <p:cNvSpPr/>
+          <p:nvPr/>
+        </p:nvSpPr>
+        <p:spPr>
+          <a:xfrm>
+            <a:off x="603504" y="2523744"/>
+            <a:ext cx="2316480" cy="1097280"/>
+          </a:xfrm>
+          <a:prstGeom prst="rect">
+            <a:avLst/>
+          </a:prstGeom>
+          <a:noFill/>
+          <a:ln/>
+        </p:spPr>
+        <p:txBody>
+          <a:bodyPr wrap="square" lIns="0" tIns="0" rIns="0" bIns="0" rtlCol="0" anchor="t"/>
+          <a:lstStyle/>
+          <a:p>
+            <a:pPr marL="127000" indent="-127000">
+              <a:spcAft>
+                <a:spcPts val="700"/>
+              </a:spcAft>
+              <a:buSzPct val="100000"/>
+              <a:buChar char="•"/>
+            </a:pPr>
+            <a:r>
+              <a:rPr lang="en-US" sz="1000" dirty="0">
+                <a:solidFill>
+                  <a:srgbClr val="0B1A2E"/>
+                </a:solidFill>
+                <a:latin typeface="Calibri" pitchFamily="34" charset="0"/>
+                <a:ea typeface="Calibri" pitchFamily="34" charset="-122"/>
+                <a:cs typeface="Calibri" pitchFamily="34" charset="-120"/>
+              </a:rPr>
+              <a:t>DaVinci's own screens, in our page</a:t>
+            </a:r>
+            <a:endParaRPr lang="en-US" sz="1000" dirty="0"/>
+          </a:p>
+          <a:p>
+            <a:pPr marL="127000" indent="-127000">
+              <a:spcAft>
+                <a:spcPts val="700"/>
+              </a:spcAft>
+              <a:buSzPct val="100000"/>
+              <a:buChar char="•"/>
+            </a:pPr>
+            <a:r>
+              <a:rPr lang="en-US" sz="1000" dirty="0">
+                <a:solidFill>
+                  <a:srgbClr val="0B1A2E"/>
+                </a:solidFill>
+                <a:latin typeface="Calibri" pitchFamily="34" charset="0"/>
+                <a:ea typeface="Calibri" pitchFamily="34" charset="-122"/>
+                <a:cs typeface="Calibri" pitchFamily="34" charset="-120"/>
+              </a:rPr>
+              <a:t>The BFF mints a DaVinci SDK token</a:t>
+            </a:r>
+            <a:endParaRPr lang="en-US" sz="1000" dirty="0"/>
+          </a:p>
+          <a:p>
+            <a:pPr marL="127000" indent="-127000">
+              <a:spcAft>
+                <a:spcPts val="700"/>
+              </a:spcAft>
+              <a:buSzPct val="100000"/>
+              <a:buChar char="•"/>
+            </a:pPr>
+            <a:r>
+              <a:rPr lang="en-US" sz="1000" dirty="0">
+                <a:solidFill>
+                  <a:srgbClr val="0B1A2E"/>
+                </a:solidFill>
+                <a:latin typeface="Calibri" pitchFamily="34" charset="0"/>
+                <a:ea typeface="Calibri" pitchFamily="34" charset="-122"/>
+                <a:cs typeface="Calibri" pitchFamily="34" charset="-120"/>
+              </a:rPr>
+              <a:t>Needs company, policy and API key</a:t>
+            </a:r>
+            <a:endParaRPr lang="en-US" sz="1000" dirty="0"/>
+          </a:p>
+        </p:txBody>
+      </p:sp>
+      <p:sp>
+        <p:nvSpPr>
+          <p:cNvPr id="14" name="Shape 10"/>
+          <p:cNvSpPr/>
+          <p:nvPr/>
+        </p:nvSpPr>
+        <p:spPr>
+          <a:xfrm>
+            <a:off x="603504" y="3575304"/>
+            <a:ext cx="2298192" cy="0"/>
+          </a:xfrm>
+          <a:prstGeom prst="line">
+            <a:avLst/>
+          </a:prstGeom>
+          <a:noFill/>
+          <a:ln w="9525">
+            <a:solidFill>
+              <a:srgbClr val="D5DBE3"/>
+            </a:solidFill>
+            <a:prstDash val="solid"/>
+          </a:ln>
+        </p:spPr>
+      </p:sp>
+      <p:sp>
+        <p:nvSpPr>
+          <p:cNvPr id="15" name="Text 11"/>
+          <p:cNvSpPr/>
+          <p:nvPr/>
+        </p:nvSpPr>
+        <p:spPr>
+          <a:xfrm>
+            <a:off x="603504" y="3630168"/>
+            <a:ext cx="2298192" cy="274320"/>
+          </a:xfrm>
+          <a:prstGeom prst="rect">
+            <a:avLst/>
+          </a:prstGeom>
+          <a:noFill/>
+          <a:ln/>
+        </p:spPr>
+        <p:txBody>
+          <a:bodyPr wrap="square" lIns="0" tIns="0" rIns="0" bIns="0" rtlCol="0" anchor="ctr"/>
+          <a:lstStyle/>
+          <a:p>
+            <a:pPr indent="0" marL="0">
+              <a:buNone/>
+            </a:pPr>
+            <a:r>
+              <a:rPr lang="en-US" sz="850" b="1" dirty="0">
+                <a:solidFill>
+                  <a:srgbClr val="4F5E71"/>
+                </a:solidFill>
+                <a:latin typeface="Calibri" pitchFamily="34" charset="0"/>
+                <a:ea typeface="Calibri" pitchFamily="34" charset="-122"/>
+                <a:cs typeface="Calibri" pitchFamily="34" charset="-120"/>
+              </a:rPr>
+              <a:t>/davinci-login-guide</a:t>
+            </a:r>
+            <a:endParaRPr lang="en-US" sz="850" dirty="0"/>
+          </a:p>
+        </p:txBody>
+      </p:sp>
+      <p:sp>
+        <p:nvSpPr>
+          <p:cNvPr id="16" name="Shape 12"/>
+          <p:cNvSpPr/>
+          <p:nvPr/>
+        </p:nvSpPr>
+        <p:spPr>
+          <a:xfrm>
+            <a:off x="3276600" y="1481328"/>
+            <a:ext cx="2590800" cy="2514600"/>
+          </a:xfrm>
+          <a:prstGeom prst="rect">
+            <a:avLst/>
+          </a:prstGeom>
+          <a:solidFill>
+            <a:srgbClr val="FFFFFF"/>
+          </a:solidFill>
+          <a:ln w="9525">
+            <a:solidFill>
+              <a:srgbClr val="D5DBE3"/>
+            </a:solidFill>
+            <a:prstDash val="solid"/>
+          </a:ln>
+        </p:spPr>
+      </p:sp>
+      <p:sp>
+        <p:nvSpPr>
+          <p:cNvPr id="17" name="Shape 13"/>
+          <p:cNvSpPr/>
+          <p:nvPr/>
+        </p:nvSpPr>
+        <p:spPr>
+          <a:xfrm>
+            <a:off x="3422904" y="1627632"/>
+            <a:ext cx="384048" cy="384048"/>
+          </a:xfrm>
+          <a:prstGeom prst="ellipse">
+            <a:avLst/>
+          </a:prstGeom>
+          <a:solidFill>
+            <a:srgbClr val="0B1A2E"/>
+          </a:solidFill>
+          <a:ln/>
+        </p:spPr>
+      </p:sp>
+      <p:pic>
+        <p:nvPicPr>
+          <p:cNvPr id="18" name="Image 1" descr="preencoded.png">    </p:cNvPr>
+          <p:cNvPicPr>
+            <a:picLocks noChangeAspect="1"/>
+          </p:cNvPicPr>
+          <p:nvPr/>
+        </p:nvPicPr>
+        <p:blipFill>
+          <a:blip r:embed="rId2"/>
+          <a:stretch>
+            <a:fillRect/>
+          </a:stretch>
+        </p:blipFill>
+        <p:spPr>
+          <a:xfrm>
+            <a:off x="3526597" y="1731325"/>
+            <a:ext cx="176662" cy="176662"/>
+          </a:xfrm>
+          <a:prstGeom prst="rect">
+            <a:avLst/>
+          </a:prstGeom>
+        </p:spPr>
+      </p:pic>
+      <p:sp>
+        <p:nvSpPr>
+          <p:cNvPr id="19" name="Text 14"/>
+          <p:cNvSpPr/>
+          <p:nvPr/>
+        </p:nvSpPr>
+        <p:spPr>
+          <a:xfrm>
+            <a:off x="3898392" y="1627632"/>
+            <a:ext cx="1859280" cy="384048"/>
+          </a:xfrm>
+          <a:prstGeom prst="rect">
+            <a:avLst/>
+          </a:prstGeom>
+          <a:noFill/>
+          <a:ln/>
+        </p:spPr>
+        <p:txBody>
+          <a:bodyPr wrap="square" lIns="0" tIns="0" rIns="0" bIns="0" rtlCol="0" anchor="ctr"/>
+          <a:lstStyle/>
+          <a:p>
+            <a:pPr indent="0" marL="0">
+              <a:buNone/>
+            </a:pPr>
+            <a:r>
+              <a:rPr lang="en-US" sz="1200" b="1" dirty="0">
+                <a:solidFill>
+                  <a:srgbClr val="0B1A2E"/>
+                </a:solidFill>
+                <a:latin typeface="Montserrat" pitchFamily="34" charset="0"/>
+                <a:ea typeface="Montserrat" pitchFamily="34" charset="-122"/>
+                <a:cs typeface="Montserrat" pitchFamily="34" charset="-120"/>
+              </a:rPr>
+              <a:t>Orchestration SDK</a:t>
+            </a:r>
+            <a:endParaRPr lang="en-US" sz="1200" dirty="0"/>
+          </a:p>
+        </p:txBody>
+      </p:sp>
+      <p:sp>
+        <p:nvSpPr>
+          <p:cNvPr id="20" name="Shape 15"/>
+          <p:cNvSpPr/>
+          <p:nvPr/>
+        </p:nvSpPr>
+        <p:spPr>
+          <a:xfrm>
+            <a:off x="3422904" y="2139696"/>
+            <a:ext cx="515722" cy="237744"/>
+          </a:xfrm>
+          <a:prstGeom prst="roundRect">
+            <a:avLst>
+              <a:gd name="adj" fmla="val 50000"/>
+            </a:avLst>
+          </a:prstGeom>
+          <a:solidFill>
+            <a:srgbClr val="E8ECF2"/>
+          </a:solidFill>
+          <a:ln/>
+        </p:spPr>
+      </p:sp>
+      <p:sp>
+        <p:nvSpPr>
+          <p:cNvPr id="21" name="Text 16"/>
+          <p:cNvSpPr/>
+          <p:nvPr/>
+        </p:nvSpPr>
+        <p:spPr>
+          <a:xfrm>
+            <a:off x="3422904" y="2139696"/>
+            <a:ext cx="515722" cy="237744"/>
+          </a:xfrm>
+          <a:prstGeom prst="rect">
+            <a:avLst/>
+          </a:prstGeom>
+          <a:noFill/>
+          <a:ln/>
+        </p:spPr>
+        <p:txBody>
+          <a:bodyPr wrap="square" lIns="0" tIns="0" rIns="0" bIns="0" rtlCol="0" anchor="ctr"/>
+          <a:lstStyle/>
+          <a:p>
+            <a:pPr algn="ctr" indent="0" marL="0">
+              <a:buNone/>
+            </a:pPr>
+            <a:r>
+              <a:rPr lang="en-US" sz="850" b="1" dirty="0">
+                <a:solidFill>
+                  <a:srgbClr val="0B1A2E"/>
+                </a:solidFill>
+                <a:latin typeface="Montserrat" pitchFamily="34" charset="0"/>
+                <a:ea typeface="Montserrat" pitchFamily="34" charset="-122"/>
+                <a:cs typeface="Montserrat" pitchFamily="34" charset="-120"/>
+              </a:rPr>
+              <a:t>Live</a:t>
+            </a:r>
+            <a:endParaRPr lang="en-US" sz="850" dirty="0"/>
+          </a:p>
+        </p:txBody>
+      </p:sp>
+      <p:sp>
+        <p:nvSpPr>
+          <p:cNvPr id="22" name="Text 17"/>
+          <p:cNvSpPr/>
+          <p:nvPr/>
+        </p:nvSpPr>
+        <p:spPr>
+          <a:xfrm>
+            <a:off x="3422904" y="2523744"/>
+            <a:ext cx="2316480" cy="1097280"/>
+          </a:xfrm>
+          <a:prstGeom prst="rect">
+            <a:avLst/>
+          </a:prstGeom>
+          <a:noFill/>
+          <a:ln/>
+        </p:spPr>
+        <p:txBody>
+          <a:bodyPr wrap="square" lIns="0" tIns="0" rIns="0" bIns="0" rtlCol="0" anchor="t"/>
+          <a:lstStyle/>
+          <a:p>
+            <a:pPr marL="127000" indent="-127000">
+              <a:spcAft>
+                <a:spcPts val="700"/>
+              </a:spcAft>
+              <a:buSzPct val="100000"/>
+              <a:buChar char="•"/>
+            </a:pPr>
+            <a:r>
+              <a:rPr lang="en-US" sz="1000" dirty="0">
+                <a:solidFill>
+                  <a:srgbClr val="0B1A2E"/>
+                </a:solidFill>
+                <a:latin typeface="Calibri" pitchFamily="34" charset="0"/>
+                <a:ea typeface="Calibri" pitchFamily="34" charset="-122"/>
+                <a:cs typeface="Calibri" pitchFamily="34" charset="-120"/>
+              </a:rPr>
+              <a:t>Your own form, built from collectors</a:t>
+            </a:r>
+            <a:endParaRPr lang="en-US" sz="1000" dirty="0"/>
+          </a:p>
+          <a:p>
+            <a:pPr marL="127000" indent="-127000">
+              <a:spcAft>
+                <a:spcPts val="700"/>
+              </a:spcAft>
+              <a:buSzPct val="100000"/>
+              <a:buChar char="•"/>
+            </a:pPr>
+            <a:r>
+              <a:rPr lang="en-US" sz="1000" dirty="0">
+                <a:solidFill>
+                  <a:srgbClr val="0B1A2E"/>
+                </a:solidFill>
+                <a:latin typeface="Calibri" pitchFamily="34" charset="0"/>
+                <a:ea typeface="Calibri" pitchFamily="34" charset="-122"/>
+                <a:cs typeface="Calibri" pitchFamily="34" charset="-120"/>
+              </a:rPr>
+              <a:t>pi.flow returns JSON, not redirects</a:t>
+            </a:r>
+            <a:endParaRPr lang="en-US" sz="1000" dirty="0"/>
+          </a:p>
+          <a:p>
+            <a:pPr marL="127000" indent="-127000">
+              <a:spcAft>
+                <a:spcPts val="700"/>
+              </a:spcAft>
+              <a:buSzPct val="100000"/>
+              <a:buChar char="•"/>
+            </a:pPr>
+            <a:r>
+              <a:rPr lang="en-US" sz="1000" dirty="0">
+                <a:solidFill>
+                  <a:srgbClr val="0B1A2E"/>
+                </a:solidFill>
+                <a:latin typeface="Calibri" pitchFamily="34" charset="0"/>
+                <a:ea typeface="Calibri" pitchFamily="34" charset="-122"/>
+                <a:cs typeface="Calibri" pitchFamily="34" charset="-120"/>
+              </a:rPr>
+              <a:t>Public PKCE client, no secret</a:t>
+            </a:r>
+            <a:endParaRPr lang="en-US" sz="1000" dirty="0"/>
+          </a:p>
+        </p:txBody>
+      </p:sp>
+      <p:sp>
+        <p:nvSpPr>
+          <p:cNvPr id="23" name="Shape 18"/>
+          <p:cNvSpPr/>
+          <p:nvPr/>
+        </p:nvSpPr>
+        <p:spPr>
+          <a:xfrm>
+            <a:off x="3422904" y="3575304"/>
+            <a:ext cx="2298192" cy="0"/>
+          </a:xfrm>
+          <a:prstGeom prst="line">
+            <a:avLst/>
+          </a:prstGeom>
+          <a:noFill/>
+          <a:ln w="9525">
+            <a:solidFill>
+              <a:srgbClr val="D5DBE3"/>
+            </a:solidFill>
+            <a:prstDash val="solid"/>
+          </a:ln>
+        </p:spPr>
+      </p:sp>
+      <p:sp>
+        <p:nvSpPr>
+          <p:cNvPr id="24" name="Text 19"/>
+          <p:cNvSpPr/>
+          <p:nvPr/>
+        </p:nvSpPr>
+        <p:spPr>
+          <a:xfrm>
+            <a:off x="3422904" y="3630168"/>
+            <a:ext cx="2298192" cy="274320"/>
+          </a:xfrm>
+          <a:prstGeom prst="rect">
+            <a:avLst/>
+          </a:prstGeom>
+          <a:noFill/>
+          <a:ln/>
+        </p:spPr>
+        <p:txBody>
+          <a:bodyPr wrap="square" lIns="0" tIns="0" rIns="0" bIns="0" rtlCol="0" anchor="ctr"/>
+          <a:lstStyle/>
+          <a:p>
+            <a:pPr indent="0" marL="0">
+              <a:buNone/>
+            </a:pPr>
+            <a:r>
+              <a:rPr lang="en-US" sz="850" b="1" dirty="0">
+                <a:solidFill>
+                  <a:srgbClr val="4F5E71"/>
+                </a:solidFill>
+                <a:latin typeface="Calibri" pitchFamily="34" charset="0"/>
+                <a:ea typeface="Calibri" pitchFamily="34" charset="-122"/>
+                <a:cs typeface="Calibri" pitchFamily="34" charset="-120"/>
+              </a:rPr>
+              <a:t>/davinci-sdk-login · /orchestration-sdk</a:t>
+            </a:r>
+            <a:endParaRPr lang="en-US" sz="850" dirty="0"/>
+          </a:p>
+        </p:txBody>
+      </p:sp>
+      <p:sp>
+        <p:nvSpPr>
+          <p:cNvPr id="25" name="Shape 20"/>
+          <p:cNvSpPr/>
+          <p:nvPr/>
+        </p:nvSpPr>
+        <p:spPr>
+          <a:xfrm>
+            <a:off x="6096000" y="1481328"/>
+            <a:ext cx="2590800" cy="2514600"/>
+          </a:xfrm>
+          <a:prstGeom prst="rect">
+            <a:avLst/>
+          </a:prstGeom>
+          <a:solidFill>
+            <a:srgbClr val="FFFFFF"/>
+          </a:solidFill>
+          <a:ln w="9525">
+            <a:solidFill>
+              <a:srgbClr val="D5DBE3"/>
+            </a:solidFill>
+            <a:prstDash val="solid"/>
+          </a:ln>
+        </p:spPr>
+      </p:sp>
+      <p:sp>
+        <p:nvSpPr>
+          <p:cNvPr id="26" name="Shape 21"/>
+          <p:cNvSpPr/>
+          <p:nvPr/>
+        </p:nvSpPr>
+        <p:spPr>
+          <a:xfrm>
+            <a:off x="6242304" y="1627632"/>
+            <a:ext cx="384048" cy="384048"/>
+          </a:xfrm>
+          <a:prstGeom prst="ellipse">
+            <a:avLst/>
+          </a:prstGeom>
+          <a:solidFill>
+            <a:srgbClr val="0B1A2E"/>
+          </a:solidFill>
+          <a:ln/>
+        </p:spPr>
+      </p:sp>
+      <p:pic>
+        <p:nvPicPr>
+          <p:cNvPr id="27" name="Image 2" descr="preencoded.png">    </p:cNvPr>
+          <p:cNvPicPr>
+            <a:picLocks noChangeAspect="1"/>
+          </p:cNvPicPr>
+          <p:nvPr/>
+        </p:nvPicPr>
+        <p:blipFill>
+          <a:blip r:embed="rId3"/>
+          <a:stretch>
+            <a:fillRect/>
+          </a:stretch>
+        </p:blipFill>
+        <p:spPr>
+          <a:xfrm>
+            <a:off x="6345997" y="1731325"/>
+            <a:ext cx="176662" cy="176662"/>
+          </a:xfrm>
+          <a:prstGeom prst="rect">
+            <a:avLst/>
+          </a:prstGeom>
+        </p:spPr>
+      </p:pic>
+      <p:sp>
+        <p:nvSpPr>
+          <p:cNvPr id="28" name="Text 22"/>
+          <p:cNvSpPr/>
+          <p:nvPr/>
+        </p:nvSpPr>
+        <p:spPr>
+          <a:xfrm>
+            <a:off x="6717792" y="1627632"/>
+            <a:ext cx="1859280" cy="384048"/>
+          </a:xfrm>
+          <a:prstGeom prst="rect">
+            <a:avLst/>
+          </a:prstGeom>
+          <a:noFill/>
+          <a:ln/>
+        </p:spPr>
+        <p:txBody>
+          <a:bodyPr wrap="square" lIns="0" tIns="0" rIns="0" bIns="0" rtlCol="0" anchor="ctr"/>
+          <a:lstStyle/>
+          <a:p>
+            <a:pPr indent="0" marL="0">
+              <a:buNone/>
+            </a:pPr>
+            <a:r>
+              <a:rPr lang="en-US" sz="1200" b="1" dirty="0">
+                <a:solidFill>
+                  <a:srgbClr val="0B1A2E"/>
+                </a:solidFill>
+                <a:latin typeface="Montserrat" pitchFamily="34" charset="0"/>
+                <a:ea typeface="Montserrat" pitchFamily="34" charset="-122"/>
+                <a:cs typeface="Montserrat" pitchFamily="34" charset="-120"/>
+              </a:rPr>
+              <a:t>Transaction step-up</a:t>
+            </a:r>
+            <a:endParaRPr lang="en-US" sz="1200" dirty="0"/>
+          </a:p>
+        </p:txBody>
+      </p:sp>
+      <p:sp>
+        <p:nvSpPr>
+          <p:cNvPr id="29" name="Shape 23"/>
+          <p:cNvSpPr/>
+          <p:nvPr/>
+        </p:nvSpPr>
+        <p:spPr>
+          <a:xfrm>
+            <a:off x="6242304" y="2139696"/>
+            <a:ext cx="1119226" cy="237744"/>
+          </a:xfrm>
+          <a:prstGeom prst="roundRect">
+            <a:avLst>
+              <a:gd name="adj" fmla="val 50000"/>
+            </a:avLst>
+          </a:prstGeom>
+          <a:solidFill>
+            <a:srgbClr val="E8ECF2"/>
+          </a:solidFill>
+          <a:ln/>
+        </p:spPr>
+      </p:sp>
+      <p:sp>
+        <p:nvSpPr>
+          <p:cNvPr id="30" name="Text 24"/>
+          <p:cNvSpPr/>
+          <p:nvPr/>
+        </p:nvSpPr>
+        <p:spPr>
+          <a:xfrm>
+            <a:off x="6242304" y="2139696"/>
+            <a:ext cx="1119226" cy="237744"/>
+          </a:xfrm>
+          <a:prstGeom prst="rect">
+            <a:avLst/>
+          </a:prstGeom>
+          <a:noFill/>
+          <a:ln/>
+        </p:spPr>
+        <p:txBody>
+          <a:bodyPr wrap="square" lIns="0" tIns="0" rIns="0" bIns="0" rtlCol="0" anchor="ctr"/>
+          <a:lstStyle/>
+          <a:p>
+            <a:pPr algn="ctr" indent="0" marL="0">
+              <a:buNone/>
+            </a:pPr>
+            <a:r>
+              <a:rPr lang="en-US" sz="850" b="1" dirty="0">
+                <a:solidFill>
+                  <a:srgbClr val="C8102E"/>
+                </a:solidFill>
+                <a:latin typeface="Montserrat" pitchFamily="34" charset="0"/>
+                <a:ea typeface="Montserrat" pitchFamily="34" charset="-122"/>
+                <a:cs typeface="Montserrat" pitchFamily="34" charset="-120"/>
+              </a:rPr>
+              <a:t>Off by default</a:t>
+            </a:r>
+            <a:endParaRPr lang="en-US" sz="850" dirty="0"/>
+          </a:p>
+        </p:txBody>
+      </p:sp>
+      <p:sp>
+        <p:nvSpPr>
+          <p:cNvPr id="31" name="Text 25"/>
+          <p:cNvSpPr/>
+          <p:nvPr/>
+        </p:nvSpPr>
+        <p:spPr>
+          <a:xfrm>
+            <a:off x="6242304" y="2523744"/>
+            <a:ext cx="2316480" cy="1097280"/>
+          </a:xfrm>
+          <a:prstGeom prst="rect">
+            <a:avLst/>
+          </a:prstGeom>
+          <a:noFill/>
+          <a:ln/>
+        </p:spPr>
+        <p:txBody>
+          <a:bodyPr wrap="square" lIns="0" tIns="0" rIns="0" bIns="0" rtlCol="0" anchor="t"/>
+          <a:lstStyle/>
+          <a:p>
+            <a:pPr marL="127000" indent="-127000">
+              <a:spcAft>
+                <a:spcPts val="700"/>
+              </a:spcAft>
+              <a:buSzPct val="100000"/>
+              <a:buChar char="•"/>
+            </a:pPr>
+            <a:r>
+              <a:rPr lang="en-US" sz="1000" dirty="0">
+                <a:solidFill>
+                  <a:srgbClr val="0B1A2E"/>
+                </a:solidFill>
+                <a:latin typeface="Calibri" pitchFamily="34" charset="0"/>
+                <a:ea typeface="Calibri" pitchFamily="34" charset="-122"/>
+                <a:cs typeface="Calibri" pitchFamily="34" charset="-120"/>
+              </a:rPr>
+              <a:t>Payment step-up runs a DaVinci flow</a:t>
+            </a:r>
+            <a:endParaRPr lang="en-US" sz="1000" dirty="0"/>
+          </a:p>
+          <a:p>
+            <a:pPr marL="127000" indent="-127000">
+              <a:spcAft>
+                <a:spcPts val="700"/>
+              </a:spcAft>
+              <a:buSzPct val="100000"/>
+              <a:buChar char="•"/>
+            </a:pPr>
+            <a:r>
+              <a:rPr lang="en-US" sz="1000" dirty="0">
+                <a:solidFill>
+                  <a:srgbClr val="0B1A2E"/>
+                </a:solidFill>
+                <a:latin typeface="Calibri" pitchFamily="34" charset="0"/>
+                <a:ea typeface="Calibri" pitchFamily="34" charset="-122"/>
+                <a:cs typeface="Calibri" pitchFamily="34" charset="-120"/>
+              </a:rPr>
+              <a:t>SSO, Protect risk, MFA, Authorize</a:t>
+            </a:r>
+            <a:endParaRPr lang="en-US" sz="1000" dirty="0"/>
+          </a:p>
+          <a:p>
+            <a:pPr marL="127000" indent="-127000">
+              <a:spcAft>
+                <a:spcPts val="700"/>
+              </a:spcAft>
+              <a:buSzPct val="100000"/>
+              <a:buChar char="•"/>
+            </a:pPr>
+            <a:r>
+              <a:rPr lang="en-US" sz="1000" dirty="0">
+                <a:solidFill>
+                  <a:srgbClr val="0B1A2E"/>
+                </a:solidFill>
+                <a:latin typeface="Calibri" pitchFamily="34" charset="0"/>
+                <a:ea typeface="Calibri" pitchFamily="34" charset="-122"/>
+                <a:cs typeface="Calibri" pitchFamily="34" charset="-120"/>
+              </a:rPr>
+              <a:t>Falls back to the built-in OTP/MFA</a:t>
+            </a:r>
+            <a:endParaRPr lang="en-US" sz="1000" dirty="0"/>
+          </a:p>
+        </p:txBody>
+      </p:sp>
+      <p:sp>
+        <p:nvSpPr>
+          <p:cNvPr id="32" name="Shape 26"/>
+          <p:cNvSpPr/>
+          <p:nvPr/>
+        </p:nvSpPr>
+        <p:spPr>
+          <a:xfrm>
+            <a:off x="6242304" y="3575304"/>
+            <a:ext cx="2298192" cy="0"/>
+          </a:xfrm>
+          <a:prstGeom prst="line">
+            <a:avLst/>
+          </a:prstGeom>
+          <a:noFill/>
+          <a:ln w="9525">
+            <a:solidFill>
+              <a:srgbClr val="D5DBE3"/>
+            </a:solidFill>
+            <a:prstDash val="solid"/>
+          </a:ln>
+        </p:spPr>
+      </p:sp>
+      <p:sp>
+        <p:nvSpPr>
+          <p:cNvPr id="33" name="Text 27"/>
+          <p:cNvSpPr/>
+          <p:nvPr/>
+        </p:nvSpPr>
+        <p:spPr>
+          <a:xfrm>
+            <a:off x="6242304" y="3630168"/>
+            <a:ext cx="2298192" cy="274320"/>
+          </a:xfrm>
+          <a:prstGeom prst="rect">
+            <a:avLst/>
+          </a:prstGeom>
+          <a:noFill/>
+          <a:ln/>
+        </p:spPr>
+        <p:txBody>
+          <a:bodyPr wrap="square" lIns="0" tIns="0" rIns="0" bIns="0" rtlCol="0" anchor="ctr"/>
+          <a:lstStyle/>
+          <a:p>
+            <a:pPr indent="0" marL="0">
+              <a:buNone/>
+            </a:pPr>
+            <a:r>
+              <a:rPr lang="en-US" sz="850" b="1" dirty="0">
+                <a:solidFill>
+                  <a:srgbClr val="4F5E71"/>
+                </a:solidFill>
+                <a:latin typeface="Calibri" pitchFamily="34" charset="0"/>
+                <a:ea typeface="Calibri" pitchFamily="34" charset="-122"/>
+                <a:cs typeface="Calibri" pitchFamily="34" charset="-120"/>
+              </a:rPr>
+              <a:t>/davinci-orchestration (flag off)</a:t>
+            </a:r>
+            <a:endParaRPr lang="en-US" sz="850" dirty="0"/>
+          </a:p>
+        </p:txBody>
+      </p:sp>
+      <p:sp>
+        <p:nvSpPr>
+          <p:cNvPr id="34" name="Shape 28"/>
+          <p:cNvSpPr/>
+          <p:nvPr/>
+        </p:nvSpPr>
+        <p:spPr>
+          <a:xfrm>
+            <a:off x="457200" y="4315968"/>
+            <a:ext cx="8229600" cy="329184"/>
+          </a:xfrm>
+          <a:prstGeom prst="rect">
+            <a:avLst/>
+          </a:prstGeom>
+          <a:solidFill>
+            <a:srgbClr val="E8ECF2"/>
+          </a:solidFill>
+          <a:ln w="9525">
+            <a:solidFill>
+              <a:srgbClr val="D5DBE3"/>
+            </a:solidFill>
+            <a:prstDash val="solid"/>
+          </a:ln>
+        </p:spPr>
+      </p:sp>
+      <p:sp>
+        <p:nvSpPr>
+          <p:cNvPr id="35" name="Text 29"/>
+          <p:cNvSpPr/>
+          <p:nvPr/>
+        </p:nvSpPr>
+        <p:spPr>
+          <a:xfrm>
+            <a:off x="594360" y="4315968"/>
+            <a:ext cx="7955280" cy="329184"/>
+          </a:xfrm>
+          <a:prstGeom prst="rect">
+            <a:avLst/>
+          </a:prstGeom>
+          <a:noFill/>
+          <a:ln/>
+        </p:spPr>
+        <p:txBody>
+          <a:bodyPr wrap="square" lIns="0" tIns="0" rIns="0" bIns="0" rtlCol="0" anchor="ctr"/>
+          <a:lstStyle/>
+          <a:p>
+            <a:pPr indent="0" marL="0">
+              <a:buNone/>
+            </a:pPr>
+            <a:r>
+              <a:rPr lang="en-US" sz="1050" b="1" dirty="0">
+                <a:solidFill>
+                  <a:srgbClr val="0B1A2E"/>
+                </a:solidFill>
+                <a:latin typeface="Calibri" pitchFamily="34" charset="0"/>
+                <a:ea typeface="Calibri" pitchFamily="34" charset="-122"/>
+                <a:cs typeface="Calibri" pitchFamily="34" charset="-120"/>
+              </a:rPr>
+              <a:t>Also:  </a:t>
+            </a:r>
+            <a:pPr indent="0" marL="0">
+              <a:buNone/>
+            </a:pPr>
+            <a:r>
+              <a:rPr lang="en-US" sz="1050" dirty="0">
+                <a:solidFill>
+                  <a:srgbClr val="0B1A2E"/>
+                </a:solidFill>
+                <a:latin typeface="Calibri" pitchFamily="34" charset="0"/>
+                <a:ea typeface="Calibri" pitchFamily="34" charset="-122"/>
+                <a:cs typeface="Calibri" pitchFamily="34" charset="-120"/>
+              </a:rPr>
+              <a:t>Verified Trust (UC37) can add a DaVinci-issued credential to agent handoffs; ADMIN10–12 list DaVinci flows</a:t>
+            </a:r>
+            <a:endParaRPr lang="en-US" sz="1050" dirty="0"/>
+          </a:p>
+        </p:txBody>
+      </p:sp>
+    </p:spTree>
+  </p:cSld>
+  <p:clrMapOvr>
+    <a:masterClrMapping/>
+  </p:clrMapOvr>
+</p:sld>
+</file>
+
+<file path=ppt/slides/slide14.xml><?xml version="1.0" encoding="utf-8"?>
+<p:sld xmlns:a="http://schemas.openxmlformats.org/drawingml/2006/main" xmlns:r="http://schemas.openxmlformats.org/officeDocument/2006/relationships" xmlns:p="http://schemas.openxmlformats.org/presentationml/2006/main">
+  <p:cSld name="Slide 14">
+    <p:bg>
+      <p:bgPr>
+        <a:solidFill>
+          <a:srgbClr val="F4F5F7"/>
+        </a:solidFill>
+      </p:bgPr>
+    </p:bg>
+    <p:spTree>
+      <p:nvGrpSpPr>
+        <p:cNvPr id="1" name=""/>
+        <p:cNvGrpSpPr/>
+        <p:nvPr/>
+      </p:nvGrpSpPr>
+      <p:grpSpPr>
+        <a:xfrm>
+          <a:off x="0" y="0"/>
+          <a:ext cx="0" cy="0"/>
+          <a:chOff x="0" y="0"/>
+          <a:chExt cx="0" cy="0"/>
+        </a:xfrm>
+      </p:grpSpPr>
+      <p:sp>
+        <p:nvSpPr>
+          <p:cNvPr id="2" name="Shape 0"/>
+          <p:cNvSpPr/>
+          <p:nvPr/>
+        </p:nvSpPr>
+        <p:spPr>
+          <a:xfrm>
+            <a:off x="457200" y="384048"/>
+            <a:ext cx="100584" cy="100584"/>
+          </a:xfrm>
+          <a:prstGeom prst="rect">
+            <a:avLst/>
+          </a:prstGeom>
+          <a:solidFill>
+            <a:srgbClr val="C8102E"/>
+          </a:solidFill>
+          <a:ln/>
+        </p:spPr>
+      </p:sp>
+      <p:sp>
+        <p:nvSpPr>
+          <p:cNvPr id="3" name="Text 1"/>
+          <p:cNvSpPr/>
+          <p:nvPr/>
+        </p:nvSpPr>
+        <p:spPr>
+          <a:xfrm>
+            <a:off x="640080" y="301752"/>
+            <a:ext cx="6400800" cy="274320"/>
+          </a:xfrm>
+          <a:prstGeom prst="rect">
+            <a:avLst/>
+          </a:prstGeom>
+          <a:noFill/>
+          <a:ln/>
+        </p:spPr>
+        <p:txBody>
+          <a:bodyPr wrap="square" lIns="0" tIns="0" rIns="0" bIns="0" rtlCol="0" anchor="ctr"/>
+          <a:lstStyle/>
+          <a:p>
+            <a:pPr indent="0" marL="0">
+              <a:buNone/>
+            </a:pPr>
+            <a:r>
+              <a:rPr lang="en-US" sz="1000" b="1" spc="300" kern="0" dirty="0">
+                <a:solidFill>
+                  <a:srgbClr val="4F5E71"/>
+                </a:solidFill>
+                <a:latin typeface="Montserrat" pitchFamily="34" charset="0"/>
+                <a:ea typeface="Montserrat" pitchFamily="34" charset="-122"/>
+                <a:cs typeface="Montserrat" pitchFamily="34" charset="-120"/>
+              </a:rPr>
+              <a:t>12  ·  PLATFORM EXTRAS</a:t>
             </a:r>
             <a:endParaRPr lang="en-US" sz="1000" dirty="0"/>
           </a:p>
@@ -12803,7 +14281,7 @@
                 <a:ea typeface="Calibri" pitchFamily="34" charset="-122"/>
                 <a:cs typeface="Calibri" pitchFamily="34" charset="-120"/>
               </a:rPr>
-              <a:t>13</a:t>
+              <a:t>14</a:t>
             </a:r>
             <a:endParaRPr lang="en-US" sz="900" dirty="0"/>
           </a:p>
@@ -14347,9 +15825,9 @@
 </p:sld>
 </file>
 
-<file path=ppt/slides/slide14.xml><?xml version="1.0" encoding="utf-8"?>
+<file path=ppt/slides/slide15.xml><?xml version="1.0" encoding="utf-8"?>
 <p:sld xmlns:a="http://schemas.openxmlformats.org/drawingml/2006/main" xmlns:r="http://schemas.openxmlformats.org/officeDocument/2006/relationships" xmlns:p="http://schemas.openxmlformats.org/presentationml/2006/main">
-  <p:cSld name="Slide 14">
+  <p:cSld name="Slide 15">
     <p:bg>
       <p:bgPr>
         <a:solidFill>
@@ -14424,6 +15902,2326 @@
                 <a:ea typeface="Montserrat" pitchFamily="34" charset="-122"/>
                 <a:cs typeface="Montserrat" pitchFamily="34" charset="-120"/>
               </a:rPr>
+              <a:t>13  ·  SECRETS VAULT</a:t>
+            </a:r>
+            <a:endParaRPr lang="en-US" sz="1000" dirty="0"/>
+          </a:p>
+        </p:txBody>
+      </p:sp>
+      <p:sp>
+        <p:nvSpPr>
+          <p:cNvPr id="4" name="Text 2"/>
+          <p:cNvSpPr/>
+          <p:nvPr/>
+        </p:nvSpPr>
+        <p:spPr>
+          <a:xfrm>
+            <a:off x="457200" y="603504"/>
+            <a:ext cx="8229600" cy="786384"/>
+          </a:xfrm>
+          <a:prstGeom prst="rect">
+            <a:avLst/>
+          </a:prstGeom>
+          <a:noFill/>
+          <a:ln/>
+        </p:spPr>
+        <p:txBody>
+          <a:bodyPr wrap="square" lIns="0" tIns="0" rIns="0" bIns="0" rtlCol="0" anchor="t"/>
+          <a:lstStyle/>
+          <a:p>
+            <a:pPr indent="0" marL="0">
+              <a:buNone/>
+            </a:pPr>
+            <a:r>
+              <a:rPr lang="en-US" sz="2100" b="1" dirty="0">
+                <a:solidFill>
+                  <a:srgbClr val="0B1A2E"/>
+                </a:solidFill>
+                <a:latin typeface="Montserrat" pitchFamily="34" charset="0"/>
+                <a:ea typeface="Montserrat" pitchFamily="34" charset="-122"/>
+                <a:cs typeface="Montserrat" pitchFamily="34" charset="-120"/>
+              </a:rPr>
+              <a:t>Secrets sit in one encrypted vault file, and rotation and Kubernetes both run through it</a:t>
+            </a:r>
+            <a:endParaRPr lang="en-US" sz="2100" dirty="0"/>
+          </a:p>
+        </p:txBody>
+      </p:sp>
+      <p:sp>
+        <p:nvSpPr>
+          <p:cNvPr id="5" name="Text 3"/>
+          <p:cNvSpPr/>
+          <p:nvPr/>
+        </p:nvSpPr>
+        <p:spPr>
+          <a:xfrm>
+            <a:off x="8229600" y="4846320"/>
+            <a:ext cx="457200" cy="182880"/>
+          </a:xfrm>
+          <a:prstGeom prst="rect">
+            <a:avLst/>
+          </a:prstGeom>
+          <a:noFill/>
+          <a:ln/>
+        </p:spPr>
+        <p:txBody>
+          <a:bodyPr wrap="square" lIns="0" tIns="0" rIns="0" bIns="0" rtlCol="0" anchor="ctr"/>
+          <a:lstStyle/>
+          <a:p>
+            <a:pPr algn="r" indent="0" marL="0">
+              <a:buNone/>
+            </a:pPr>
+            <a:r>
+              <a:rPr lang="en-US" sz="900" dirty="0">
+                <a:solidFill>
+                  <a:srgbClr val="4F5E71"/>
+                </a:solidFill>
+                <a:latin typeface="Calibri" pitchFamily="34" charset="0"/>
+                <a:ea typeface="Calibri" pitchFamily="34" charset="-122"/>
+                <a:cs typeface="Calibri" pitchFamily="34" charset="-120"/>
+              </a:rPr>
+              <a:t>15</a:t>
+            </a:r>
+            <a:endParaRPr lang="en-US" sz="900" dirty="0"/>
+          </a:p>
+        </p:txBody>
+      </p:sp>
+      <p:sp>
+        <p:nvSpPr>
+          <p:cNvPr id="7" name="Shape 4"/>
+          <p:cNvSpPr/>
+          <p:nvPr/>
+        </p:nvSpPr>
+        <p:spPr>
+          <a:xfrm>
+            <a:off x="457200" y="1481328"/>
+            <a:ext cx="4617720" cy="3017520"/>
+          </a:xfrm>
+          <a:prstGeom prst="rect">
+            <a:avLst/>
+          </a:prstGeom>
+          <a:solidFill>
+            <a:srgbClr val="FFFFFF"/>
+          </a:solidFill>
+          <a:ln w="9525">
+            <a:solidFill>
+              <a:srgbClr val="D5DBE3"/>
+            </a:solidFill>
+            <a:prstDash val="solid"/>
+          </a:ln>
+        </p:spPr>
+      </p:sp>
+      <p:sp>
+        <p:nvSpPr>
+          <p:cNvPr id="8" name="Text 5"/>
+          <p:cNvSpPr/>
+          <p:nvPr/>
+        </p:nvSpPr>
+        <p:spPr>
+          <a:xfrm>
+            <a:off x="685800" y="1645920"/>
+            <a:ext cx="4206240" cy="201168"/>
+          </a:xfrm>
+          <a:prstGeom prst="rect">
+            <a:avLst/>
+          </a:prstGeom>
+          <a:noFill/>
+          <a:ln/>
+        </p:spPr>
+        <p:txBody>
+          <a:bodyPr wrap="square" lIns="0" tIns="0" rIns="0" bIns="0" rtlCol="0" anchor="t"/>
+          <a:lstStyle/>
+          <a:p>
+            <a:pPr indent="0" marL="0">
+              <a:buNone/>
+            </a:pPr>
+            <a:r>
+              <a:rPr lang="en-US" sz="900" b="1" spc="200" kern="0" dirty="0">
+                <a:solidFill>
+                  <a:srgbClr val="4F5E71"/>
+                </a:solidFill>
+                <a:latin typeface="Montserrat" pitchFamily="34" charset="0"/>
+                <a:ea typeface="Montserrat" pitchFamily="34" charset="-122"/>
+                <a:cs typeface="Montserrat" pitchFamily="34" charset="-120"/>
+              </a:rPr>
+              <a:t>HOW A SECRET FLOWS</a:t>
+            </a:r>
+            <a:endParaRPr lang="en-US" sz="900" dirty="0"/>
+          </a:p>
+        </p:txBody>
+      </p:sp>
+      <p:sp>
+        <p:nvSpPr>
+          <p:cNvPr id="9" name="Shape 6"/>
+          <p:cNvSpPr/>
+          <p:nvPr/>
+        </p:nvSpPr>
+        <p:spPr>
+          <a:xfrm>
+            <a:off x="658368" y="1956816"/>
+            <a:ext cx="237744" cy="237744"/>
+          </a:xfrm>
+          <a:prstGeom prst="ellipse">
+            <a:avLst/>
+          </a:prstGeom>
+          <a:solidFill>
+            <a:srgbClr val="C8102E"/>
+          </a:solidFill>
+          <a:ln/>
+        </p:spPr>
+      </p:sp>
+      <p:sp>
+        <p:nvSpPr>
+          <p:cNvPr id="10" name="Text 7"/>
+          <p:cNvSpPr/>
+          <p:nvPr/>
+        </p:nvSpPr>
+        <p:spPr>
+          <a:xfrm>
+            <a:off x="658368" y="1956816"/>
+            <a:ext cx="237744" cy="237744"/>
+          </a:xfrm>
+          <a:prstGeom prst="rect">
+            <a:avLst/>
+          </a:prstGeom>
+          <a:noFill/>
+          <a:ln/>
+        </p:spPr>
+        <p:txBody>
+          <a:bodyPr wrap="square" lIns="0" tIns="0" rIns="0" bIns="0" rtlCol="0" anchor="ctr"/>
+          <a:lstStyle/>
+          <a:p>
+            <a:pPr algn="ctr" indent="0" marL="0">
+              <a:buNone/>
+            </a:pPr>
+            <a:r>
+              <a:rPr lang="en-US" sz="900" b="1" dirty="0">
+                <a:solidFill>
+                  <a:srgbClr val="FFFFFF"/>
+                </a:solidFill>
+                <a:latin typeface="Montserrat" pitchFamily="34" charset="0"/>
+                <a:ea typeface="Montserrat" pitchFamily="34" charset="-122"/>
+                <a:cs typeface="Montserrat" pitchFamily="34" charset="-120"/>
+              </a:rPr>
+              <a:t>1</a:t>
+            </a:r>
+            <a:endParaRPr lang="en-US" sz="900" dirty="0"/>
+          </a:p>
+        </p:txBody>
+      </p:sp>
+      <p:sp>
+        <p:nvSpPr>
+          <p:cNvPr id="11" name="Text 8"/>
+          <p:cNvSpPr/>
+          <p:nvPr/>
+        </p:nvSpPr>
+        <p:spPr>
+          <a:xfrm>
+            <a:off x="1024128" y="1938528"/>
+            <a:ext cx="3931920" cy="274320"/>
+          </a:xfrm>
+          <a:prstGeom prst="rect">
+            <a:avLst/>
+          </a:prstGeom>
+          <a:noFill/>
+          <a:ln/>
+        </p:spPr>
+        <p:txBody>
+          <a:bodyPr wrap="square" lIns="0" tIns="0" rIns="0" bIns="0" rtlCol="0" anchor="ctr"/>
+          <a:lstStyle/>
+          <a:p>
+            <a:pPr indent="0" marL="0">
+              <a:buNone/>
+            </a:pPr>
+            <a:r>
+              <a:rPr lang="en-US" sz="1050" b="1" dirty="0">
+                <a:solidFill>
+                  <a:srgbClr val="0B1A2E"/>
+                </a:solidFill>
+                <a:latin typeface="Calibri" pitchFamily="34" charset="0"/>
+                <a:ea typeface="Calibri" pitchFamily="34" charset="-122"/>
+                <a:cs typeface="Calibri" pitchFamily="34" charset="-120"/>
+              </a:rPr>
+              <a:t>Store   </a:t>
+            </a:r>
+            <a:pPr indent="0" marL="0">
+              <a:buNone/>
+            </a:pPr>
+            <a:r>
+              <a:rPr lang="en-US" sz="1050" dirty="0">
+                <a:solidFill>
+                  <a:srgbClr val="0B1A2E"/>
+                </a:solidFill>
+                <a:latin typeface="Calibri" pitchFamily="34" charset="0"/>
+                <a:ea typeface="Calibri" pitchFamily="34" charset="-122"/>
+                <a:cs typeface="Calibri" pitchFamily="34" charset="-120"/>
+              </a:rPr>
+              <a:t>npm run vault:set writes secrets.vault</a:t>
+            </a:r>
+            <a:endParaRPr lang="en-US" sz="1050" dirty="0"/>
+          </a:p>
+        </p:txBody>
+      </p:sp>
+      <p:sp>
+        <p:nvSpPr>
+          <p:cNvPr id="12" name="Shape 9"/>
+          <p:cNvSpPr/>
+          <p:nvPr/>
+        </p:nvSpPr>
+        <p:spPr>
+          <a:xfrm>
+            <a:off x="658368" y="2359152"/>
+            <a:ext cx="237744" cy="237744"/>
+          </a:xfrm>
+          <a:prstGeom prst="ellipse">
+            <a:avLst/>
+          </a:prstGeom>
+          <a:solidFill>
+            <a:srgbClr val="C8102E"/>
+          </a:solidFill>
+          <a:ln/>
+        </p:spPr>
+      </p:sp>
+      <p:sp>
+        <p:nvSpPr>
+          <p:cNvPr id="13" name="Text 10"/>
+          <p:cNvSpPr/>
+          <p:nvPr/>
+        </p:nvSpPr>
+        <p:spPr>
+          <a:xfrm>
+            <a:off x="658368" y="2359152"/>
+            <a:ext cx="237744" cy="237744"/>
+          </a:xfrm>
+          <a:prstGeom prst="rect">
+            <a:avLst/>
+          </a:prstGeom>
+          <a:noFill/>
+          <a:ln/>
+        </p:spPr>
+        <p:txBody>
+          <a:bodyPr wrap="square" lIns="0" tIns="0" rIns="0" bIns="0" rtlCol="0" anchor="ctr"/>
+          <a:lstStyle/>
+          <a:p>
+            <a:pPr algn="ctr" indent="0" marL="0">
+              <a:buNone/>
+            </a:pPr>
+            <a:r>
+              <a:rPr lang="en-US" sz="900" b="1" dirty="0">
+                <a:solidFill>
+                  <a:srgbClr val="FFFFFF"/>
+                </a:solidFill>
+                <a:latin typeface="Montserrat" pitchFamily="34" charset="0"/>
+                <a:ea typeface="Montserrat" pitchFamily="34" charset="-122"/>
+                <a:cs typeface="Montserrat" pitchFamily="34" charset="-120"/>
+              </a:rPr>
+              <a:t>2</a:t>
+            </a:r>
+            <a:endParaRPr lang="en-US" sz="900" dirty="0"/>
+          </a:p>
+        </p:txBody>
+      </p:sp>
+      <p:sp>
+        <p:nvSpPr>
+          <p:cNvPr id="14" name="Text 11"/>
+          <p:cNvSpPr/>
+          <p:nvPr/>
+        </p:nvSpPr>
+        <p:spPr>
+          <a:xfrm>
+            <a:off x="1024128" y="2340864"/>
+            <a:ext cx="3931920" cy="274320"/>
+          </a:xfrm>
+          <a:prstGeom prst="rect">
+            <a:avLst/>
+          </a:prstGeom>
+          <a:noFill/>
+          <a:ln/>
+        </p:spPr>
+        <p:txBody>
+          <a:bodyPr wrap="square" lIns="0" tIns="0" rIns="0" bIns="0" rtlCol="0" anchor="ctr"/>
+          <a:lstStyle/>
+          <a:p>
+            <a:pPr indent="0" marL="0">
+              <a:buNone/>
+            </a:pPr>
+            <a:r>
+              <a:rPr lang="en-US" sz="1050" b="1" dirty="0">
+                <a:solidFill>
+                  <a:srgbClr val="0B1A2E"/>
+                </a:solidFill>
+                <a:latin typeface="Calibri" pitchFamily="34" charset="0"/>
+                <a:ea typeface="Calibri" pitchFamily="34" charset="-122"/>
+                <a:cs typeface="Calibri" pitchFamily="34" charset="-120"/>
+              </a:rPr>
+              <a:t>Unlock   </a:t>
+            </a:r>
+            <a:pPr indent="0" marL="0">
+              <a:buNone/>
+            </a:pPr>
+            <a:r>
+              <a:rPr lang="en-US" sz="1050" dirty="0">
+                <a:solidFill>
+                  <a:srgbClr val="0B1A2E"/>
+                </a:solidFill>
+                <a:latin typeface="Calibri" pitchFamily="34" charset="0"/>
+                <a:ea typeface="Calibri" pitchFamily="34" charset="-122"/>
+                <a:cs typeface="Calibri" pitchFamily="34" charset="-120"/>
+              </a:rPr>
+              <a:t>VAULT_PASSWORD from demo_api_server/.env</a:t>
+            </a:r>
+            <a:endParaRPr lang="en-US" sz="1050" dirty="0"/>
+          </a:p>
+        </p:txBody>
+      </p:sp>
+      <p:sp>
+        <p:nvSpPr>
+          <p:cNvPr id="15" name="Shape 12"/>
+          <p:cNvSpPr/>
+          <p:nvPr/>
+        </p:nvSpPr>
+        <p:spPr>
+          <a:xfrm>
+            <a:off x="658368" y="2761488"/>
+            <a:ext cx="237744" cy="237744"/>
+          </a:xfrm>
+          <a:prstGeom prst="ellipse">
+            <a:avLst/>
+          </a:prstGeom>
+          <a:solidFill>
+            <a:srgbClr val="C8102E"/>
+          </a:solidFill>
+          <a:ln/>
+        </p:spPr>
+      </p:sp>
+      <p:sp>
+        <p:nvSpPr>
+          <p:cNvPr id="16" name="Text 13"/>
+          <p:cNvSpPr/>
+          <p:nvPr/>
+        </p:nvSpPr>
+        <p:spPr>
+          <a:xfrm>
+            <a:off x="658368" y="2761488"/>
+            <a:ext cx="237744" cy="237744"/>
+          </a:xfrm>
+          <a:prstGeom prst="rect">
+            <a:avLst/>
+          </a:prstGeom>
+          <a:noFill/>
+          <a:ln/>
+        </p:spPr>
+        <p:txBody>
+          <a:bodyPr wrap="square" lIns="0" tIns="0" rIns="0" bIns="0" rtlCol="0" anchor="ctr"/>
+          <a:lstStyle/>
+          <a:p>
+            <a:pPr algn="ctr" indent="0" marL="0">
+              <a:buNone/>
+            </a:pPr>
+            <a:r>
+              <a:rPr lang="en-US" sz="900" b="1" dirty="0">
+                <a:solidFill>
+                  <a:srgbClr val="FFFFFF"/>
+                </a:solidFill>
+                <a:latin typeface="Montserrat" pitchFamily="34" charset="0"/>
+                <a:ea typeface="Montserrat" pitchFamily="34" charset="-122"/>
+                <a:cs typeface="Montserrat" pitchFamily="34" charset="-120"/>
+              </a:rPr>
+              <a:t>3</a:t>
+            </a:r>
+            <a:endParaRPr lang="en-US" sz="900" dirty="0"/>
+          </a:p>
+        </p:txBody>
+      </p:sp>
+      <p:sp>
+        <p:nvSpPr>
+          <p:cNvPr id="17" name="Text 14"/>
+          <p:cNvSpPr/>
+          <p:nvPr/>
+        </p:nvSpPr>
+        <p:spPr>
+          <a:xfrm>
+            <a:off x="1024128" y="2743200"/>
+            <a:ext cx="3931920" cy="274320"/>
+          </a:xfrm>
+          <a:prstGeom prst="rect">
+            <a:avLst/>
+          </a:prstGeom>
+          <a:noFill/>
+          <a:ln/>
+        </p:spPr>
+        <p:txBody>
+          <a:bodyPr wrap="square" lIns="0" tIns="0" rIns="0" bIns="0" rtlCol="0" anchor="ctr"/>
+          <a:lstStyle/>
+          <a:p>
+            <a:pPr indent="0" marL="0">
+              <a:buNone/>
+            </a:pPr>
+            <a:r>
+              <a:rPr lang="en-US" sz="1050" b="1" dirty="0">
+                <a:solidFill>
+                  <a:srgbClr val="0B1A2E"/>
+                </a:solidFill>
+                <a:latin typeface="Calibri" pitchFamily="34" charset="0"/>
+                <a:ea typeface="Calibri" pitchFamily="34" charset="-122"/>
+                <a:cs typeface="Calibri" pitchFamily="34" charset="-120"/>
+              </a:rPr>
+              <a:t>Boot   </a:t>
+            </a:r>
+            <a:pPr indent="0" marL="0">
+              <a:buNone/>
+            </a:pPr>
+            <a:r>
+              <a:rPr lang="en-US" sz="1050" dirty="0">
+                <a:solidFill>
+                  <a:srgbClr val="0B1A2E"/>
+                </a:solidFill>
+                <a:latin typeface="Calibri" pitchFamily="34" charset="0"/>
+                <a:ea typeface="Calibri" pitchFamily="34" charset="-122"/>
+                <a:cs typeface="Calibri" pitchFamily="34" charset="-120"/>
+              </a:rPr>
+              <a:t>The BFF loads entries into memory, drops the password</a:t>
+            </a:r>
+            <a:endParaRPr lang="en-US" sz="1050" dirty="0"/>
+          </a:p>
+        </p:txBody>
+      </p:sp>
+      <p:sp>
+        <p:nvSpPr>
+          <p:cNvPr id="18" name="Shape 15"/>
+          <p:cNvSpPr/>
+          <p:nvPr/>
+        </p:nvSpPr>
+        <p:spPr>
+          <a:xfrm>
+            <a:off x="658368" y="3163824"/>
+            <a:ext cx="237744" cy="237744"/>
+          </a:xfrm>
+          <a:prstGeom prst="ellipse">
+            <a:avLst/>
+          </a:prstGeom>
+          <a:solidFill>
+            <a:srgbClr val="C8102E"/>
+          </a:solidFill>
+          <a:ln/>
+        </p:spPr>
+      </p:sp>
+      <p:sp>
+        <p:nvSpPr>
+          <p:cNvPr id="19" name="Text 16"/>
+          <p:cNvSpPr/>
+          <p:nvPr/>
+        </p:nvSpPr>
+        <p:spPr>
+          <a:xfrm>
+            <a:off x="658368" y="3163824"/>
+            <a:ext cx="237744" cy="237744"/>
+          </a:xfrm>
+          <a:prstGeom prst="rect">
+            <a:avLst/>
+          </a:prstGeom>
+          <a:noFill/>
+          <a:ln/>
+        </p:spPr>
+        <p:txBody>
+          <a:bodyPr wrap="square" lIns="0" tIns="0" rIns="0" bIns="0" rtlCol="0" anchor="ctr"/>
+          <a:lstStyle/>
+          <a:p>
+            <a:pPr algn="ctr" indent="0" marL="0">
+              <a:buNone/>
+            </a:pPr>
+            <a:r>
+              <a:rPr lang="en-US" sz="900" b="1" dirty="0">
+                <a:solidFill>
+                  <a:srgbClr val="FFFFFF"/>
+                </a:solidFill>
+                <a:latin typeface="Montserrat" pitchFamily="34" charset="0"/>
+                <a:ea typeface="Montserrat" pitchFamily="34" charset="-122"/>
+                <a:cs typeface="Montserrat" pitchFamily="34" charset="-120"/>
+              </a:rPr>
+              <a:t>4</a:t>
+            </a:r>
+            <a:endParaRPr lang="en-US" sz="900" dirty="0"/>
+          </a:p>
+        </p:txBody>
+      </p:sp>
+      <p:sp>
+        <p:nvSpPr>
+          <p:cNvPr id="20" name="Text 17"/>
+          <p:cNvSpPr/>
+          <p:nvPr/>
+        </p:nvSpPr>
+        <p:spPr>
+          <a:xfrm>
+            <a:off x="1024128" y="3145536"/>
+            <a:ext cx="3931920" cy="274320"/>
+          </a:xfrm>
+          <a:prstGeom prst="rect">
+            <a:avLst/>
+          </a:prstGeom>
+          <a:noFill/>
+          <a:ln/>
+        </p:spPr>
+        <p:txBody>
+          <a:bodyPr wrap="square" lIns="0" tIns="0" rIns="0" bIns="0" rtlCol="0" anchor="ctr"/>
+          <a:lstStyle/>
+          <a:p>
+            <a:pPr indent="0" marL="0">
+              <a:buNone/>
+            </a:pPr>
+            <a:r>
+              <a:rPr lang="en-US" sz="1050" b="1" dirty="0">
+                <a:solidFill>
+                  <a:srgbClr val="0B1A2E"/>
+                </a:solidFill>
+                <a:latin typeface="Calibri" pitchFamily="34" charset="0"/>
+                <a:ea typeface="Calibri" pitchFamily="34" charset="-122"/>
+                <a:cs typeface="Calibri" pitchFamily="34" charset="-120"/>
+              </a:rPr>
+              <a:t>Resolve   </a:t>
+            </a:r>
+            <a:pPr indent="0" marL="0">
+              <a:buNone/>
+            </a:pPr>
+            <a:r>
+              <a:rPr lang="en-US" sz="1050" dirty="0">
+                <a:solidFill>
+                  <a:srgbClr val="0B1A2E"/>
+                </a:solidFill>
+                <a:latin typeface="Calibri" pitchFamily="34" charset="0"/>
+                <a:ea typeface="Calibri" pitchFamily="34" charset="-122"/>
+                <a:cs typeface="Calibri" pitchFamily="34" charset="-120"/>
+              </a:rPr>
+              <a:t>.env wins over the vault; the vault over LMDB</a:t>
+            </a:r>
+            <a:endParaRPr lang="en-US" sz="1050" dirty="0"/>
+          </a:p>
+        </p:txBody>
+      </p:sp>
+      <p:sp>
+        <p:nvSpPr>
+          <p:cNvPr id="21" name="Shape 18"/>
+          <p:cNvSpPr/>
+          <p:nvPr/>
+        </p:nvSpPr>
+        <p:spPr>
+          <a:xfrm>
+            <a:off x="658368" y="3566160"/>
+            <a:ext cx="237744" cy="237744"/>
+          </a:xfrm>
+          <a:prstGeom prst="ellipse">
+            <a:avLst/>
+          </a:prstGeom>
+          <a:solidFill>
+            <a:srgbClr val="C8102E"/>
+          </a:solidFill>
+          <a:ln/>
+        </p:spPr>
+      </p:sp>
+      <p:sp>
+        <p:nvSpPr>
+          <p:cNvPr id="22" name="Text 19"/>
+          <p:cNvSpPr/>
+          <p:nvPr/>
+        </p:nvSpPr>
+        <p:spPr>
+          <a:xfrm>
+            <a:off x="658368" y="3566160"/>
+            <a:ext cx="237744" cy="237744"/>
+          </a:xfrm>
+          <a:prstGeom prst="rect">
+            <a:avLst/>
+          </a:prstGeom>
+          <a:noFill/>
+          <a:ln/>
+        </p:spPr>
+        <p:txBody>
+          <a:bodyPr wrap="square" lIns="0" tIns="0" rIns="0" bIns="0" rtlCol="0" anchor="ctr"/>
+          <a:lstStyle/>
+          <a:p>
+            <a:pPr algn="ctr" indent="0" marL="0">
+              <a:buNone/>
+            </a:pPr>
+            <a:r>
+              <a:rPr lang="en-US" sz="900" b="1" dirty="0">
+                <a:solidFill>
+                  <a:srgbClr val="FFFFFF"/>
+                </a:solidFill>
+                <a:latin typeface="Montserrat" pitchFamily="34" charset="0"/>
+                <a:ea typeface="Montserrat" pitchFamily="34" charset="-122"/>
+                <a:cs typeface="Montserrat" pitchFamily="34" charset="-120"/>
+              </a:rPr>
+              <a:t>5</a:t>
+            </a:r>
+            <a:endParaRPr lang="en-US" sz="900" dirty="0"/>
+          </a:p>
+        </p:txBody>
+      </p:sp>
+      <p:sp>
+        <p:nvSpPr>
+          <p:cNvPr id="23" name="Text 20"/>
+          <p:cNvSpPr/>
+          <p:nvPr/>
+        </p:nvSpPr>
+        <p:spPr>
+          <a:xfrm>
+            <a:off x="1024128" y="3547872"/>
+            <a:ext cx="3931920" cy="274320"/>
+          </a:xfrm>
+          <a:prstGeom prst="rect">
+            <a:avLst/>
+          </a:prstGeom>
+          <a:noFill/>
+          <a:ln/>
+        </p:spPr>
+        <p:txBody>
+          <a:bodyPr wrap="square" lIns="0" tIns="0" rIns="0" bIns="0" rtlCol="0" anchor="ctr"/>
+          <a:lstStyle/>
+          <a:p>
+            <a:pPr indent="0" marL="0">
+              <a:buNone/>
+            </a:pPr>
+            <a:r>
+              <a:rPr lang="en-US" sz="1050" b="1" dirty="0">
+                <a:solidFill>
+                  <a:srgbClr val="0B1A2E"/>
+                </a:solidFill>
+                <a:latin typeface="Calibri" pitchFamily="34" charset="0"/>
+                <a:ea typeface="Calibri" pitchFamily="34" charset="-122"/>
+                <a:cs typeface="Calibri" pitchFamily="34" charset="-120"/>
+              </a:rPr>
+              <a:t>Fan out   </a:t>
+            </a:r>
+            <a:pPr indent="0" marL="0">
+              <a:buNone/>
+            </a:pPr>
+            <a:r>
+              <a:rPr lang="en-US" sz="1050" dirty="0">
+                <a:solidFill>
+                  <a:srgbClr val="0B1A2E"/>
+                </a:solidFill>
+                <a:latin typeface="Calibri" pitchFamily="34" charset="0"/>
+                <a:ea typeface="Calibri" pitchFamily="34" charset="-122"/>
+                <a:cs typeface="Calibri" pitchFamily="34" charset="-120"/>
+              </a:rPr>
+              <a:t>Per-service .env files and Kubernetes secrets</a:t>
+            </a:r>
+            <a:endParaRPr lang="en-US" sz="1050" dirty="0"/>
+          </a:p>
+        </p:txBody>
+      </p:sp>
+      <p:sp>
+        <p:nvSpPr>
+          <p:cNvPr id="24" name="Shape 21"/>
+          <p:cNvSpPr/>
+          <p:nvPr/>
+        </p:nvSpPr>
+        <p:spPr>
+          <a:xfrm>
+            <a:off x="658368" y="3968496"/>
+            <a:ext cx="237744" cy="237744"/>
+          </a:xfrm>
+          <a:prstGeom prst="ellipse">
+            <a:avLst/>
+          </a:prstGeom>
+          <a:solidFill>
+            <a:srgbClr val="C8102E"/>
+          </a:solidFill>
+          <a:ln/>
+        </p:spPr>
+      </p:sp>
+      <p:sp>
+        <p:nvSpPr>
+          <p:cNvPr id="25" name="Text 22"/>
+          <p:cNvSpPr/>
+          <p:nvPr/>
+        </p:nvSpPr>
+        <p:spPr>
+          <a:xfrm>
+            <a:off x="658368" y="3968496"/>
+            <a:ext cx="237744" cy="237744"/>
+          </a:xfrm>
+          <a:prstGeom prst="rect">
+            <a:avLst/>
+          </a:prstGeom>
+          <a:noFill/>
+          <a:ln/>
+        </p:spPr>
+        <p:txBody>
+          <a:bodyPr wrap="square" lIns="0" tIns="0" rIns="0" bIns="0" rtlCol="0" anchor="ctr"/>
+          <a:lstStyle/>
+          <a:p>
+            <a:pPr algn="ctr" indent="0" marL="0">
+              <a:buNone/>
+            </a:pPr>
+            <a:r>
+              <a:rPr lang="en-US" sz="900" b="1" dirty="0">
+                <a:solidFill>
+                  <a:srgbClr val="FFFFFF"/>
+                </a:solidFill>
+                <a:latin typeface="Montserrat" pitchFamily="34" charset="0"/>
+                <a:ea typeface="Montserrat" pitchFamily="34" charset="-122"/>
+                <a:cs typeface="Montserrat" pitchFamily="34" charset="-120"/>
+              </a:rPr>
+              <a:t>6</a:t>
+            </a:r>
+            <a:endParaRPr lang="en-US" sz="900" dirty="0"/>
+          </a:p>
+        </p:txBody>
+      </p:sp>
+      <p:sp>
+        <p:nvSpPr>
+          <p:cNvPr id="26" name="Text 23"/>
+          <p:cNvSpPr/>
+          <p:nvPr/>
+        </p:nvSpPr>
+        <p:spPr>
+          <a:xfrm>
+            <a:off x="1024128" y="3950208"/>
+            <a:ext cx="3931920" cy="274320"/>
+          </a:xfrm>
+          <a:prstGeom prst="rect">
+            <a:avLst/>
+          </a:prstGeom>
+          <a:noFill/>
+          <a:ln/>
+        </p:spPr>
+        <p:txBody>
+          <a:bodyPr wrap="square" lIns="0" tIns="0" rIns="0" bIns="0" rtlCol="0" anchor="ctr"/>
+          <a:lstStyle/>
+          <a:p>
+            <a:pPr indent="0" marL="0">
+              <a:buNone/>
+            </a:pPr>
+            <a:r>
+              <a:rPr lang="en-US" sz="1050" b="1" dirty="0">
+                <a:solidFill>
+                  <a:srgbClr val="0B1A2E"/>
+                </a:solidFill>
+                <a:latin typeface="Calibri" pitchFamily="34" charset="0"/>
+                <a:ea typeface="Calibri" pitchFamily="34" charset="-122"/>
+                <a:cs typeface="Calibri" pitchFamily="34" charset="-120"/>
+              </a:rPr>
+              <a:t>Rotate   </a:t>
+            </a:r>
+            <a:pPr indent="0" marL="0">
+              <a:buNone/>
+            </a:pPr>
+            <a:r>
+              <a:rPr lang="en-US" sz="1050" dirty="0">
+                <a:solidFill>
+                  <a:srgbClr val="0B1A2E"/>
+                </a:solidFill>
+                <a:latin typeface="Calibri" pitchFamily="34" charset="0"/>
+                <a:ea typeface="Calibri" pitchFamily="34" charset="-122"/>
+                <a:cs typeface="Calibri" pitchFamily="34" charset="-120"/>
+              </a:rPr>
+              <a:t>/secret-rotation writes the new secret back</a:t>
+            </a:r>
+            <a:endParaRPr lang="en-US" sz="1050" dirty="0"/>
+          </a:p>
+        </p:txBody>
+      </p:sp>
+      <p:sp>
+        <p:nvSpPr>
+          <p:cNvPr id="27" name="Shape 24"/>
+          <p:cNvSpPr/>
+          <p:nvPr/>
+        </p:nvSpPr>
+        <p:spPr>
+          <a:xfrm>
+            <a:off x="5303520" y="1481328"/>
+            <a:ext cx="3383280" cy="3017520"/>
+          </a:xfrm>
+          <a:prstGeom prst="rect">
+            <a:avLst/>
+          </a:prstGeom>
+          <a:solidFill>
+            <a:srgbClr val="0B1A2E"/>
+          </a:solidFill>
+          <a:ln/>
+        </p:spPr>
+      </p:sp>
+      <p:sp>
+        <p:nvSpPr>
+          <p:cNvPr id="28" name="Text 25"/>
+          <p:cNvSpPr/>
+          <p:nvPr/>
+        </p:nvSpPr>
+        <p:spPr>
+          <a:xfrm>
+            <a:off x="5532120" y="1645920"/>
+            <a:ext cx="2926080" cy="201168"/>
+          </a:xfrm>
+          <a:prstGeom prst="rect">
+            <a:avLst/>
+          </a:prstGeom>
+          <a:noFill/>
+          <a:ln/>
+        </p:spPr>
+        <p:txBody>
+          <a:bodyPr wrap="square" lIns="0" tIns="0" rIns="0" bIns="0" rtlCol="0" anchor="t"/>
+          <a:lstStyle/>
+          <a:p>
+            <a:pPr indent="0" marL="0">
+              <a:buNone/>
+            </a:pPr>
+            <a:r>
+              <a:rPr lang="en-US" sz="900" b="1" spc="200" kern="0" dirty="0">
+                <a:solidFill>
+                  <a:srgbClr val="B9C6D6"/>
+                </a:solidFill>
+                <a:latin typeface="Montserrat" pitchFamily="34" charset="0"/>
+                <a:ea typeface="Montserrat" pitchFamily="34" charset="-122"/>
+                <a:cs typeface="Montserrat" pitchFamily="34" charset="-120"/>
+              </a:rPr>
+              <a:t>BUILT ON</a:t>
+            </a:r>
+            <a:endParaRPr lang="en-US" sz="900" dirty="0"/>
+          </a:p>
+        </p:txBody>
+      </p:sp>
+      <p:sp>
+        <p:nvSpPr>
+          <p:cNvPr id="29" name="Text 26"/>
+          <p:cNvSpPr/>
+          <p:nvPr/>
+        </p:nvSpPr>
+        <p:spPr>
+          <a:xfrm>
+            <a:off x="5532120" y="1920240"/>
+            <a:ext cx="2971800" cy="1097280"/>
+          </a:xfrm>
+          <a:prstGeom prst="rect">
+            <a:avLst/>
+          </a:prstGeom>
+          <a:noFill/>
+          <a:ln/>
+        </p:spPr>
+        <p:txBody>
+          <a:bodyPr wrap="square" lIns="0" tIns="0" rIns="0" bIns="0" rtlCol="0" anchor="t"/>
+          <a:lstStyle/>
+          <a:p>
+            <a:pPr marL="152400" indent="-152400">
+              <a:spcAft>
+                <a:spcPts val="500"/>
+              </a:spcAft>
+              <a:buSzPct val="100000"/>
+              <a:buChar char="•"/>
+            </a:pPr>
+            <a:r>
+              <a:rPr lang="en-US" sz="1050" dirty="0">
+                <a:solidFill>
+                  <a:srgbClr val="FFFFFF"/>
+                </a:solidFill>
+                <a:latin typeface="Calibri" pitchFamily="34" charset="0"/>
+                <a:ea typeface="Calibri" pitchFamily="34" charset="-122"/>
+                <a:cs typeface="Calibri" pitchFamily="34" charset="-120"/>
+              </a:rPr>
+              <a:t>Argon2id key derivation (argon2)</a:t>
+            </a:r>
+            <a:endParaRPr lang="en-US" sz="1050" dirty="0"/>
+          </a:p>
+          <a:p>
+            <a:pPr marL="152400" indent="-152400">
+              <a:spcAft>
+                <a:spcPts val="500"/>
+              </a:spcAft>
+              <a:buSzPct val="100000"/>
+              <a:buChar char="•"/>
+            </a:pPr>
+            <a:r>
+              <a:rPr lang="en-US" sz="1050" dirty="0">
+                <a:solidFill>
+                  <a:srgbClr val="FFFFFF"/>
+                </a:solidFill>
+                <a:latin typeface="Calibri" pitchFamily="34" charset="0"/>
+                <a:ea typeface="Calibri" pitchFamily="34" charset="-122"/>
+                <a:cs typeface="Calibri" pitchFamily="34" charset="-120"/>
+              </a:rPr>
+              <a:t>AES-256-GCM per entry (Node crypto)</a:t>
+            </a:r>
+            <a:endParaRPr lang="en-US" sz="1050" dirty="0"/>
+          </a:p>
+          <a:p>
+            <a:pPr marL="152400" indent="-152400">
+              <a:spcAft>
+                <a:spcPts val="500"/>
+              </a:spcAft>
+              <a:buSzPct val="100000"/>
+              <a:buChar char="•"/>
+            </a:pPr>
+            <a:r>
+              <a:rPr lang="en-US" sz="1050" dirty="0">
+                <a:solidFill>
+                  <a:srgbClr val="FFFFFF"/>
+                </a:solidFill>
+                <a:latin typeface="Calibri" pitchFamily="34" charset="0"/>
+                <a:ea typeface="Calibri" pitchFamily="34" charset="-122"/>
+                <a:cs typeface="Calibri" pitchFamily="34" charset="-120"/>
+              </a:rPr>
+              <a:t>An HMAC over the whole file</a:t>
+            </a:r>
+            <a:endParaRPr lang="en-US" sz="1050" dirty="0"/>
+          </a:p>
+          <a:p>
+            <a:pPr marL="152400" indent="-152400">
+              <a:spcAft>
+                <a:spcPts val="500"/>
+              </a:spcAft>
+              <a:buSzPct val="100000"/>
+              <a:buChar char="•"/>
+            </a:pPr>
+            <a:r>
+              <a:rPr lang="en-US" sz="1050" dirty="0">
+                <a:solidFill>
+                  <a:srgbClr val="FFFFFF"/>
+                </a:solidFill>
+                <a:latin typeface="Calibri" pitchFamily="34" charset="0"/>
+                <a:ea typeface="Calibri" pitchFamily="34" charset="-122"/>
+                <a:cs typeface="Calibri" pitchFamily="34" charset="-120"/>
+              </a:rPr>
+              <a:t>Homegrown, gitignored, mode 0600</a:t>
+            </a:r>
+            <a:endParaRPr lang="en-US" sz="1050" dirty="0"/>
+          </a:p>
+        </p:txBody>
+      </p:sp>
+      <p:sp>
+        <p:nvSpPr>
+          <p:cNvPr id="30" name="Text 27"/>
+          <p:cNvSpPr/>
+          <p:nvPr/>
+        </p:nvSpPr>
+        <p:spPr>
+          <a:xfrm>
+            <a:off x="5532120" y="3063240"/>
+            <a:ext cx="2926080" cy="201168"/>
+          </a:xfrm>
+          <a:prstGeom prst="rect">
+            <a:avLst/>
+          </a:prstGeom>
+          <a:noFill/>
+          <a:ln/>
+        </p:spPr>
+        <p:txBody>
+          <a:bodyPr wrap="square" lIns="0" tIns="0" rIns="0" bIns="0" rtlCol="0" anchor="t"/>
+          <a:lstStyle/>
+          <a:p>
+            <a:pPr indent="0" marL="0">
+              <a:buNone/>
+            </a:pPr>
+            <a:r>
+              <a:rPr lang="en-US" sz="900" b="1" spc="200" kern="0" dirty="0">
+                <a:solidFill>
+                  <a:srgbClr val="B9C6D6"/>
+                </a:solidFill>
+                <a:latin typeface="Montserrat" pitchFamily="34" charset="0"/>
+                <a:ea typeface="Montserrat" pitchFamily="34" charset="-122"/>
+                <a:cs typeface="Montserrat" pitchFamily="34" charset="-120"/>
+              </a:rPr>
+              <a:t>WATCH OUT</a:t>
+            </a:r>
+            <a:endParaRPr lang="en-US" sz="900" dirty="0"/>
+          </a:p>
+        </p:txBody>
+      </p:sp>
+      <p:sp>
+        <p:nvSpPr>
+          <p:cNvPr id="31" name="Text 28"/>
+          <p:cNvSpPr/>
+          <p:nvPr/>
+        </p:nvSpPr>
+        <p:spPr>
+          <a:xfrm>
+            <a:off x="5532120" y="3337560"/>
+            <a:ext cx="2971800" cy="548640"/>
+          </a:xfrm>
+          <a:prstGeom prst="rect">
+            <a:avLst/>
+          </a:prstGeom>
+          <a:noFill/>
+          <a:ln/>
+        </p:spPr>
+        <p:txBody>
+          <a:bodyPr wrap="square" lIns="0" tIns="0" rIns="0" bIns="0" rtlCol="0" anchor="t"/>
+          <a:lstStyle/>
+          <a:p>
+            <a:pPr marL="152400" indent="-152400">
+              <a:spcAft>
+                <a:spcPts val="500"/>
+              </a:spcAft>
+              <a:buSzPct val="100000"/>
+              <a:buChar char="•"/>
+            </a:pPr>
+            <a:r>
+              <a:rPr lang="en-US" sz="1050" dirty="0">
+                <a:solidFill>
+                  <a:srgbClr val="FFFFFF"/>
+                </a:solidFill>
+                <a:latin typeface="Calibri" pitchFamily="34" charset="0"/>
+                <a:ea typeface="Calibri" pitchFamily="34" charset="-122"/>
+                <a:cs typeface="Calibri" pitchFamily="34" charset="-120"/>
+              </a:rPr>
+              <a:t>A stale .env line overrides the vault</a:t>
+            </a:r>
+            <a:endParaRPr lang="en-US" sz="1050" dirty="0"/>
+          </a:p>
+          <a:p>
+            <a:pPr marL="152400" indent="-152400">
+              <a:spcAft>
+                <a:spcPts val="500"/>
+              </a:spcAft>
+              <a:buSzPct val="100000"/>
+              <a:buChar char="•"/>
+            </a:pPr>
+            <a:r>
+              <a:rPr lang="en-US" sz="1050" dirty="0">
+                <a:solidFill>
+                  <a:srgbClr val="FFFFFF"/>
+                </a:solidFill>
+                <a:latin typeface="Calibri" pitchFamily="34" charset="0"/>
+                <a:ea typeface="Calibri" pitchFamily="34" charset="-122"/>
+                <a:cs typeface="Calibri" pitchFamily="34" charset="-120"/>
+              </a:rPr>
+              <a:t>dotenvx is replacing it, service by service</a:t>
+            </a:r>
+            <a:endParaRPr lang="en-US" sz="1050" dirty="0"/>
+          </a:p>
+        </p:txBody>
+      </p:sp>
+    </p:spTree>
+  </p:cSld>
+  <p:clrMapOvr>
+    <a:masterClrMapping/>
+  </p:clrMapOvr>
+</p:sld>
+</file>
+
+<file path=ppt/slides/slide16.xml><?xml version="1.0" encoding="utf-8"?>
+<p:sld xmlns:a="http://schemas.openxmlformats.org/drawingml/2006/main" xmlns:r="http://schemas.openxmlformats.org/officeDocument/2006/relationships" xmlns:p="http://schemas.openxmlformats.org/presentationml/2006/main">
+  <p:cSld name="Slide 16">
+    <p:bg>
+      <p:bgPr>
+        <a:solidFill>
+          <a:srgbClr val="F4F5F7"/>
+        </a:solidFill>
+      </p:bgPr>
+    </p:bg>
+    <p:spTree>
+      <p:nvGrpSpPr>
+        <p:cNvPr id="1" name=""/>
+        <p:cNvGrpSpPr/>
+        <p:nvPr/>
+      </p:nvGrpSpPr>
+      <p:grpSpPr>
+        <a:xfrm>
+          <a:off x="0" y="0"/>
+          <a:ext cx="0" cy="0"/>
+          <a:chOff x="0" y="0"/>
+          <a:chExt cx="0" cy="0"/>
+        </a:xfrm>
+      </p:grpSpPr>
+      <p:sp>
+        <p:nvSpPr>
+          <p:cNvPr id="2" name="Shape 0"/>
+          <p:cNvSpPr/>
+          <p:nvPr/>
+        </p:nvSpPr>
+        <p:spPr>
+          <a:xfrm>
+            <a:off x="457200" y="384048"/>
+            <a:ext cx="100584" cy="100584"/>
+          </a:xfrm>
+          <a:prstGeom prst="rect">
+            <a:avLst/>
+          </a:prstGeom>
+          <a:solidFill>
+            <a:srgbClr val="C8102E"/>
+          </a:solidFill>
+          <a:ln/>
+        </p:spPr>
+      </p:sp>
+      <p:sp>
+        <p:nvSpPr>
+          <p:cNvPr id="3" name="Text 1"/>
+          <p:cNvSpPr/>
+          <p:nvPr/>
+        </p:nvSpPr>
+        <p:spPr>
+          <a:xfrm>
+            <a:off x="640080" y="301752"/>
+            <a:ext cx="6400800" cy="274320"/>
+          </a:xfrm>
+          <a:prstGeom prst="rect">
+            <a:avLst/>
+          </a:prstGeom>
+          <a:noFill/>
+          <a:ln/>
+        </p:spPr>
+        <p:txBody>
+          <a:bodyPr wrap="square" lIns="0" tIns="0" rIns="0" bIns="0" rtlCol="0" anchor="ctr"/>
+          <a:lstStyle/>
+          <a:p>
+            <a:pPr indent="0" marL="0">
+              <a:buNone/>
+            </a:pPr>
+            <a:r>
+              <a:rPr lang="en-US" sz="1000" b="1" spc="300" kern="0" dirty="0">
+                <a:solidFill>
+                  <a:srgbClr val="4F5E71"/>
+                </a:solidFill>
+                <a:latin typeface="Montserrat" pitchFamily="34" charset="0"/>
+                <a:ea typeface="Montserrat" pitchFamily="34" charset="-122"/>
+                <a:cs typeface="Montserrat" pitchFamily="34" charset="-120"/>
+              </a:rPr>
+              <a:t>14  ·  OPEN SOURCE</a:t>
+            </a:r>
+            <a:endParaRPr lang="en-US" sz="1000" dirty="0"/>
+          </a:p>
+        </p:txBody>
+      </p:sp>
+      <p:sp>
+        <p:nvSpPr>
+          <p:cNvPr id="4" name="Text 2"/>
+          <p:cNvSpPr/>
+          <p:nvPr/>
+        </p:nvSpPr>
+        <p:spPr>
+          <a:xfrm>
+            <a:off x="457200" y="603504"/>
+            <a:ext cx="8229600" cy="786384"/>
+          </a:xfrm>
+          <a:prstGeom prst="rect">
+            <a:avLst/>
+          </a:prstGeom>
+          <a:noFill/>
+          <a:ln/>
+        </p:spPr>
+        <p:txBody>
+          <a:bodyPr wrap="square" lIns="0" tIns="0" rIns="0" bIns="0" rtlCol="0" anchor="t"/>
+          <a:lstStyle/>
+          <a:p>
+            <a:pPr indent="0" marL="0">
+              <a:buNone/>
+            </a:pPr>
+            <a:r>
+              <a:rPr lang="en-US" sz="2100" b="1" dirty="0">
+                <a:solidFill>
+                  <a:srgbClr val="0B1A2E"/>
+                </a:solidFill>
+                <a:latin typeface="Montserrat" pitchFamily="34" charset="0"/>
+                <a:ea typeface="Montserrat" pitchFamily="34" charset="-122"/>
+                <a:cs typeface="Montserrat" pitchFamily="34" charset="-120"/>
+              </a:rPr>
+              <a:t>Ping identity wraps a mostly open-source AI stack</a:t>
+            </a:r>
+            <a:endParaRPr lang="en-US" sz="2100" dirty="0"/>
+          </a:p>
+        </p:txBody>
+      </p:sp>
+      <p:sp>
+        <p:nvSpPr>
+          <p:cNvPr id="5" name="Text 3"/>
+          <p:cNvSpPr/>
+          <p:nvPr/>
+        </p:nvSpPr>
+        <p:spPr>
+          <a:xfrm>
+            <a:off x="8229600" y="4846320"/>
+            <a:ext cx="457200" cy="182880"/>
+          </a:xfrm>
+          <a:prstGeom prst="rect">
+            <a:avLst/>
+          </a:prstGeom>
+          <a:noFill/>
+          <a:ln/>
+        </p:spPr>
+        <p:txBody>
+          <a:bodyPr wrap="square" lIns="0" tIns="0" rIns="0" bIns="0" rtlCol="0" anchor="ctr"/>
+          <a:lstStyle/>
+          <a:p>
+            <a:pPr algn="r" indent="0" marL="0">
+              <a:buNone/>
+            </a:pPr>
+            <a:r>
+              <a:rPr lang="en-US" sz="900" dirty="0">
+                <a:solidFill>
+                  <a:srgbClr val="4F5E71"/>
+                </a:solidFill>
+                <a:latin typeface="Calibri" pitchFamily="34" charset="0"/>
+                <a:ea typeface="Calibri" pitchFamily="34" charset="-122"/>
+                <a:cs typeface="Calibri" pitchFamily="34" charset="-120"/>
+              </a:rPr>
+              <a:t>16</a:t>
+            </a:r>
+            <a:endParaRPr lang="en-US" sz="900" dirty="0"/>
+          </a:p>
+        </p:txBody>
+      </p:sp>
+      <p:sp>
+        <p:nvSpPr>
+          <p:cNvPr id="7" name="Shape 4"/>
+          <p:cNvSpPr/>
+          <p:nvPr/>
+        </p:nvSpPr>
+        <p:spPr>
+          <a:xfrm>
+            <a:off x="457200" y="1481328"/>
+            <a:ext cx="2590800" cy="1261872"/>
+          </a:xfrm>
+          <a:prstGeom prst="rect">
+            <a:avLst/>
+          </a:prstGeom>
+          <a:solidFill>
+            <a:srgbClr val="FFFFFF"/>
+          </a:solidFill>
+          <a:ln w="9525">
+            <a:solidFill>
+              <a:srgbClr val="D5DBE3"/>
+            </a:solidFill>
+            <a:prstDash val="solid"/>
+          </a:ln>
+        </p:spPr>
+      </p:sp>
+      <p:sp>
+        <p:nvSpPr>
+          <p:cNvPr id="8" name="Shape 5"/>
+          <p:cNvSpPr/>
+          <p:nvPr/>
+        </p:nvSpPr>
+        <p:spPr>
+          <a:xfrm>
+            <a:off x="585216" y="1591056"/>
+            <a:ext cx="329184" cy="329184"/>
+          </a:xfrm>
+          <a:prstGeom prst="ellipse">
+            <a:avLst/>
+          </a:prstGeom>
+          <a:solidFill>
+            <a:srgbClr val="0B1A2E"/>
+          </a:solidFill>
+          <a:ln/>
+        </p:spPr>
+      </p:sp>
+      <p:pic>
+        <p:nvPicPr>
+          <p:cNvPr id="9" name="Image 0" descr="preencoded.png">    </p:cNvPr>
+          <p:cNvPicPr>
+            <a:picLocks noChangeAspect="1"/>
+          </p:cNvPicPr>
+          <p:nvPr/>
+        </p:nvPicPr>
+        <p:blipFill>
+          <a:blip r:embed="rId1"/>
+          <a:stretch>
+            <a:fillRect/>
+          </a:stretch>
+        </p:blipFill>
+        <p:spPr>
+          <a:xfrm>
+            <a:off x="674096" y="1679936"/>
+            <a:ext cx="151425" cy="151425"/>
+          </a:xfrm>
+          <a:prstGeom prst="rect">
+            <a:avLst/>
+          </a:prstGeom>
+        </p:spPr>
+      </p:pic>
+      <p:sp>
+        <p:nvSpPr>
+          <p:cNvPr id="10" name="Text 6"/>
+          <p:cNvSpPr/>
+          <p:nvPr/>
+        </p:nvSpPr>
+        <p:spPr>
+          <a:xfrm>
+            <a:off x="987552" y="1591056"/>
+            <a:ext cx="1969008" cy="329184"/>
+          </a:xfrm>
+          <a:prstGeom prst="rect">
+            <a:avLst/>
+          </a:prstGeom>
+          <a:noFill/>
+          <a:ln/>
+        </p:spPr>
+        <p:txBody>
+          <a:bodyPr wrap="square" lIns="0" tIns="0" rIns="0" bIns="0" rtlCol="0" anchor="ctr"/>
+          <a:lstStyle/>
+          <a:p>
+            <a:pPr indent="0" marL="0">
+              <a:buNone/>
+            </a:pPr>
+            <a:r>
+              <a:rPr lang="en-US" sz="1100" b="1" dirty="0">
+                <a:solidFill>
+                  <a:srgbClr val="0B1A2E"/>
+                </a:solidFill>
+                <a:latin typeface="Montserrat" pitchFamily="34" charset="0"/>
+                <a:ea typeface="Montserrat" pitchFamily="34" charset="-122"/>
+                <a:cs typeface="Montserrat" pitchFamily="34" charset="-120"/>
+              </a:rPr>
+              <a:t>Agent frameworks</a:t>
+            </a:r>
+            <a:endParaRPr lang="en-US" sz="1100" dirty="0"/>
+          </a:p>
+        </p:txBody>
+      </p:sp>
+      <p:sp>
+        <p:nvSpPr>
+          <p:cNvPr id="11" name="Text 7"/>
+          <p:cNvSpPr/>
+          <p:nvPr/>
+        </p:nvSpPr>
+        <p:spPr>
+          <a:xfrm>
+            <a:off x="585216" y="2011680"/>
+            <a:ext cx="2334768" cy="658368"/>
+          </a:xfrm>
+          <a:prstGeom prst="rect">
+            <a:avLst/>
+          </a:prstGeom>
+          <a:noFill/>
+          <a:ln/>
+        </p:spPr>
+        <p:txBody>
+          <a:bodyPr wrap="square" lIns="0" tIns="0" rIns="0" bIns="0" rtlCol="0" anchor="t"/>
+          <a:lstStyle/>
+          <a:p>
+            <a:pPr indent="0" marL="0">
+              <a:lnSpc>
+                <a:spcPct val="110000"/>
+              </a:lnSpc>
+              <a:buNone/>
+            </a:pPr>
+            <a:r>
+              <a:rPr lang="en-US" sz="950" dirty="0">
+                <a:solidFill>
+                  <a:srgbClr val="0B1A2E"/>
+                </a:solidFill>
+                <a:latin typeface="Calibri" pitchFamily="34" charset="0"/>
+                <a:ea typeface="Calibri" pitchFamily="34" charset="-122"/>
+                <a:cs typeface="Calibri" pitchFamily="34" charset="-120"/>
+              </a:rPr>
+              <a:t>LangChain / LangGraph · OpenAI Agents SDK · Pydantic AI · Mastra · LlamaIndex · Guardrails AI</a:t>
+            </a:r>
+            <a:endParaRPr lang="en-US" sz="950" dirty="0"/>
+          </a:p>
+        </p:txBody>
+      </p:sp>
+      <p:sp>
+        <p:nvSpPr>
+          <p:cNvPr id="12" name="Shape 8"/>
+          <p:cNvSpPr/>
+          <p:nvPr/>
+        </p:nvSpPr>
+        <p:spPr>
+          <a:xfrm>
+            <a:off x="3276600" y="1481328"/>
+            <a:ext cx="2590800" cy="1261872"/>
+          </a:xfrm>
+          <a:prstGeom prst="rect">
+            <a:avLst/>
+          </a:prstGeom>
+          <a:solidFill>
+            <a:srgbClr val="FFFFFF"/>
+          </a:solidFill>
+          <a:ln w="9525">
+            <a:solidFill>
+              <a:srgbClr val="D5DBE3"/>
+            </a:solidFill>
+            <a:prstDash val="solid"/>
+          </a:ln>
+        </p:spPr>
+      </p:sp>
+      <p:sp>
+        <p:nvSpPr>
+          <p:cNvPr id="13" name="Shape 9"/>
+          <p:cNvSpPr/>
+          <p:nvPr/>
+        </p:nvSpPr>
+        <p:spPr>
+          <a:xfrm>
+            <a:off x="3404616" y="1591056"/>
+            <a:ext cx="329184" cy="329184"/>
+          </a:xfrm>
+          <a:prstGeom prst="ellipse">
+            <a:avLst/>
+          </a:prstGeom>
+          <a:solidFill>
+            <a:srgbClr val="0B1A2E"/>
+          </a:solidFill>
+          <a:ln/>
+        </p:spPr>
+      </p:sp>
+      <p:pic>
+        <p:nvPicPr>
+          <p:cNvPr id="14" name="Image 1" descr="preencoded.png">    </p:cNvPr>
+          <p:cNvPicPr>
+            <a:picLocks noChangeAspect="1"/>
+          </p:cNvPicPr>
+          <p:nvPr/>
+        </p:nvPicPr>
+        <p:blipFill>
+          <a:blip r:embed="rId2"/>
+          <a:stretch>
+            <a:fillRect/>
+          </a:stretch>
+        </p:blipFill>
+        <p:spPr>
+          <a:xfrm>
+            <a:off x="3493496" y="1679936"/>
+            <a:ext cx="151425" cy="151425"/>
+          </a:xfrm>
+          <a:prstGeom prst="rect">
+            <a:avLst/>
+          </a:prstGeom>
+        </p:spPr>
+      </p:pic>
+      <p:sp>
+        <p:nvSpPr>
+          <p:cNvPr id="15" name="Text 10"/>
+          <p:cNvSpPr/>
+          <p:nvPr/>
+        </p:nvSpPr>
+        <p:spPr>
+          <a:xfrm>
+            <a:off x="3806952" y="1591056"/>
+            <a:ext cx="1969008" cy="329184"/>
+          </a:xfrm>
+          <a:prstGeom prst="rect">
+            <a:avLst/>
+          </a:prstGeom>
+          <a:noFill/>
+          <a:ln/>
+        </p:spPr>
+        <p:txBody>
+          <a:bodyPr wrap="square" lIns="0" tIns="0" rIns="0" bIns="0" rtlCol="0" anchor="ctr"/>
+          <a:lstStyle/>
+          <a:p>
+            <a:pPr indent="0" marL="0">
+              <a:buNone/>
+            </a:pPr>
+            <a:r>
+              <a:rPr lang="en-US" sz="1100" b="1" dirty="0">
+                <a:solidFill>
+                  <a:srgbClr val="0B1A2E"/>
+                </a:solidFill>
+                <a:latin typeface="Montserrat" pitchFamily="34" charset="0"/>
+                <a:ea typeface="Montserrat" pitchFamily="34" charset="-122"/>
+                <a:cs typeface="Montserrat" pitchFamily="34" charset="-120"/>
+              </a:rPr>
+              <a:t>Protocols and MCP</a:t>
+            </a:r>
+            <a:endParaRPr lang="en-US" sz="1100" dirty="0"/>
+          </a:p>
+        </p:txBody>
+      </p:sp>
+      <p:sp>
+        <p:nvSpPr>
+          <p:cNvPr id="16" name="Text 11"/>
+          <p:cNvSpPr/>
+          <p:nvPr/>
+        </p:nvSpPr>
+        <p:spPr>
+          <a:xfrm>
+            <a:off x="3404616" y="2011680"/>
+            <a:ext cx="2334768" cy="658368"/>
+          </a:xfrm>
+          <a:prstGeom prst="rect">
+            <a:avLst/>
+          </a:prstGeom>
+          <a:noFill/>
+          <a:ln/>
+        </p:spPr>
+        <p:txBody>
+          <a:bodyPr wrap="square" lIns="0" tIns="0" rIns="0" bIns="0" rtlCol="0" anchor="t"/>
+          <a:lstStyle/>
+          <a:p>
+            <a:pPr indent="0" marL="0">
+              <a:lnSpc>
+                <a:spcPct val="110000"/>
+              </a:lnSpc>
+              <a:buNone/>
+            </a:pPr>
+            <a:r>
+              <a:rPr lang="en-US" sz="950" dirty="0">
+                <a:solidFill>
+                  <a:srgbClr val="0B1A2E"/>
+                </a:solidFill>
+                <a:latin typeface="Calibri" pitchFamily="34" charset="0"/>
+                <a:ea typeface="Calibri" pitchFamily="34" charset="-122"/>
+                <a:cs typeface="Calibri" pitchFamily="34" charset="-120"/>
+              </a:rPr>
+              <a:t>MCP TypeScript SDK · FastMCP · A2A JS SDK · AG-UI · weather-mcp · OpenSearch MCP</a:t>
+            </a:r>
+            <a:endParaRPr lang="en-US" sz="950" dirty="0"/>
+          </a:p>
+        </p:txBody>
+      </p:sp>
+      <p:sp>
+        <p:nvSpPr>
+          <p:cNvPr id="17" name="Shape 12"/>
+          <p:cNvSpPr/>
+          <p:nvPr/>
+        </p:nvSpPr>
+        <p:spPr>
+          <a:xfrm>
+            <a:off x="6096000" y="1481328"/>
+            <a:ext cx="2590800" cy="1261872"/>
+          </a:xfrm>
+          <a:prstGeom prst="rect">
+            <a:avLst/>
+          </a:prstGeom>
+          <a:solidFill>
+            <a:srgbClr val="FFFFFF"/>
+          </a:solidFill>
+          <a:ln w="9525">
+            <a:solidFill>
+              <a:srgbClr val="D5DBE3"/>
+            </a:solidFill>
+            <a:prstDash val="solid"/>
+          </a:ln>
+        </p:spPr>
+      </p:sp>
+      <p:sp>
+        <p:nvSpPr>
+          <p:cNvPr id="18" name="Shape 13"/>
+          <p:cNvSpPr/>
+          <p:nvPr/>
+        </p:nvSpPr>
+        <p:spPr>
+          <a:xfrm>
+            <a:off x="6224016" y="1591056"/>
+            <a:ext cx="329184" cy="329184"/>
+          </a:xfrm>
+          <a:prstGeom prst="ellipse">
+            <a:avLst/>
+          </a:prstGeom>
+          <a:solidFill>
+            <a:srgbClr val="0B1A2E"/>
+          </a:solidFill>
+          <a:ln/>
+        </p:spPr>
+      </p:sp>
+      <p:pic>
+        <p:nvPicPr>
+          <p:cNvPr id="19" name="Image 2" descr="preencoded.png">    </p:cNvPr>
+          <p:cNvPicPr>
+            <a:picLocks noChangeAspect="1"/>
+          </p:cNvPicPr>
+          <p:nvPr/>
+        </p:nvPicPr>
+        <p:blipFill>
+          <a:blip r:embed="rId3"/>
+          <a:stretch>
+            <a:fillRect/>
+          </a:stretch>
+        </p:blipFill>
+        <p:spPr>
+          <a:xfrm>
+            <a:off x="6312896" y="1679936"/>
+            <a:ext cx="151425" cy="151425"/>
+          </a:xfrm>
+          <a:prstGeom prst="rect">
+            <a:avLst/>
+          </a:prstGeom>
+        </p:spPr>
+      </p:pic>
+      <p:sp>
+        <p:nvSpPr>
+          <p:cNvPr id="20" name="Text 14"/>
+          <p:cNvSpPr/>
+          <p:nvPr/>
+        </p:nvSpPr>
+        <p:spPr>
+          <a:xfrm>
+            <a:off x="6626352" y="1591056"/>
+            <a:ext cx="1969008" cy="329184"/>
+          </a:xfrm>
+          <a:prstGeom prst="rect">
+            <a:avLst/>
+          </a:prstGeom>
+          <a:noFill/>
+          <a:ln/>
+        </p:spPr>
+        <p:txBody>
+          <a:bodyPr wrap="square" lIns="0" tIns="0" rIns="0" bIns="0" rtlCol="0" anchor="ctr"/>
+          <a:lstStyle/>
+          <a:p>
+            <a:pPr indent="0" marL="0">
+              <a:buNone/>
+            </a:pPr>
+            <a:r>
+              <a:rPr lang="en-US" sz="1100" b="1" dirty="0">
+                <a:solidFill>
+                  <a:srgbClr val="0B1A2E"/>
+                </a:solidFill>
+                <a:latin typeface="Montserrat" pitchFamily="34" charset="0"/>
+                <a:ea typeface="Montserrat" pitchFamily="34" charset="-122"/>
+                <a:cs typeface="Montserrat" pitchFamily="34" charset="-120"/>
+              </a:rPr>
+              <a:t>Models and runtime</a:t>
+            </a:r>
+            <a:endParaRPr lang="en-US" sz="1100" dirty="0"/>
+          </a:p>
+        </p:txBody>
+      </p:sp>
+      <p:sp>
+        <p:nvSpPr>
+          <p:cNvPr id="21" name="Text 15"/>
+          <p:cNvSpPr/>
+          <p:nvPr/>
+        </p:nvSpPr>
+        <p:spPr>
+          <a:xfrm>
+            <a:off x="6224016" y="2011680"/>
+            <a:ext cx="2334768" cy="658368"/>
+          </a:xfrm>
+          <a:prstGeom prst="rect">
+            <a:avLst/>
+          </a:prstGeom>
+          <a:noFill/>
+          <a:ln/>
+        </p:spPr>
+        <p:txBody>
+          <a:bodyPr wrap="square" lIns="0" tIns="0" rIns="0" bIns="0" rtlCol="0" anchor="t"/>
+          <a:lstStyle/>
+          <a:p>
+            <a:pPr indent="0" marL="0">
+              <a:lnSpc>
+                <a:spcPct val="110000"/>
+              </a:lnSpc>
+              <a:buNone/>
+            </a:pPr>
+            <a:r>
+              <a:rPr lang="en-US" sz="950" dirty="0">
+                <a:solidFill>
+                  <a:srgbClr val="0B1A2E"/>
+                </a:solidFill>
+                <a:latin typeface="Calibri" pitchFamily="34" charset="0"/>
+                <a:ea typeface="Calibri" pitchFamily="34" charset="-122"/>
+                <a:cs typeface="Calibri" pitchFamily="34" charset="-120"/>
+              </a:rPr>
+              <a:t>llama.cpp · oMLX · Phi-4-mini · gpt-oss-20b · nomic-embed · ProtectAI DeBERTa</a:t>
+            </a:r>
+            <a:endParaRPr lang="en-US" sz="950" dirty="0"/>
+          </a:p>
+        </p:txBody>
+      </p:sp>
+      <p:sp>
+        <p:nvSpPr>
+          <p:cNvPr id="22" name="Shape 16"/>
+          <p:cNvSpPr/>
+          <p:nvPr/>
+        </p:nvSpPr>
+        <p:spPr>
+          <a:xfrm>
+            <a:off x="457200" y="2926080"/>
+            <a:ext cx="2590800" cy="1261872"/>
+          </a:xfrm>
+          <a:prstGeom prst="rect">
+            <a:avLst/>
+          </a:prstGeom>
+          <a:solidFill>
+            <a:srgbClr val="FFFFFF"/>
+          </a:solidFill>
+          <a:ln w="9525">
+            <a:solidFill>
+              <a:srgbClr val="D5DBE3"/>
+            </a:solidFill>
+            <a:prstDash val="solid"/>
+          </a:ln>
+        </p:spPr>
+      </p:sp>
+      <p:sp>
+        <p:nvSpPr>
+          <p:cNvPr id="23" name="Shape 17"/>
+          <p:cNvSpPr/>
+          <p:nvPr/>
+        </p:nvSpPr>
+        <p:spPr>
+          <a:xfrm>
+            <a:off x="585216" y="3035808"/>
+            <a:ext cx="329184" cy="329184"/>
+          </a:xfrm>
+          <a:prstGeom prst="ellipse">
+            <a:avLst/>
+          </a:prstGeom>
+          <a:solidFill>
+            <a:srgbClr val="0B1A2E"/>
+          </a:solidFill>
+          <a:ln/>
+        </p:spPr>
+      </p:sp>
+      <p:pic>
+        <p:nvPicPr>
+          <p:cNvPr id="24" name="Image 3" descr="preencoded.png">    </p:cNvPr>
+          <p:cNvPicPr>
+            <a:picLocks noChangeAspect="1"/>
+          </p:cNvPicPr>
+          <p:nvPr/>
+        </p:nvPicPr>
+        <p:blipFill>
+          <a:blip r:embed="rId4"/>
+          <a:stretch>
+            <a:fillRect/>
+          </a:stretch>
+        </p:blipFill>
+        <p:spPr>
+          <a:xfrm>
+            <a:off x="674096" y="3124688"/>
+            <a:ext cx="151425" cy="151425"/>
+          </a:xfrm>
+          <a:prstGeom prst="rect">
+            <a:avLst/>
+          </a:prstGeom>
+        </p:spPr>
+      </p:pic>
+      <p:sp>
+        <p:nvSpPr>
+          <p:cNvPr id="25" name="Text 18"/>
+          <p:cNvSpPr/>
+          <p:nvPr/>
+        </p:nvSpPr>
+        <p:spPr>
+          <a:xfrm>
+            <a:off x="987552" y="3035808"/>
+            <a:ext cx="1969008" cy="329184"/>
+          </a:xfrm>
+          <a:prstGeom prst="rect">
+            <a:avLst/>
+          </a:prstGeom>
+          <a:noFill/>
+          <a:ln/>
+        </p:spPr>
+        <p:txBody>
+          <a:bodyPr wrap="square" lIns="0" tIns="0" rIns="0" bIns="0" rtlCol="0" anchor="ctr"/>
+          <a:lstStyle/>
+          <a:p>
+            <a:pPr indent="0" marL="0">
+              <a:buNone/>
+            </a:pPr>
+            <a:r>
+              <a:rPr lang="en-US" sz="1100" b="1" dirty="0">
+                <a:solidFill>
+                  <a:srgbClr val="0B1A2E"/>
+                </a:solidFill>
+                <a:latin typeface="Montserrat" pitchFamily="34" charset="0"/>
+                <a:ea typeface="Montserrat" pitchFamily="34" charset="-122"/>
+                <a:cs typeface="Montserrat" pitchFamily="34" charset="-120"/>
+              </a:rPr>
+              <a:t>Data and security</a:t>
+            </a:r>
+            <a:endParaRPr lang="en-US" sz="1100" dirty="0"/>
+          </a:p>
+        </p:txBody>
+      </p:sp>
+      <p:sp>
+        <p:nvSpPr>
+          <p:cNvPr id="26" name="Text 19"/>
+          <p:cNvSpPr/>
+          <p:nvPr/>
+        </p:nvSpPr>
+        <p:spPr>
+          <a:xfrm>
+            <a:off x="585216" y="3456432"/>
+            <a:ext cx="2334768" cy="658368"/>
+          </a:xfrm>
+          <a:prstGeom prst="rect">
+            <a:avLst/>
+          </a:prstGeom>
+          <a:noFill/>
+          <a:ln/>
+        </p:spPr>
+        <p:txBody>
+          <a:bodyPr wrap="square" lIns="0" tIns="0" rIns="0" bIns="0" rtlCol="0" anchor="t"/>
+          <a:lstStyle/>
+          <a:p>
+            <a:pPr indent="0" marL="0">
+              <a:lnSpc>
+                <a:spcPct val="110000"/>
+              </a:lnSpc>
+              <a:buNone/>
+            </a:pPr>
+            <a:r>
+              <a:rPr lang="en-US" sz="950" dirty="0">
+                <a:solidFill>
+                  <a:srgbClr val="0B1A2E"/>
+                </a:solidFill>
+                <a:latin typeface="Calibri" pitchFamily="34" charset="0"/>
+                <a:ea typeface="Calibri" pitchFamily="34" charset="-122"/>
+                <a:cs typeface="Calibri" pitchFamily="34" charset="-120"/>
+              </a:rPr>
+              <a:t>Weaviate · LMDB · SQLite · argon2 · dotenvx</a:t>
+            </a:r>
+            <a:endParaRPr lang="en-US" sz="950" dirty="0"/>
+          </a:p>
+        </p:txBody>
+      </p:sp>
+      <p:sp>
+        <p:nvSpPr>
+          <p:cNvPr id="27" name="Shape 20"/>
+          <p:cNvSpPr/>
+          <p:nvPr/>
+        </p:nvSpPr>
+        <p:spPr>
+          <a:xfrm>
+            <a:off x="3276600" y="2926080"/>
+            <a:ext cx="2590800" cy="1261872"/>
+          </a:xfrm>
+          <a:prstGeom prst="rect">
+            <a:avLst/>
+          </a:prstGeom>
+          <a:solidFill>
+            <a:srgbClr val="FFFFFF"/>
+          </a:solidFill>
+          <a:ln w="9525">
+            <a:solidFill>
+              <a:srgbClr val="D5DBE3"/>
+            </a:solidFill>
+            <a:prstDash val="solid"/>
+          </a:ln>
+        </p:spPr>
+      </p:sp>
+      <p:sp>
+        <p:nvSpPr>
+          <p:cNvPr id="28" name="Shape 21"/>
+          <p:cNvSpPr/>
+          <p:nvPr/>
+        </p:nvSpPr>
+        <p:spPr>
+          <a:xfrm>
+            <a:off x="3404616" y="3035808"/>
+            <a:ext cx="329184" cy="329184"/>
+          </a:xfrm>
+          <a:prstGeom prst="ellipse">
+            <a:avLst/>
+          </a:prstGeom>
+          <a:solidFill>
+            <a:srgbClr val="0B1A2E"/>
+          </a:solidFill>
+          <a:ln/>
+        </p:spPr>
+      </p:sp>
+      <p:pic>
+        <p:nvPicPr>
+          <p:cNvPr id="29" name="Image 4" descr="preencoded.png">    </p:cNvPr>
+          <p:cNvPicPr>
+            <a:picLocks noChangeAspect="1"/>
+          </p:cNvPicPr>
+          <p:nvPr/>
+        </p:nvPicPr>
+        <p:blipFill>
+          <a:blip r:embed="rId5"/>
+          <a:stretch>
+            <a:fillRect/>
+          </a:stretch>
+        </p:blipFill>
+        <p:spPr>
+          <a:xfrm>
+            <a:off x="3493496" y="3124688"/>
+            <a:ext cx="151425" cy="151425"/>
+          </a:xfrm>
+          <a:prstGeom prst="rect">
+            <a:avLst/>
+          </a:prstGeom>
+        </p:spPr>
+      </p:pic>
+      <p:sp>
+        <p:nvSpPr>
+          <p:cNvPr id="30" name="Text 22"/>
+          <p:cNvSpPr/>
+          <p:nvPr/>
+        </p:nvSpPr>
+        <p:spPr>
+          <a:xfrm>
+            <a:off x="3806952" y="3035808"/>
+            <a:ext cx="1969008" cy="329184"/>
+          </a:xfrm>
+          <a:prstGeom prst="rect">
+            <a:avLst/>
+          </a:prstGeom>
+          <a:noFill/>
+          <a:ln/>
+        </p:spPr>
+        <p:txBody>
+          <a:bodyPr wrap="square" lIns="0" tIns="0" rIns="0" bIns="0" rtlCol="0" anchor="ctr"/>
+          <a:lstStyle/>
+          <a:p>
+            <a:pPr indent="0" marL="0">
+              <a:buNone/>
+            </a:pPr>
+            <a:r>
+              <a:rPr lang="en-US" sz="1100" b="1" dirty="0">
+                <a:solidFill>
+                  <a:srgbClr val="0B1A2E"/>
+                </a:solidFill>
+                <a:latin typeface="Montserrat" pitchFamily="34" charset="0"/>
+                <a:ea typeface="Montserrat" pitchFamily="34" charset="-122"/>
+                <a:cs typeface="Montserrat" pitchFamily="34" charset="-120"/>
+              </a:rPr>
+              <a:t>Observability and test</a:t>
+            </a:r>
+            <a:endParaRPr lang="en-US" sz="1100" dirty="0"/>
+          </a:p>
+        </p:txBody>
+      </p:sp>
+      <p:sp>
+        <p:nvSpPr>
+          <p:cNvPr id="31" name="Text 23"/>
+          <p:cNvSpPr/>
+          <p:nvPr/>
+        </p:nvSpPr>
+        <p:spPr>
+          <a:xfrm>
+            <a:off x="3404616" y="3456432"/>
+            <a:ext cx="2334768" cy="658368"/>
+          </a:xfrm>
+          <a:prstGeom prst="rect">
+            <a:avLst/>
+          </a:prstGeom>
+          <a:noFill/>
+          <a:ln/>
+        </p:spPr>
+        <p:txBody>
+          <a:bodyPr wrap="square" lIns="0" tIns="0" rIns="0" bIns="0" rtlCol="0" anchor="t"/>
+          <a:lstStyle/>
+          <a:p>
+            <a:pPr indent="0" marL="0">
+              <a:lnSpc>
+                <a:spcPct val="110000"/>
+              </a:lnSpc>
+              <a:buNone/>
+            </a:pPr>
+            <a:r>
+              <a:rPr lang="en-US" sz="950" dirty="0">
+                <a:solidFill>
+                  <a:srgbClr val="0B1A2E"/>
+                </a:solidFill>
+                <a:latin typeface="Calibri" pitchFamily="34" charset="0"/>
+                <a:ea typeface="Calibri" pitchFamily="34" charset="-122"/>
+                <a:cs typeface="Calibri" pitchFamily="34" charset="-120"/>
+              </a:rPr>
+              <a:t>Prometheus · Grafana · Loki · Jaeger · OpenTelemetry · promptfoo · Playwright</a:t>
+            </a:r>
+            <a:endParaRPr lang="en-US" sz="950" dirty="0"/>
+          </a:p>
+        </p:txBody>
+      </p:sp>
+      <p:sp>
+        <p:nvSpPr>
+          <p:cNvPr id="32" name="Shape 24"/>
+          <p:cNvSpPr/>
+          <p:nvPr/>
+        </p:nvSpPr>
+        <p:spPr>
+          <a:xfrm>
+            <a:off x="6096000" y="2926080"/>
+            <a:ext cx="2590800" cy="1261872"/>
+          </a:xfrm>
+          <a:prstGeom prst="rect">
+            <a:avLst/>
+          </a:prstGeom>
+          <a:solidFill>
+            <a:srgbClr val="FFFFFF"/>
+          </a:solidFill>
+          <a:ln w="9525">
+            <a:solidFill>
+              <a:srgbClr val="D5DBE3"/>
+            </a:solidFill>
+            <a:prstDash val="solid"/>
+          </a:ln>
+        </p:spPr>
+      </p:sp>
+      <p:sp>
+        <p:nvSpPr>
+          <p:cNvPr id="33" name="Shape 25"/>
+          <p:cNvSpPr/>
+          <p:nvPr/>
+        </p:nvSpPr>
+        <p:spPr>
+          <a:xfrm>
+            <a:off x="6224016" y="3035808"/>
+            <a:ext cx="329184" cy="329184"/>
+          </a:xfrm>
+          <a:prstGeom prst="ellipse">
+            <a:avLst/>
+          </a:prstGeom>
+          <a:solidFill>
+            <a:srgbClr val="0B1A2E"/>
+          </a:solidFill>
+          <a:ln/>
+        </p:spPr>
+      </p:sp>
+      <p:pic>
+        <p:nvPicPr>
+          <p:cNvPr id="34" name="Image 5" descr="preencoded.png">    </p:cNvPr>
+          <p:cNvPicPr>
+            <a:picLocks noChangeAspect="1"/>
+          </p:cNvPicPr>
+          <p:nvPr/>
+        </p:nvPicPr>
+        <p:blipFill>
+          <a:blip r:embed="rId6"/>
+          <a:stretch>
+            <a:fillRect/>
+          </a:stretch>
+        </p:blipFill>
+        <p:spPr>
+          <a:xfrm>
+            <a:off x="6312896" y="3124688"/>
+            <a:ext cx="151425" cy="151425"/>
+          </a:xfrm>
+          <a:prstGeom prst="rect">
+            <a:avLst/>
+          </a:prstGeom>
+        </p:spPr>
+      </p:pic>
+      <p:sp>
+        <p:nvSpPr>
+          <p:cNvPr id="35" name="Text 26"/>
+          <p:cNvSpPr/>
+          <p:nvPr/>
+        </p:nvSpPr>
+        <p:spPr>
+          <a:xfrm>
+            <a:off x="6626352" y="3035808"/>
+            <a:ext cx="1969008" cy="329184"/>
+          </a:xfrm>
+          <a:prstGeom prst="rect">
+            <a:avLst/>
+          </a:prstGeom>
+          <a:noFill/>
+          <a:ln/>
+        </p:spPr>
+        <p:txBody>
+          <a:bodyPr wrap="square" lIns="0" tIns="0" rIns="0" bIns="0" rtlCol="0" anchor="ctr"/>
+          <a:lstStyle/>
+          <a:p>
+            <a:pPr indent="0" marL="0">
+              <a:buNone/>
+            </a:pPr>
+            <a:r>
+              <a:rPr lang="en-US" sz="1100" b="1" dirty="0">
+                <a:solidFill>
+                  <a:srgbClr val="0B1A2E"/>
+                </a:solidFill>
+                <a:latin typeface="Montserrat" pitchFamily="34" charset="0"/>
+                <a:ea typeface="Montserrat" pitchFamily="34" charset="-122"/>
+                <a:cs typeface="Montserrat" pitchFamily="34" charset="-120"/>
+              </a:rPr>
+              <a:t>Web, infra and clients</a:t>
+            </a:r>
+            <a:endParaRPr lang="en-US" sz="1100" dirty="0"/>
+          </a:p>
+        </p:txBody>
+      </p:sp>
+      <p:sp>
+        <p:nvSpPr>
+          <p:cNvPr id="36" name="Text 27"/>
+          <p:cNvSpPr/>
+          <p:nvPr/>
+        </p:nvSpPr>
+        <p:spPr>
+          <a:xfrm>
+            <a:off x="6224016" y="3456432"/>
+            <a:ext cx="2334768" cy="658368"/>
+          </a:xfrm>
+          <a:prstGeom prst="rect">
+            <a:avLst/>
+          </a:prstGeom>
+          <a:noFill/>
+          <a:ln/>
+        </p:spPr>
+        <p:txBody>
+          <a:bodyPr wrap="square" lIns="0" tIns="0" rIns="0" bIns="0" rtlCol="0" anchor="t"/>
+          <a:lstStyle/>
+          <a:p>
+            <a:pPr indent="0" marL="0">
+              <a:lnSpc>
+                <a:spcPct val="110000"/>
+              </a:lnSpc>
+              <a:buNone/>
+            </a:pPr>
+            <a:r>
+              <a:rPr lang="en-US" sz="950" dirty="0">
+                <a:solidFill>
+                  <a:srgbClr val="0B1A2E"/>
+                </a:solidFill>
+                <a:latin typeface="Calibri" pitchFamily="34" charset="0"/>
+                <a:ea typeface="Calibri" pitchFamily="34" charset="-122"/>
+                <a:cs typeface="Calibri" pitchFamily="34" charset="-120"/>
+              </a:rPr>
+              <a:t>React · Vite · Express · React Flow · Kubernetes · Helm · mkcert · LibreChat</a:t>
+            </a:r>
+            <a:endParaRPr lang="en-US" sz="950" dirty="0"/>
+          </a:p>
+        </p:txBody>
+      </p:sp>
+      <p:sp>
+        <p:nvSpPr>
+          <p:cNvPr id="37" name="Shape 28"/>
+          <p:cNvSpPr/>
+          <p:nvPr/>
+        </p:nvSpPr>
+        <p:spPr>
+          <a:xfrm>
+            <a:off x="457200" y="4315968"/>
+            <a:ext cx="8229600" cy="329184"/>
+          </a:xfrm>
+          <a:prstGeom prst="rect">
+            <a:avLst/>
+          </a:prstGeom>
+          <a:solidFill>
+            <a:srgbClr val="E8ECF2"/>
+          </a:solidFill>
+          <a:ln w="9525">
+            <a:solidFill>
+              <a:srgbClr val="D5DBE3"/>
+            </a:solidFill>
+            <a:prstDash val="solid"/>
+          </a:ln>
+        </p:spPr>
+      </p:sp>
+      <p:sp>
+        <p:nvSpPr>
+          <p:cNvPr id="38" name="Text 29"/>
+          <p:cNvSpPr/>
+          <p:nvPr/>
+        </p:nvSpPr>
+        <p:spPr>
+          <a:xfrm>
+            <a:off x="594360" y="4315968"/>
+            <a:ext cx="7955280" cy="329184"/>
+          </a:xfrm>
+          <a:prstGeom prst="rect">
+            <a:avLst/>
+          </a:prstGeom>
+          <a:noFill/>
+          <a:ln/>
+        </p:spPr>
+        <p:txBody>
+          <a:bodyPr wrap="square" lIns="0" tIns="0" rIns="0" bIns="0" rtlCol="0" anchor="ctr"/>
+          <a:lstStyle/>
+          <a:p>
+            <a:pPr indent="0" marL="0">
+              <a:buNone/>
+            </a:pPr>
+            <a:r>
+              <a:rPr lang="en-US" sz="1050" b="1" dirty="0">
+                <a:solidFill>
+                  <a:srgbClr val="0B1A2E"/>
+                </a:solidFill>
+                <a:latin typeface="Calibri" pitchFamily="34" charset="0"/>
+                <a:ea typeface="Calibri" pitchFamily="34" charset="-122"/>
+                <a:cs typeface="Calibri" pitchFamily="34" charset="-120"/>
+              </a:rPr>
+              <a:t>Our own open source:  </a:t>
+            </a:r>
+            <a:pPr indent="0" marL="0">
+              <a:buNone/>
+            </a:pPr>
+            <a:r>
+              <a:rPr lang="en-US" sz="1050" dirty="0">
+                <a:solidFill>
+                  <a:srgbClr val="0B1A2E"/>
+                </a:solidFill>
+                <a:latin typeface="Calibri" pitchFamily="34" charset="0"/>
+                <a:ea typeface="Calibri" pitchFamily="34" charset="-122"/>
+                <a:cs typeface="Calibri" pitchFamily="34" charset="-120"/>
+              </a:rPr>
+              <a:t>llm-gateway · mcp-inspector · ai-gateway-client, on github.com/curtismu7</a:t>
+            </a:r>
+            <a:endParaRPr lang="en-US" sz="1050" dirty="0"/>
+          </a:p>
+        </p:txBody>
+      </p:sp>
+    </p:spTree>
+  </p:cSld>
+  <p:clrMapOvr>
+    <a:masterClrMapping/>
+  </p:clrMapOvr>
+</p:sld>
+</file>
+
+<file path=ppt/slides/slide17.xml><?xml version="1.0" encoding="utf-8"?>
+<p:sld xmlns:a="http://schemas.openxmlformats.org/drawingml/2006/main" xmlns:r="http://schemas.openxmlformats.org/officeDocument/2006/relationships" xmlns:p="http://schemas.openxmlformats.org/presentationml/2006/main">
+  <p:cSld name="Slide 17">
+    <p:bg>
+      <p:bgPr>
+        <a:solidFill>
+          <a:srgbClr val="F4F5F7"/>
+        </a:solidFill>
+      </p:bgPr>
+    </p:bg>
+    <p:spTree>
+      <p:nvGrpSpPr>
+        <p:cNvPr id="1" name=""/>
+        <p:cNvGrpSpPr/>
+        <p:nvPr/>
+      </p:nvGrpSpPr>
+      <p:grpSpPr>
+        <a:xfrm>
+          <a:off x="0" y="0"/>
+          <a:ext cx="0" cy="0"/>
+          <a:chOff x="0" y="0"/>
+          <a:chExt cx="0" cy="0"/>
+        </a:xfrm>
+      </p:grpSpPr>
+      <p:sp>
+        <p:nvSpPr>
+          <p:cNvPr id="2" name="Shape 0"/>
+          <p:cNvSpPr/>
+          <p:nvPr/>
+        </p:nvSpPr>
+        <p:spPr>
+          <a:xfrm>
+            <a:off x="457200" y="384048"/>
+            <a:ext cx="100584" cy="100584"/>
+          </a:xfrm>
+          <a:prstGeom prst="rect">
+            <a:avLst/>
+          </a:prstGeom>
+          <a:solidFill>
+            <a:srgbClr val="C8102E"/>
+          </a:solidFill>
+          <a:ln/>
+        </p:spPr>
+      </p:sp>
+      <p:sp>
+        <p:nvSpPr>
+          <p:cNvPr id="3" name="Text 1"/>
+          <p:cNvSpPr/>
+          <p:nvPr/>
+        </p:nvSpPr>
+        <p:spPr>
+          <a:xfrm>
+            <a:off x="640080" y="301752"/>
+            <a:ext cx="6400800" cy="274320"/>
+          </a:xfrm>
+          <a:prstGeom prst="rect">
+            <a:avLst/>
+          </a:prstGeom>
+          <a:noFill/>
+          <a:ln/>
+        </p:spPr>
+        <p:txBody>
+          <a:bodyPr wrap="square" lIns="0" tIns="0" rIns="0" bIns="0" rtlCol="0" anchor="ctr"/>
+          <a:lstStyle/>
+          <a:p>
+            <a:pPr indent="0" marL="0">
+              <a:buNone/>
+            </a:pPr>
+            <a:r>
+              <a:rPr lang="en-US" sz="1000" b="1" spc="300" kern="0" dirty="0">
+                <a:solidFill>
+                  <a:srgbClr val="4F5E71"/>
+                </a:solidFill>
+                <a:latin typeface="Montserrat" pitchFamily="34" charset="0"/>
+                <a:ea typeface="Montserrat" pitchFamily="34" charset="-122"/>
+                <a:cs typeface="Montserrat" pitchFamily="34" charset="-120"/>
+              </a:rPr>
               <a:t>APPENDIX  ·  FOR DEVELOPERS</a:t>
             </a:r>
             <a:endParaRPr lang="en-US" sz="1000" dirty="0"/>
@@ -14502,7 +18300,7 @@
                 <a:ea typeface="Calibri" pitchFamily="34" charset="-122"/>
                 <a:cs typeface="Calibri" pitchFamily="34" charset="-120"/>
               </a:rPr>
-              <a:t>14</a:t>
+              <a:t>17</a:t>
             </a:r>
             <a:endParaRPr lang="en-US" sz="900" dirty="0"/>
           </a:p>
@@ -14510,7 +18308,7 @@
       </p:sp>
       <p:graphicFrame>
         <p:nvGraphicFramePr>
-          <p:cNvPr id="15" name="Table 0"/>
+          <p:cNvPr id="18" name="Table 0"/>
           <p:cNvGraphicFramePr>
             <a:graphicFrameLocks noGrp="1"/>
           </p:cNvGraphicFramePr>
@@ -18658,9 +22456,9 @@
 </p:sld>
 </file>
 
-<file path=ppt/slides/slide15.xml><?xml version="1.0" encoding="utf-8"?>
+<file path=ppt/slides/slide18.xml><?xml version="1.0" encoding="utf-8"?>
 <p:sld xmlns:a="http://schemas.openxmlformats.org/drawingml/2006/main" xmlns:r="http://schemas.openxmlformats.org/officeDocument/2006/relationships" xmlns:p="http://schemas.openxmlformats.org/presentationml/2006/main">
-  <p:cSld name="Slide 15">
+  <p:cSld name="Slide 18">
     <p:bg>
       <p:bgPr>
         <a:solidFill>
@@ -18813,7 +22611,7 @@
                 <a:ea typeface="Calibri" pitchFamily="34" charset="-122"/>
                 <a:cs typeface="Calibri" pitchFamily="34" charset="-120"/>
               </a:rPr>
-              <a:t>15</a:t>
+              <a:t>18</a:t>
             </a:r>
             <a:endParaRPr lang="en-US" sz="900" dirty="0"/>
           </a:p>
@@ -18821,7 +22619,7 @@
       </p:sp>
       <p:graphicFrame>
         <p:nvGraphicFramePr>
-          <p:cNvPr id="16" name="Table 0"/>
+          <p:cNvPr id="19" name="Table 0"/>
           <p:cNvGraphicFramePr>
             <a:graphicFrameLocks noGrp="1"/>
           </p:cNvGraphicFramePr>
@@ -20751,9 +24549,9 @@
 </p:sld>
 </file>
 
-<file path=ppt/slides/slide16.xml><?xml version="1.0" encoding="utf-8"?>
+<file path=ppt/slides/slide19.xml><?xml version="1.0" encoding="utf-8"?>
 <p:sld xmlns:a="http://schemas.openxmlformats.org/drawingml/2006/main" xmlns:r="http://schemas.openxmlformats.org/officeDocument/2006/relationships" xmlns:p="http://schemas.openxmlformats.org/presentationml/2006/main">
-  <p:cSld name="Slide 16">
+  <p:cSld name="Slide 19">
     <p:bg>
       <p:bgPr>
         <a:solidFill>
@@ -20906,7 +24704,7 @@
                 <a:ea typeface="Calibri" pitchFamily="34" charset="-122"/>
                 <a:cs typeface="Calibri" pitchFamily="34" charset="-120"/>
               </a:rPr>
-              <a:t>16</a:t>
+              <a:t>19</a:t>
             </a:r>
             <a:endParaRPr lang="en-US" sz="900" dirty="0"/>
           </a:p>
@@ -20914,7 +24712,7 @@
       </p:sp>
       <p:graphicFrame>
         <p:nvGraphicFramePr>
-          <p:cNvPr id="17" name="Table 0"/>
+          <p:cNvPr id="20" name="Table 0"/>
           <p:cNvGraphicFramePr>
             <a:graphicFrameLocks noGrp="1"/>
           </p:cNvGraphicFramePr>
@@ -22744,9 +26542,9 @@
 </p:sld>
 </file>
 
-<file path=ppt/slides/slide17.xml><?xml version="1.0" encoding="utf-8"?>
+<file path=ppt/slides/slide2.xml><?xml version="1.0" encoding="utf-8"?>
 <p:sld xmlns:a="http://schemas.openxmlformats.org/drawingml/2006/main" xmlns:r="http://schemas.openxmlformats.org/officeDocument/2006/relationships" xmlns:p="http://schemas.openxmlformats.org/presentationml/2006/main">
-  <p:cSld name="Slide 17">
+  <p:cSld name="Slide 2">
     <p:bg>
       <p:bgPr>
         <a:solidFill>
@@ -22821,6 +26619,856 @@
                 <a:ea typeface="Montserrat" pitchFamily="34" charset="-122"/>
                 <a:cs typeface="Montserrat" pitchFamily="34" charset="-120"/>
               </a:rPr>
+              <a:t>AT A GLANCE</a:t>
+            </a:r>
+            <a:endParaRPr lang="en-US" sz="1000" dirty="0"/>
+          </a:p>
+        </p:txBody>
+      </p:sp>
+      <p:sp>
+        <p:nvSpPr>
+          <p:cNvPr id="4" name="Text 2"/>
+          <p:cNvSpPr/>
+          <p:nvPr/>
+        </p:nvSpPr>
+        <p:spPr>
+          <a:xfrm>
+            <a:off x="457200" y="603504"/>
+            <a:ext cx="8229600" cy="786384"/>
+          </a:xfrm>
+          <a:prstGeom prst="rect">
+            <a:avLst/>
+          </a:prstGeom>
+          <a:noFill/>
+          <a:ln/>
+        </p:spPr>
+        <p:txBody>
+          <a:bodyPr wrap="square" lIns="0" tIns="0" rIns="0" bIns="0" rtlCol="0" anchor="t"/>
+          <a:lstStyle/>
+          <a:p>
+            <a:pPr indent="0" marL="0">
+              <a:buNone/>
+            </a:pPr>
+            <a:r>
+              <a:rPr lang="en-US" sz="2100" b="1" dirty="0">
+                <a:solidFill>
+                  <a:srgbClr val="0B1A2E"/>
+                </a:solidFill>
+                <a:latin typeface="Montserrat" pitchFamily="34" charset="0"/>
+                <a:ea typeface="Montserrat" pitchFamily="34" charset="-122"/>
+                <a:cs typeface="Montserrat" pitchFamily="34" charset="-120"/>
+              </a:rPr>
+              <a:t>A working bank where AI agents act for customers, and PingOne decides what they may do</a:t>
+            </a:r>
+            <a:endParaRPr lang="en-US" sz="2100" dirty="0"/>
+          </a:p>
+        </p:txBody>
+      </p:sp>
+      <p:sp>
+        <p:nvSpPr>
+          <p:cNvPr id="5" name="Text 3"/>
+          <p:cNvSpPr/>
+          <p:nvPr/>
+        </p:nvSpPr>
+        <p:spPr>
+          <a:xfrm>
+            <a:off x="8229600" y="4846320"/>
+            <a:ext cx="457200" cy="182880"/>
+          </a:xfrm>
+          <a:prstGeom prst="rect">
+            <a:avLst/>
+          </a:prstGeom>
+          <a:noFill/>
+          <a:ln/>
+        </p:spPr>
+        <p:txBody>
+          <a:bodyPr wrap="square" lIns="0" tIns="0" rIns="0" bIns="0" rtlCol="0" anchor="ctr"/>
+          <a:lstStyle/>
+          <a:p>
+            <a:pPr algn="r" indent="0" marL="0">
+              <a:buNone/>
+            </a:pPr>
+            <a:r>
+              <a:rPr lang="en-US" sz="900" dirty="0">
+                <a:solidFill>
+                  <a:srgbClr val="4F5E71"/>
+                </a:solidFill>
+                <a:latin typeface="Calibri" pitchFamily="34" charset="0"/>
+                <a:ea typeface="Calibri" pitchFamily="34" charset="-122"/>
+                <a:cs typeface="Calibri" pitchFamily="34" charset="-120"/>
+              </a:rPr>
+              <a:t>2</a:t>
+            </a:r>
+            <a:endParaRPr lang="en-US" sz="900" dirty="0"/>
+          </a:p>
+        </p:txBody>
+      </p:sp>
+      <p:sp>
+        <p:nvSpPr>
+          <p:cNvPr id="7" name="Shape 4"/>
+          <p:cNvSpPr/>
+          <p:nvPr/>
+        </p:nvSpPr>
+        <p:spPr>
+          <a:xfrm>
+            <a:off x="457200" y="1572768"/>
+            <a:ext cx="1851660" cy="1417320"/>
+          </a:xfrm>
+          <a:prstGeom prst="rect">
+            <a:avLst/>
+          </a:prstGeom>
+          <a:solidFill>
+            <a:srgbClr val="FFFFFF"/>
+          </a:solidFill>
+          <a:ln w="9525">
+            <a:solidFill>
+              <a:srgbClr val="D5DBE3"/>
+            </a:solidFill>
+            <a:prstDash val="solid"/>
+          </a:ln>
+        </p:spPr>
+      </p:sp>
+      <p:sp>
+        <p:nvSpPr>
+          <p:cNvPr id="8" name="Text 5"/>
+          <p:cNvSpPr/>
+          <p:nvPr/>
+        </p:nvSpPr>
+        <p:spPr>
+          <a:xfrm>
+            <a:off x="640080" y="1664208"/>
+            <a:ext cx="1485900" cy="777240"/>
+          </a:xfrm>
+          <a:prstGeom prst="rect">
+            <a:avLst/>
+          </a:prstGeom>
+          <a:noFill/>
+          <a:ln/>
+        </p:spPr>
+        <p:txBody>
+          <a:bodyPr wrap="square" lIns="0" tIns="0" rIns="0" bIns="0" rtlCol="0" anchor="ctr"/>
+          <a:lstStyle/>
+          <a:p>
+            <a:pPr indent="0" marL="0">
+              <a:buNone/>
+            </a:pPr>
+            <a:r>
+              <a:rPr lang="en-US" sz="4400" b="1" dirty="0">
+                <a:solidFill>
+                  <a:srgbClr val="C8102E"/>
+                </a:solidFill>
+                <a:latin typeface="Montserrat" pitchFamily="34" charset="0"/>
+                <a:ea typeface="Montserrat" pitchFamily="34" charset="-122"/>
+                <a:cs typeface="Montserrat" pitchFamily="34" charset="-120"/>
+              </a:rPr>
+              <a:t>62</a:t>
+            </a:r>
+            <a:endParaRPr lang="en-US" sz="4400" dirty="0"/>
+          </a:p>
+        </p:txBody>
+      </p:sp>
+      <p:sp>
+        <p:nvSpPr>
+          <p:cNvPr id="9" name="Text 6"/>
+          <p:cNvSpPr/>
+          <p:nvPr/>
+        </p:nvSpPr>
+        <p:spPr>
+          <a:xfrm>
+            <a:off x="640080" y="2432304"/>
+            <a:ext cx="1485900" cy="411480"/>
+          </a:xfrm>
+          <a:prstGeom prst="rect">
+            <a:avLst/>
+          </a:prstGeom>
+          <a:noFill/>
+          <a:ln/>
+        </p:spPr>
+        <p:txBody>
+          <a:bodyPr wrap="square" lIns="0" tIns="0" rIns="0" bIns="0" rtlCol="0" anchor="t"/>
+          <a:lstStyle/>
+          <a:p>
+            <a:pPr indent="0" marL="0">
+              <a:buNone/>
+            </a:pPr>
+            <a:r>
+              <a:rPr lang="en-US" sz="1200" dirty="0">
+                <a:solidFill>
+                  <a:srgbClr val="4F5E71"/>
+                </a:solidFill>
+                <a:latin typeface="Calibri" pitchFamily="34" charset="0"/>
+                <a:ea typeface="Calibri" pitchFamily="34" charset="-122"/>
+                <a:cs typeface="Calibri" pitchFamily="34" charset="-120"/>
+              </a:rPr>
+              <a:t>use cases in the catalog</a:t>
+            </a:r>
+            <a:endParaRPr lang="en-US" sz="1200" dirty="0"/>
+          </a:p>
+        </p:txBody>
+      </p:sp>
+      <p:sp>
+        <p:nvSpPr>
+          <p:cNvPr id="10" name="Shape 7"/>
+          <p:cNvSpPr/>
+          <p:nvPr/>
+        </p:nvSpPr>
+        <p:spPr>
+          <a:xfrm>
+            <a:off x="2583180" y="1572768"/>
+            <a:ext cx="1851660" cy="1417320"/>
+          </a:xfrm>
+          <a:prstGeom prst="rect">
+            <a:avLst/>
+          </a:prstGeom>
+          <a:solidFill>
+            <a:srgbClr val="FFFFFF"/>
+          </a:solidFill>
+          <a:ln w="9525">
+            <a:solidFill>
+              <a:srgbClr val="D5DBE3"/>
+            </a:solidFill>
+            <a:prstDash val="solid"/>
+          </a:ln>
+        </p:spPr>
+      </p:sp>
+      <p:sp>
+        <p:nvSpPr>
+          <p:cNvPr id="11" name="Text 8"/>
+          <p:cNvSpPr/>
+          <p:nvPr/>
+        </p:nvSpPr>
+        <p:spPr>
+          <a:xfrm>
+            <a:off x="2766060" y="1664208"/>
+            <a:ext cx="1485900" cy="777240"/>
+          </a:xfrm>
+          <a:prstGeom prst="rect">
+            <a:avLst/>
+          </a:prstGeom>
+          <a:noFill/>
+          <a:ln/>
+        </p:spPr>
+        <p:txBody>
+          <a:bodyPr wrap="square" lIns="0" tIns="0" rIns="0" bIns="0" rtlCol="0" anchor="ctr"/>
+          <a:lstStyle/>
+          <a:p>
+            <a:pPr indent="0" marL="0">
+              <a:buNone/>
+            </a:pPr>
+            <a:r>
+              <a:rPr lang="en-US" sz="4400" b="1" dirty="0">
+                <a:solidFill>
+                  <a:srgbClr val="C8102E"/>
+                </a:solidFill>
+                <a:latin typeface="Montserrat" pitchFamily="34" charset="0"/>
+                <a:ea typeface="Montserrat" pitchFamily="34" charset="-122"/>
+                <a:cs typeface="Montserrat" pitchFamily="34" charset="-120"/>
+              </a:rPr>
+              <a:t>11</a:t>
+            </a:r>
+            <a:endParaRPr lang="en-US" sz="4400" dirty="0"/>
+          </a:p>
+        </p:txBody>
+      </p:sp>
+      <p:sp>
+        <p:nvSpPr>
+          <p:cNvPr id="12" name="Text 9"/>
+          <p:cNvSpPr/>
+          <p:nvPr/>
+        </p:nvSpPr>
+        <p:spPr>
+          <a:xfrm>
+            <a:off x="2766060" y="2432304"/>
+            <a:ext cx="1485900" cy="411480"/>
+          </a:xfrm>
+          <a:prstGeom prst="rect">
+            <a:avLst/>
+          </a:prstGeom>
+          <a:noFill/>
+          <a:ln/>
+        </p:spPr>
+        <p:txBody>
+          <a:bodyPr wrap="square" lIns="0" tIns="0" rIns="0" bIns="0" rtlCol="0" anchor="t"/>
+          <a:lstStyle/>
+          <a:p>
+            <a:pPr indent="0" marL="0">
+              <a:buNone/>
+            </a:pPr>
+            <a:r>
+              <a:rPr lang="en-US" sz="1200" dirty="0">
+                <a:solidFill>
+                  <a:srgbClr val="4F5E71"/>
+                </a:solidFill>
+                <a:latin typeface="Calibri" pitchFamily="34" charset="0"/>
+                <a:ea typeface="Calibri" pitchFamily="34" charset="-122"/>
+                <a:cs typeface="Calibri" pitchFamily="34" charset="-120"/>
+              </a:rPr>
+              <a:t>industry verticals on one platform</a:t>
+            </a:r>
+            <a:endParaRPr lang="en-US" sz="1200" dirty="0"/>
+          </a:p>
+        </p:txBody>
+      </p:sp>
+      <p:sp>
+        <p:nvSpPr>
+          <p:cNvPr id="13" name="Shape 10"/>
+          <p:cNvSpPr/>
+          <p:nvPr/>
+        </p:nvSpPr>
+        <p:spPr>
+          <a:xfrm>
+            <a:off x="4709160" y="1572768"/>
+            <a:ext cx="1851660" cy="1417320"/>
+          </a:xfrm>
+          <a:prstGeom prst="rect">
+            <a:avLst/>
+          </a:prstGeom>
+          <a:solidFill>
+            <a:srgbClr val="FFFFFF"/>
+          </a:solidFill>
+          <a:ln w="9525">
+            <a:solidFill>
+              <a:srgbClr val="D5DBE3"/>
+            </a:solidFill>
+            <a:prstDash val="solid"/>
+          </a:ln>
+        </p:spPr>
+      </p:sp>
+      <p:sp>
+        <p:nvSpPr>
+          <p:cNvPr id="14" name="Text 11"/>
+          <p:cNvSpPr/>
+          <p:nvPr/>
+        </p:nvSpPr>
+        <p:spPr>
+          <a:xfrm>
+            <a:off x="4892040" y="1664208"/>
+            <a:ext cx="1485900" cy="777240"/>
+          </a:xfrm>
+          <a:prstGeom prst="rect">
+            <a:avLst/>
+          </a:prstGeom>
+          <a:noFill/>
+          <a:ln/>
+        </p:spPr>
+        <p:txBody>
+          <a:bodyPr wrap="square" lIns="0" tIns="0" rIns="0" bIns="0" rtlCol="0" anchor="ctr"/>
+          <a:lstStyle/>
+          <a:p>
+            <a:pPr indent="0" marL="0">
+              <a:buNone/>
+            </a:pPr>
+            <a:r>
+              <a:rPr lang="en-US" sz="4400" b="1" dirty="0">
+                <a:solidFill>
+                  <a:srgbClr val="C8102E"/>
+                </a:solidFill>
+                <a:latin typeface="Montserrat" pitchFamily="34" charset="0"/>
+                <a:ea typeface="Montserrat" pitchFamily="34" charset="-122"/>
+                <a:cs typeface="Montserrat" pitchFamily="34" charset="-120"/>
+              </a:rPr>
+              <a:t>4</a:t>
+            </a:r>
+            <a:endParaRPr lang="en-US" sz="4400" dirty="0"/>
+          </a:p>
+        </p:txBody>
+      </p:sp>
+      <p:sp>
+        <p:nvSpPr>
+          <p:cNvPr id="15" name="Text 12"/>
+          <p:cNvSpPr/>
+          <p:nvPr/>
+        </p:nvSpPr>
+        <p:spPr>
+          <a:xfrm>
+            <a:off x="4892040" y="2432304"/>
+            <a:ext cx="1485900" cy="411480"/>
+          </a:xfrm>
+          <a:prstGeom prst="rect">
+            <a:avLst/>
+          </a:prstGeom>
+          <a:noFill/>
+          <a:ln/>
+        </p:spPr>
+        <p:txBody>
+          <a:bodyPr wrap="square" lIns="0" tIns="0" rIns="0" bIns="0" rtlCol="0" anchor="t"/>
+          <a:lstStyle/>
+          <a:p>
+            <a:pPr indent="0" marL="0">
+              <a:buNone/>
+            </a:pPr>
+            <a:r>
+              <a:rPr lang="en-US" sz="1200" dirty="0">
+                <a:solidFill>
+                  <a:srgbClr val="4F5E71"/>
+                </a:solidFill>
+                <a:latin typeface="Calibri" pitchFamily="34" charset="0"/>
+                <a:ea typeface="Calibri" pitchFamily="34" charset="-122"/>
+                <a:cs typeface="Calibri" pitchFamily="34" charset="-120"/>
+              </a:rPr>
+              <a:t>agent frameworks, one security model</a:t>
+            </a:r>
+            <a:endParaRPr lang="en-US" sz="1200" dirty="0"/>
+          </a:p>
+        </p:txBody>
+      </p:sp>
+      <p:sp>
+        <p:nvSpPr>
+          <p:cNvPr id="16" name="Shape 13"/>
+          <p:cNvSpPr/>
+          <p:nvPr/>
+        </p:nvSpPr>
+        <p:spPr>
+          <a:xfrm>
+            <a:off x="6835140" y="1572768"/>
+            <a:ext cx="1851660" cy="1417320"/>
+          </a:xfrm>
+          <a:prstGeom prst="rect">
+            <a:avLst/>
+          </a:prstGeom>
+          <a:solidFill>
+            <a:srgbClr val="FFFFFF"/>
+          </a:solidFill>
+          <a:ln w="9525">
+            <a:solidFill>
+              <a:srgbClr val="D5DBE3"/>
+            </a:solidFill>
+            <a:prstDash val="solid"/>
+          </a:ln>
+        </p:spPr>
+      </p:sp>
+      <p:sp>
+        <p:nvSpPr>
+          <p:cNvPr id="17" name="Text 14"/>
+          <p:cNvSpPr/>
+          <p:nvPr/>
+        </p:nvSpPr>
+        <p:spPr>
+          <a:xfrm>
+            <a:off x="7018020" y="1664208"/>
+            <a:ext cx="1485900" cy="777240"/>
+          </a:xfrm>
+          <a:prstGeom prst="rect">
+            <a:avLst/>
+          </a:prstGeom>
+          <a:noFill/>
+          <a:ln/>
+        </p:spPr>
+        <p:txBody>
+          <a:bodyPr wrap="square" lIns="0" tIns="0" rIns="0" bIns="0" rtlCol="0" anchor="ctr"/>
+          <a:lstStyle/>
+          <a:p>
+            <a:pPr indent="0" marL="0">
+              <a:buNone/>
+            </a:pPr>
+            <a:r>
+              <a:rPr lang="en-US" sz="4400" b="1" dirty="0">
+                <a:solidFill>
+                  <a:srgbClr val="C8102E"/>
+                </a:solidFill>
+                <a:latin typeface="Montserrat" pitchFamily="34" charset="0"/>
+                <a:ea typeface="Montserrat" pitchFamily="34" charset="-122"/>
+                <a:cs typeface="Montserrat" pitchFamily="34" charset="-120"/>
+              </a:rPr>
+              <a:t>0</a:t>
+            </a:r>
+            <a:endParaRPr lang="en-US" sz="4400" dirty="0"/>
+          </a:p>
+        </p:txBody>
+      </p:sp>
+      <p:sp>
+        <p:nvSpPr>
+          <p:cNvPr id="18" name="Text 15"/>
+          <p:cNvSpPr/>
+          <p:nvPr/>
+        </p:nvSpPr>
+        <p:spPr>
+          <a:xfrm>
+            <a:off x="7018020" y="2432304"/>
+            <a:ext cx="1485900" cy="411480"/>
+          </a:xfrm>
+          <a:prstGeom prst="rect">
+            <a:avLst/>
+          </a:prstGeom>
+          <a:noFill/>
+          <a:ln/>
+        </p:spPr>
+        <p:txBody>
+          <a:bodyPr wrap="square" lIns="0" tIns="0" rIns="0" bIns="0" rtlCol="0" anchor="t"/>
+          <a:lstStyle/>
+          <a:p>
+            <a:pPr indent="0" marL="0">
+              <a:buNone/>
+            </a:pPr>
+            <a:r>
+              <a:rPr lang="en-US" sz="1200" dirty="0">
+                <a:solidFill>
+                  <a:srgbClr val="4F5E71"/>
+                </a:solidFill>
+                <a:latin typeface="Calibri" pitchFamily="34" charset="0"/>
+                <a:ea typeface="Calibri" pitchFamily="34" charset="-122"/>
+                <a:cs typeface="Calibri" pitchFamily="34" charset="-120"/>
+              </a:rPr>
+              <a:t>raw tokens ever sent to the browser</a:t>
+            </a:r>
+            <a:endParaRPr lang="en-US" sz="1200" dirty="0"/>
+          </a:p>
+        </p:txBody>
+      </p:sp>
+      <p:sp>
+        <p:nvSpPr>
+          <p:cNvPr id="19" name="Shape 16"/>
+          <p:cNvSpPr/>
+          <p:nvPr/>
+        </p:nvSpPr>
+        <p:spPr>
+          <a:xfrm>
+            <a:off x="457200" y="3291840"/>
+            <a:ext cx="8229600" cy="1280160"/>
+          </a:xfrm>
+          <a:prstGeom prst="rect">
+            <a:avLst/>
+          </a:prstGeom>
+          <a:solidFill>
+            <a:srgbClr val="FFFFFF"/>
+          </a:solidFill>
+          <a:ln w="9525">
+            <a:solidFill>
+              <a:srgbClr val="D5DBE3"/>
+            </a:solidFill>
+            <a:prstDash val="solid"/>
+          </a:ln>
+        </p:spPr>
+      </p:sp>
+      <p:sp>
+        <p:nvSpPr>
+          <p:cNvPr id="20" name="Shape 17"/>
+          <p:cNvSpPr/>
+          <p:nvPr/>
+        </p:nvSpPr>
+        <p:spPr>
+          <a:xfrm>
+            <a:off x="658368" y="3474720"/>
+            <a:ext cx="384048" cy="384048"/>
+          </a:xfrm>
+          <a:prstGeom prst="ellipse">
+            <a:avLst/>
+          </a:prstGeom>
+          <a:solidFill>
+            <a:srgbClr val="0B1A2E"/>
+          </a:solidFill>
+          <a:ln/>
+        </p:spPr>
+      </p:sp>
+      <p:pic>
+        <p:nvPicPr>
+          <p:cNvPr id="21" name="Image 0" descr="preencoded.png">    </p:cNvPr>
+          <p:cNvPicPr>
+            <a:picLocks noChangeAspect="1"/>
+          </p:cNvPicPr>
+          <p:nvPr/>
+        </p:nvPicPr>
+        <p:blipFill>
+          <a:blip r:embed="rId1"/>
+          <a:stretch>
+            <a:fillRect/>
+          </a:stretch>
+        </p:blipFill>
+        <p:spPr>
+          <a:xfrm>
+            <a:off x="762061" y="3578413"/>
+            <a:ext cx="176662" cy="176662"/>
+          </a:xfrm>
+          <a:prstGeom prst="rect">
+            <a:avLst/>
+          </a:prstGeom>
+        </p:spPr>
+      </p:pic>
+      <p:sp>
+        <p:nvSpPr>
+          <p:cNvPr id="22" name="Text 18"/>
+          <p:cNvSpPr/>
+          <p:nvPr/>
+        </p:nvSpPr>
+        <p:spPr>
+          <a:xfrm>
+            <a:off x="1188720" y="3474720"/>
+            <a:ext cx="914400" cy="384048"/>
+          </a:xfrm>
+          <a:prstGeom prst="rect">
+            <a:avLst/>
+          </a:prstGeom>
+          <a:noFill/>
+          <a:ln/>
+        </p:spPr>
+        <p:txBody>
+          <a:bodyPr wrap="square" lIns="0" tIns="0" rIns="0" bIns="0" rtlCol="0" anchor="ctr"/>
+          <a:lstStyle/>
+          <a:p>
+            <a:pPr indent="0" marL="0">
+              <a:buNone/>
+            </a:pPr>
+            <a:r>
+              <a:rPr lang="en-US" sz="1150" b="1" dirty="0">
+                <a:solidFill>
+                  <a:srgbClr val="0B1A2E"/>
+                </a:solidFill>
+                <a:latin typeface="Montserrat" pitchFamily="34" charset="0"/>
+                <a:ea typeface="Montserrat" pitchFamily="34" charset="-122"/>
+                <a:cs typeface="Montserrat" pitchFamily="34" charset="-120"/>
+              </a:rPr>
+              <a:t>Built on</a:t>
+            </a:r>
+            <a:endParaRPr lang="en-US" sz="1150" dirty="0"/>
+          </a:p>
+        </p:txBody>
+      </p:sp>
+      <p:sp>
+        <p:nvSpPr>
+          <p:cNvPr id="23" name="Text 19"/>
+          <p:cNvSpPr/>
+          <p:nvPr/>
+        </p:nvSpPr>
+        <p:spPr>
+          <a:xfrm>
+            <a:off x="2103120" y="3474720"/>
+            <a:ext cx="6492240" cy="384048"/>
+          </a:xfrm>
+          <a:prstGeom prst="rect">
+            <a:avLst/>
+          </a:prstGeom>
+          <a:noFill/>
+          <a:ln/>
+        </p:spPr>
+        <p:txBody>
+          <a:bodyPr wrap="square" lIns="0" tIns="0" rIns="0" bIns="0" rtlCol="0" anchor="ctr"/>
+          <a:lstStyle/>
+          <a:p>
+            <a:pPr indent="0" marL="0">
+              <a:buNone/>
+            </a:pPr>
+            <a:r>
+              <a:rPr lang="en-US" sz="1150" dirty="0">
+                <a:solidFill>
+                  <a:srgbClr val="0B1A2E"/>
+                </a:solidFill>
+                <a:latin typeface="Calibri" pitchFamily="34" charset="0"/>
+                <a:ea typeface="Calibri" pitchFamily="34" charset="-122"/>
+                <a:cs typeface="Calibri" pitchFamily="34" charset="-120"/>
+              </a:rPr>
+              <a:t>PingOne SSO and MFA · token exchange · PingOne Authorize · PingOne Privilege · DaVinci</a:t>
+            </a:r>
+            <a:endParaRPr lang="en-US" sz="1150" dirty="0"/>
+          </a:p>
+        </p:txBody>
+      </p:sp>
+      <p:sp>
+        <p:nvSpPr>
+          <p:cNvPr id="24" name="Shape 20"/>
+          <p:cNvSpPr/>
+          <p:nvPr/>
+        </p:nvSpPr>
+        <p:spPr>
+          <a:xfrm>
+            <a:off x="658368" y="4005072"/>
+            <a:ext cx="384048" cy="384048"/>
+          </a:xfrm>
+          <a:prstGeom prst="ellipse">
+            <a:avLst/>
+          </a:prstGeom>
+          <a:solidFill>
+            <a:srgbClr val="0B1A2E"/>
+          </a:solidFill>
+          <a:ln/>
+        </p:spPr>
+      </p:sp>
+      <p:pic>
+        <p:nvPicPr>
+          <p:cNvPr id="25" name="Image 1" descr="preencoded.png">    </p:cNvPr>
+          <p:cNvPicPr>
+            <a:picLocks noChangeAspect="1"/>
+          </p:cNvPicPr>
+          <p:nvPr/>
+        </p:nvPicPr>
+        <p:blipFill>
+          <a:blip r:embed="rId2"/>
+          <a:stretch>
+            <a:fillRect/>
+          </a:stretch>
+        </p:blipFill>
+        <p:spPr>
+          <a:xfrm>
+            <a:off x="762061" y="4108765"/>
+            <a:ext cx="176662" cy="176662"/>
+          </a:xfrm>
+          <a:prstGeom prst="rect">
+            <a:avLst/>
+          </a:prstGeom>
+        </p:spPr>
+      </p:pic>
+      <p:sp>
+        <p:nvSpPr>
+          <p:cNvPr id="26" name="Text 21"/>
+          <p:cNvSpPr/>
+          <p:nvPr/>
+        </p:nvSpPr>
+        <p:spPr>
+          <a:xfrm>
+            <a:off x="1188720" y="4005072"/>
+            <a:ext cx="914400" cy="384048"/>
+          </a:xfrm>
+          <a:prstGeom prst="rect">
+            <a:avLst/>
+          </a:prstGeom>
+          <a:noFill/>
+          <a:ln/>
+        </p:spPr>
+        <p:txBody>
+          <a:bodyPr wrap="square" lIns="0" tIns="0" rIns="0" bIns="0" rtlCol="0" anchor="ctr"/>
+          <a:lstStyle/>
+          <a:p>
+            <a:pPr indent="0" marL="0">
+              <a:buNone/>
+            </a:pPr>
+            <a:r>
+              <a:rPr lang="en-US" sz="1150" b="1" dirty="0">
+                <a:solidFill>
+                  <a:srgbClr val="0B1A2E"/>
+                </a:solidFill>
+                <a:latin typeface="Montserrat" pitchFamily="34" charset="0"/>
+                <a:ea typeface="Montserrat" pitchFamily="34" charset="-122"/>
+                <a:cs typeface="Montserrat" pitchFamily="34" charset="-120"/>
+              </a:rPr>
+              <a:t>Runs on</a:t>
+            </a:r>
+            <a:endParaRPr lang="en-US" sz="1150" dirty="0"/>
+          </a:p>
+        </p:txBody>
+      </p:sp>
+      <p:sp>
+        <p:nvSpPr>
+          <p:cNvPr id="27" name="Text 22"/>
+          <p:cNvSpPr/>
+          <p:nvPr/>
+        </p:nvSpPr>
+        <p:spPr>
+          <a:xfrm>
+            <a:off x="2103120" y="4005072"/>
+            <a:ext cx="6492240" cy="384048"/>
+          </a:xfrm>
+          <a:prstGeom prst="rect">
+            <a:avLst/>
+          </a:prstGeom>
+          <a:noFill/>
+          <a:ln/>
+        </p:spPr>
+        <p:txBody>
+          <a:bodyPr wrap="square" lIns="0" tIns="0" rIns="0" bIns="0" rtlCol="0" anchor="ctr"/>
+          <a:lstStyle/>
+          <a:p>
+            <a:pPr indent="0" marL="0">
+              <a:buNone/>
+            </a:pPr>
+            <a:r>
+              <a:rPr lang="en-US" sz="1150" dirty="0">
+                <a:solidFill>
+                  <a:srgbClr val="0B1A2E"/>
+                </a:solidFill>
+                <a:latin typeface="Calibri" pitchFamily="34" charset="0"/>
+                <a:ea typeface="Calibri" pitchFamily="34" charset="-122"/>
+                <a:cs typeface="Calibri" pitchFamily="34" charset="-120"/>
+              </a:rPr>
+              <a:t>Docker on a laptop · local Kubernetes (OrbStack) · ai-demo.ping-devops.com (Ping SE cluster)</a:t>
+            </a:r>
+            <a:endParaRPr lang="en-US" sz="1150" dirty="0"/>
+          </a:p>
+        </p:txBody>
+      </p:sp>
+    </p:spTree>
+  </p:cSld>
+  <p:clrMapOvr>
+    <a:masterClrMapping/>
+  </p:clrMapOvr>
+</p:sld>
+</file>
+
+<file path=ppt/slides/slide20.xml><?xml version="1.0" encoding="utf-8"?>
+<p:sld xmlns:a="http://schemas.openxmlformats.org/drawingml/2006/main" xmlns:r="http://schemas.openxmlformats.org/officeDocument/2006/relationships" xmlns:p="http://schemas.openxmlformats.org/presentationml/2006/main">
+  <p:cSld name="Slide 20">
+    <p:bg>
+      <p:bgPr>
+        <a:solidFill>
+          <a:srgbClr val="F4F5F7"/>
+        </a:solidFill>
+      </p:bgPr>
+    </p:bg>
+    <p:spTree>
+      <p:nvGrpSpPr>
+        <p:cNvPr id="1" name=""/>
+        <p:cNvGrpSpPr/>
+        <p:nvPr/>
+      </p:nvGrpSpPr>
+      <p:grpSpPr>
+        <a:xfrm>
+          <a:off x="0" y="0"/>
+          <a:ext cx="0" cy="0"/>
+          <a:chOff x="0" y="0"/>
+          <a:chExt cx="0" cy="0"/>
+        </a:xfrm>
+      </p:grpSpPr>
+      <p:sp>
+        <p:nvSpPr>
+          <p:cNvPr id="2" name="Shape 0"/>
+          <p:cNvSpPr/>
+          <p:nvPr/>
+        </p:nvSpPr>
+        <p:spPr>
+          <a:xfrm>
+            <a:off x="457200" y="384048"/>
+            <a:ext cx="100584" cy="100584"/>
+          </a:xfrm>
+          <a:prstGeom prst="rect">
+            <a:avLst/>
+          </a:prstGeom>
+          <a:solidFill>
+            <a:srgbClr val="C8102E"/>
+          </a:solidFill>
+          <a:ln/>
+        </p:spPr>
+      </p:sp>
+      <p:sp>
+        <p:nvSpPr>
+          <p:cNvPr id="3" name="Text 1"/>
+          <p:cNvSpPr/>
+          <p:nvPr/>
+        </p:nvSpPr>
+        <p:spPr>
+          <a:xfrm>
+            <a:off x="640080" y="301752"/>
+            <a:ext cx="6400800" cy="274320"/>
+          </a:xfrm>
+          <a:prstGeom prst="rect">
+            <a:avLst/>
+          </a:prstGeom>
+          <a:noFill/>
+          <a:ln/>
+        </p:spPr>
+        <p:txBody>
+          <a:bodyPr wrap="square" lIns="0" tIns="0" rIns="0" bIns="0" rtlCol="0" anchor="ctr"/>
+          <a:lstStyle/>
+          <a:p>
+            <a:pPr indent="0" marL="0">
+              <a:buNone/>
+            </a:pPr>
+            <a:r>
+              <a:rPr lang="en-US" sz="1000" b="1" spc="300" kern="0" dirty="0">
+                <a:solidFill>
+                  <a:srgbClr val="4F5E71"/>
+                </a:solidFill>
+                <a:latin typeface="Montserrat" pitchFamily="34" charset="0"/>
+                <a:ea typeface="Montserrat" pitchFamily="34" charset="-122"/>
+                <a:cs typeface="Montserrat" pitchFamily="34" charset="-120"/>
+              </a:rPr>
               <a:t>APPENDIX  ·  DEMO STEPS 1–12</a:t>
             </a:r>
             <a:endParaRPr lang="en-US" sz="1000" dirty="0"/>
@@ -22899,7 +27547,7 @@
                 <a:ea typeface="Calibri" pitchFamily="34" charset="-122"/>
                 <a:cs typeface="Calibri" pitchFamily="34" charset="-120"/>
               </a:rPr>
-              <a:t>17</a:t>
+              <a:t>20</a:t>
             </a:r>
             <a:endParaRPr lang="en-US" sz="900" dirty="0"/>
           </a:p>
@@ -22907,7 +27555,7 @@
       </p:sp>
       <p:graphicFrame>
         <p:nvGraphicFramePr>
-          <p:cNvPr id="18" name="Table 0"/>
+          <p:cNvPr id="21" name="Table 0"/>
           <p:cNvGraphicFramePr>
             <a:graphicFrameLocks noGrp="1"/>
           </p:cNvGraphicFramePr>
@@ -26546,9 +31194,9 @@
 </p:sld>
 </file>
 
-<file path=ppt/slides/slide18.xml><?xml version="1.0" encoding="utf-8"?>
+<file path=ppt/slides/slide21.xml><?xml version="1.0" encoding="utf-8"?>
 <p:sld xmlns:a="http://schemas.openxmlformats.org/drawingml/2006/main" xmlns:r="http://schemas.openxmlformats.org/officeDocument/2006/relationships" xmlns:p="http://schemas.openxmlformats.org/presentationml/2006/main">
-  <p:cSld name="Slide 18">
+  <p:cSld name="Slide 21">
     <p:bg>
       <p:bgPr>
         <a:solidFill>
@@ -26701,7 +31349,7 @@
                 <a:ea typeface="Calibri" pitchFamily="34" charset="-122"/>
                 <a:cs typeface="Calibri" pitchFamily="34" charset="-120"/>
               </a:rPr>
-              <a:t>18</a:t>
+              <a:t>21</a:t>
             </a:r>
             <a:endParaRPr lang="en-US" sz="900" dirty="0"/>
           </a:p>
@@ -26709,7 +31357,7 @@
       </p:sp>
       <p:graphicFrame>
         <p:nvGraphicFramePr>
-          <p:cNvPr id="19" name="Table 0"/>
+          <p:cNvPr id="22" name="Table 0"/>
           <p:cNvGraphicFramePr>
             <a:graphicFrameLocks noGrp="1"/>
           </p:cNvGraphicFramePr>
@@ -30348,9 +34996,9 @@
 </p:sld>
 </file>
 
-<file path=ppt/slides/slide19.xml><?xml version="1.0" encoding="utf-8"?>
+<file path=ppt/slides/slide22.xml><?xml version="1.0" encoding="utf-8"?>
 <p:sld xmlns:a="http://schemas.openxmlformats.org/drawingml/2006/main" xmlns:r="http://schemas.openxmlformats.org/officeDocument/2006/relationships" xmlns:p="http://schemas.openxmlformats.org/presentationml/2006/main">
-  <p:cSld name="Slide 19">
+  <p:cSld name="Slide 22">
     <p:bg>
       <p:bgPr>
         <a:solidFill>
@@ -30503,7 +35151,7 @@
                 <a:ea typeface="Calibri" pitchFamily="34" charset="-122"/>
                 <a:cs typeface="Calibri" pitchFamily="34" charset="-120"/>
               </a:rPr>
-              <a:t>19</a:t>
+              <a:t>22</a:t>
             </a:r>
             <a:endParaRPr lang="en-US" sz="900" dirty="0"/>
           </a:p>
@@ -30511,7 +35159,7 @@
       </p:sp>
       <p:graphicFrame>
         <p:nvGraphicFramePr>
-          <p:cNvPr id="20" name="Table 0"/>
+          <p:cNvPr id="23" name="Table 0"/>
           <p:cNvGraphicFramePr>
             <a:graphicFrameLocks noGrp="1"/>
           </p:cNvGraphicFramePr>
@@ -32232,859 +36880,9 @@
 </p:sld>
 </file>
 
-<file path=ppt/slides/slide2.xml><?xml version="1.0" encoding="utf-8"?>
+<file path=ppt/slides/slide23.xml><?xml version="1.0" encoding="utf-8"?>
 <p:sld xmlns:a="http://schemas.openxmlformats.org/drawingml/2006/main" xmlns:r="http://schemas.openxmlformats.org/officeDocument/2006/relationships" xmlns:p="http://schemas.openxmlformats.org/presentationml/2006/main">
-  <p:cSld name="Slide 2">
-    <p:bg>
-      <p:bgPr>
-        <a:solidFill>
-          <a:srgbClr val="F4F5F7"/>
-        </a:solidFill>
-      </p:bgPr>
-    </p:bg>
-    <p:spTree>
-      <p:nvGrpSpPr>
-        <p:cNvPr id="1" name=""/>
-        <p:cNvGrpSpPr/>
-        <p:nvPr/>
-      </p:nvGrpSpPr>
-      <p:grpSpPr>
-        <a:xfrm>
-          <a:off x="0" y="0"/>
-          <a:ext cx="0" cy="0"/>
-          <a:chOff x="0" y="0"/>
-          <a:chExt cx="0" cy="0"/>
-        </a:xfrm>
-      </p:grpSpPr>
-      <p:sp>
-        <p:nvSpPr>
-          <p:cNvPr id="2" name="Shape 0"/>
-          <p:cNvSpPr/>
-          <p:nvPr/>
-        </p:nvSpPr>
-        <p:spPr>
-          <a:xfrm>
-            <a:off x="457200" y="384048"/>
-            <a:ext cx="100584" cy="100584"/>
-          </a:xfrm>
-          <a:prstGeom prst="rect">
-            <a:avLst/>
-          </a:prstGeom>
-          <a:solidFill>
-            <a:srgbClr val="C8102E"/>
-          </a:solidFill>
-          <a:ln/>
-        </p:spPr>
-      </p:sp>
-      <p:sp>
-        <p:nvSpPr>
-          <p:cNvPr id="3" name="Text 1"/>
-          <p:cNvSpPr/>
-          <p:nvPr/>
-        </p:nvSpPr>
-        <p:spPr>
-          <a:xfrm>
-            <a:off x="640080" y="301752"/>
-            <a:ext cx="6400800" cy="274320"/>
-          </a:xfrm>
-          <a:prstGeom prst="rect">
-            <a:avLst/>
-          </a:prstGeom>
-          <a:noFill/>
-          <a:ln/>
-        </p:spPr>
-        <p:txBody>
-          <a:bodyPr wrap="square" lIns="0" tIns="0" rIns="0" bIns="0" rtlCol="0" anchor="ctr"/>
-          <a:lstStyle/>
-          <a:p>
-            <a:pPr indent="0" marL="0">
-              <a:buNone/>
-            </a:pPr>
-            <a:r>
-              <a:rPr lang="en-US" sz="1000" b="1" spc="300" kern="0" dirty="0">
-                <a:solidFill>
-                  <a:srgbClr val="4F5E71"/>
-                </a:solidFill>
-                <a:latin typeface="Montserrat" pitchFamily="34" charset="0"/>
-                <a:ea typeface="Montserrat" pitchFamily="34" charset="-122"/>
-                <a:cs typeface="Montserrat" pitchFamily="34" charset="-120"/>
-              </a:rPr>
-              <a:t>AT A GLANCE</a:t>
-            </a:r>
-            <a:endParaRPr lang="en-US" sz="1000" dirty="0"/>
-          </a:p>
-        </p:txBody>
-      </p:sp>
-      <p:sp>
-        <p:nvSpPr>
-          <p:cNvPr id="4" name="Text 2"/>
-          <p:cNvSpPr/>
-          <p:nvPr/>
-        </p:nvSpPr>
-        <p:spPr>
-          <a:xfrm>
-            <a:off x="457200" y="603504"/>
-            <a:ext cx="8229600" cy="786384"/>
-          </a:xfrm>
-          <a:prstGeom prst="rect">
-            <a:avLst/>
-          </a:prstGeom>
-          <a:noFill/>
-          <a:ln/>
-        </p:spPr>
-        <p:txBody>
-          <a:bodyPr wrap="square" lIns="0" tIns="0" rIns="0" bIns="0" rtlCol="0" anchor="t"/>
-          <a:lstStyle/>
-          <a:p>
-            <a:pPr indent="0" marL="0">
-              <a:buNone/>
-            </a:pPr>
-            <a:r>
-              <a:rPr lang="en-US" sz="2100" b="1" dirty="0">
-                <a:solidFill>
-                  <a:srgbClr val="0B1A2E"/>
-                </a:solidFill>
-                <a:latin typeface="Montserrat" pitchFamily="34" charset="0"/>
-                <a:ea typeface="Montserrat" pitchFamily="34" charset="-122"/>
-                <a:cs typeface="Montserrat" pitchFamily="34" charset="-120"/>
-              </a:rPr>
-              <a:t>A working bank where AI agents act for customers, and PingOne decides what they may do</a:t>
-            </a:r>
-            <a:endParaRPr lang="en-US" sz="2100" dirty="0"/>
-          </a:p>
-        </p:txBody>
-      </p:sp>
-      <p:sp>
-        <p:nvSpPr>
-          <p:cNvPr id="5" name="Text 3"/>
-          <p:cNvSpPr/>
-          <p:nvPr/>
-        </p:nvSpPr>
-        <p:spPr>
-          <a:xfrm>
-            <a:off x="8229600" y="4846320"/>
-            <a:ext cx="457200" cy="182880"/>
-          </a:xfrm>
-          <a:prstGeom prst="rect">
-            <a:avLst/>
-          </a:prstGeom>
-          <a:noFill/>
-          <a:ln/>
-        </p:spPr>
-        <p:txBody>
-          <a:bodyPr wrap="square" lIns="0" tIns="0" rIns="0" bIns="0" rtlCol="0" anchor="ctr"/>
-          <a:lstStyle/>
-          <a:p>
-            <a:pPr algn="r" indent="0" marL="0">
-              <a:buNone/>
-            </a:pPr>
-            <a:r>
-              <a:rPr lang="en-US" sz="900" dirty="0">
-                <a:solidFill>
-                  <a:srgbClr val="4F5E71"/>
-                </a:solidFill>
-                <a:latin typeface="Calibri" pitchFamily="34" charset="0"/>
-                <a:ea typeface="Calibri" pitchFamily="34" charset="-122"/>
-                <a:cs typeface="Calibri" pitchFamily="34" charset="-120"/>
-              </a:rPr>
-              <a:t>2</a:t>
-            </a:r>
-            <a:endParaRPr lang="en-US" sz="900" dirty="0"/>
-          </a:p>
-        </p:txBody>
-      </p:sp>
-      <p:sp>
-        <p:nvSpPr>
-          <p:cNvPr id="7" name="Shape 4"/>
-          <p:cNvSpPr/>
-          <p:nvPr/>
-        </p:nvSpPr>
-        <p:spPr>
-          <a:xfrm>
-            <a:off x="457200" y="1572768"/>
-            <a:ext cx="1851660" cy="1417320"/>
-          </a:xfrm>
-          <a:prstGeom prst="rect">
-            <a:avLst/>
-          </a:prstGeom>
-          <a:solidFill>
-            <a:srgbClr val="FFFFFF"/>
-          </a:solidFill>
-          <a:ln w="9525">
-            <a:solidFill>
-              <a:srgbClr val="D5DBE3"/>
-            </a:solidFill>
-            <a:prstDash val="solid"/>
-          </a:ln>
-        </p:spPr>
-      </p:sp>
-      <p:sp>
-        <p:nvSpPr>
-          <p:cNvPr id="8" name="Text 5"/>
-          <p:cNvSpPr/>
-          <p:nvPr/>
-        </p:nvSpPr>
-        <p:spPr>
-          <a:xfrm>
-            <a:off x="640080" y="1664208"/>
-            <a:ext cx="1485900" cy="777240"/>
-          </a:xfrm>
-          <a:prstGeom prst="rect">
-            <a:avLst/>
-          </a:prstGeom>
-          <a:noFill/>
-          <a:ln/>
-        </p:spPr>
-        <p:txBody>
-          <a:bodyPr wrap="square" lIns="0" tIns="0" rIns="0" bIns="0" rtlCol="0" anchor="ctr"/>
-          <a:lstStyle/>
-          <a:p>
-            <a:pPr indent="0" marL="0">
-              <a:buNone/>
-            </a:pPr>
-            <a:r>
-              <a:rPr lang="en-US" sz="4400" b="1" dirty="0">
-                <a:solidFill>
-                  <a:srgbClr val="C8102E"/>
-                </a:solidFill>
-                <a:latin typeface="Montserrat" pitchFamily="34" charset="0"/>
-                <a:ea typeface="Montserrat" pitchFamily="34" charset="-122"/>
-                <a:cs typeface="Montserrat" pitchFamily="34" charset="-120"/>
-              </a:rPr>
-              <a:t>62</a:t>
-            </a:r>
-            <a:endParaRPr lang="en-US" sz="4400" dirty="0"/>
-          </a:p>
-        </p:txBody>
-      </p:sp>
-      <p:sp>
-        <p:nvSpPr>
-          <p:cNvPr id="9" name="Text 6"/>
-          <p:cNvSpPr/>
-          <p:nvPr/>
-        </p:nvSpPr>
-        <p:spPr>
-          <a:xfrm>
-            <a:off x="640080" y="2432304"/>
-            <a:ext cx="1485900" cy="411480"/>
-          </a:xfrm>
-          <a:prstGeom prst="rect">
-            <a:avLst/>
-          </a:prstGeom>
-          <a:noFill/>
-          <a:ln/>
-        </p:spPr>
-        <p:txBody>
-          <a:bodyPr wrap="square" lIns="0" tIns="0" rIns="0" bIns="0" rtlCol="0" anchor="t"/>
-          <a:lstStyle/>
-          <a:p>
-            <a:pPr indent="0" marL="0">
-              <a:buNone/>
-            </a:pPr>
-            <a:r>
-              <a:rPr lang="en-US" sz="1200" dirty="0">
-                <a:solidFill>
-                  <a:srgbClr val="4F5E71"/>
-                </a:solidFill>
-                <a:latin typeface="Calibri" pitchFamily="34" charset="0"/>
-                <a:ea typeface="Calibri" pitchFamily="34" charset="-122"/>
-                <a:cs typeface="Calibri" pitchFamily="34" charset="-120"/>
-              </a:rPr>
-              <a:t>use cases in the catalog</a:t>
-            </a:r>
-            <a:endParaRPr lang="en-US" sz="1200" dirty="0"/>
-          </a:p>
-        </p:txBody>
-      </p:sp>
-      <p:sp>
-        <p:nvSpPr>
-          <p:cNvPr id="10" name="Shape 7"/>
-          <p:cNvSpPr/>
-          <p:nvPr/>
-        </p:nvSpPr>
-        <p:spPr>
-          <a:xfrm>
-            <a:off x="2583180" y="1572768"/>
-            <a:ext cx="1851660" cy="1417320"/>
-          </a:xfrm>
-          <a:prstGeom prst="rect">
-            <a:avLst/>
-          </a:prstGeom>
-          <a:solidFill>
-            <a:srgbClr val="FFFFFF"/>
-          </a:solidFill>
-          <a:ln w="9525">
-            <a:solidFill>
-              <a:srgbClr val="D5DBE3"/>
-            </a:solidFill>
-            <a:prstDash val="solid"/>
-          </a:ln>
-        </p:spPr>
-      </p:sp>
-      <p:sp>
-        <p:nvSpPr>
-          <p:cNvPr id="11" name="Text 8"/>
-          <p:cNvSpPr/>
-          <p:nvPr/>
-        </p:nvSpPr>
-        <p:spPr>
-          <a:xfrm>
-            <a:off x="2766060" y="1664208"/>
-            <a:ext cx="1485900" cy="777240"/>
-          </a:xfrm>
-          <a:prstGeom prst="rect">
-            <a:avLst/>
-          </a:prstGeom>
-          <a:noFill/>
-          <a:ln/>
-        </p:spPr>
-        <p:txBody>
-          <a:bodyPr wrap="square" lIns="0" tIns="0" rIns="0" bIns="0" rtlCol="0" anchor="ctr"/>
-          <a:lstStyle/>
-          <a:p>
-            <a:pPr indent="0" marL="0">
-              <a:buNone/>
-            </a:pPr>
-            <a:r>
-              <a:rPr lang="en-US" sz="4400" b="1" dirty="0">
-                <a:solidFill>
-                  <a:srgbClr val="C8102E"/>
-                </a:solidFill>
-                <a:latin typeface="Montserrat" pitchFamily="34" charset="0"/>
-                <a:ea typeface="Montserrat" pitchFamily="34" charset="-122"/>
-                <a:cs typeface="Montserrat" pitchFamily="34" charset="-120"/>
-              </a:rPr>
-              <a:t>11</a:t>
-            </a:r>
-            <a:endParaRPr lang="en-US" sz="4400" dirty="0"/>
-          </a:p>
-        </p:txBody>
-      </p:sp>
-      <p:sp>
-        <p:nvSpPr>
-          <p:cNvPr id="12" name="Text 9"/>
-          <p:cNvSpPr/>
-          <p:nvPr/>
-        </p:nvSpPr>
-        <p:spPr>
-          <a:xfrm>
-            <a:off x="2766060" y="2432304"/>
-            <a:ext cx="1485900" cy="411480"/>
-          </a:xfrm>
-          <a:prstGeom prst="rect">
-            <a:avLst/>
-          </a:prstGeom>
-          <a:noFill/>
-          <a:ln/>
-        </p:spPr>
-        <p:txBody>
-          <a:bodyPr wrap="square" lIns="0" tIns="0" rIns="0" bIns="0" rtlCol="0" anchor="t"/>
-          <a:lstStyle/>
-          <a:p>
-            <a:pPr indent="0" marL="0">
-              <a:buNone/>
-            </a:pPr>
-            <a:r>
-              <a:rPr lang="en-US" sz="1200" dirty="0">
-                <a:solidFill>
-                  <a:srgbClr val="4F5E71"/>
-                </a:solidFill>
-                <a:latin typeface="Calibri" pitchFamily="34" charset="0"/>
-                <a:ea typeface="Calibri" pitchFamily="34" charset="-122"/>
-                <a:cs typeface="Calibri" pitchFamily="34" charset="-120"/>
-              </a:rPr>
-              <a:t>industry verticals on one platform</a:t>
-            </a:r>
-            <a:endParaRPr lang="en-US" sz="1200" dirty="0"/>
-          </a:p>
-        </p:txBody>
-      </p:sp>
-      <p:sp>
-        <p:nvSpPr>
-          <p:cNvPr id="13" name="Shape 10"/>
-          <p:cNvSpPr/>
-          <p:nvPr/>
-        </p:nvSpPr>
-        <p:spPr>
-          <a:xfrm>
-            <a:off x="4709160" y="1572768"/>
-            <a:ext cx="1851660" cy="1417320"/>
-          </a:xfrm>
-          <a:prstGeom prst="rect">
-            <a:avLst/>
-          </a:prstGeom>
-          <a:solidFill>
-            <a:srgbClr val="FFFFFF"/>
-          </a:solidFill>
-          <a:ln w="9525">
-            <a:solidFill>
-              <a:srgbClr val="D5DBE3"/>
-            </a:solidFill>
-            <a:prstDash val="solid"/>
-          </a:ln>
-        </p:spPr>
-      </p:sp>
-      <p:sp>
-        <p:nvSpPr>
-          <p:cNvPr id="14" name="Text 11"/>
-          <p:cNvSpPr/>
-          <p:nvPr/>
-        </p:nvSpPr>
-        <p:spPr>
-          <a:xfrm>
-            <a:off x="4892040" y="1664208"/>
-            <a:ext cx="1485900" cy="777240"/>
-          </a:xfrm>
-          <a:prstGeom prst="rect">
-            <a:avLst/>
-          </a:prstGeom>
-          <a:noFill/>
-          <a:ln/>
-        </p:spPr>
-        <p:txBody>
-          <a:bodyPr wrap="square" lIns="0" tIns="0" rIns="0" bIns="0" rtlCol="0" anchor="ctr"/>
-          <a:lstStyle/>
-          <a:p>
-            <a:pPr indent="0" marL="0">
-              <a:buNone/>
-            </a:pPr>
-            <a:r>
-              <a:rPr lang="en-US" sz="4400" b="1" dirty="0">
-                <a:solidFill>
-                  <a:srgbClr val="C8102E"/>
-                </a:solidFill>
-                <a:latin typeface="Montserrat" pitchFamily="34" charset="0"/>
-                <a:ea typeface="Montserrat" pitchFamily="34" charset="-122"/>
-                <a:cs typeface="Montserrat" pitchFamily="34" charset="-120"/>
-              </a:rPr>
-              <a:t>4</a:t>
-            </a:r>
-            <a:endParaRPr lang="en-US" sz="4400" dirty="0"/>
-          </a:p>
-        </p:txBody>
-      </p:sp>
-      <p:sp>
-        <p:nvSpPr>
-          <p:cNvPr id="15" name="Text 12"/>
-          <p:cNvSpPr/>
-          <p:nvPr/>
-        </p:nvSpPr>
-        <p:spPr>
-          <a:xfrm>
-            <a:off x="4892040" y="2432304"/>
-            <a:ext cx="1485900" cy="411480"/>
-          </a:xfrm>
-          <a:prstGeom prst="rect">
-            <a:avLst/>
-          </a:prstGeom>
-          <a:noFill/>
-          <a:ln/>
-        </p:spPr>
-        <p:txBody>
-          <a:bodyPr wrap="square" lIns="0" tIns="0" rIns="0" bIns="0" rtlCol="0" anchor="t"/>
-          <a:lstStyle/>
-          <a:p>
-            <a:pPr indent="0" marL="0">
-              <a:buNone/>
-            </a:pPr>
-            <a:r>
-              <a:rPr lang="en-US" sz="1200" dirty="0">
-                <a:solidFill>
-                  <a:srgbClr val="4F5E71"/>
-                </a:solidFill>
-                <a:latin typeface="Calibri" pitchFamily="34" charset="0"/>
-                <a:ea typeface="Calibri" pitchFamily="34" charset="-122"/>
-                <a:cs typeface="Calibri" pitchFamily="34" charset="-120"/>
-              </a:rPr>
-              <a:t>agent frameworks, one security model</a:t>
-            </a:r>
-            <a:endParaRPr lang="en-US" sz="1200" dirty="0"/>
-          </a:p>
-        </p:txBody>
-      </p:sp>
-      <p:sp>
-        <p:nvSpPr>
-          <p:cNvPr id="16" name="Shape 13"/>
-          <p:cNvSpPr/>
-          <p:nvPr/>
-        </p:nvSpPr>
-        <p:spPr>
-          <a:xfrm>
-            <a:off x="6835140" y="1572768"/>
-            <a:ext cx="1851660" cy="1417320"/>
-          </a:xfrm>
-          <a:prstGeom prst="rect">
-            <a:avLst/>
-          </a:prstGeom>
-          <a:solidFill>
-            <a:srgbClr val="FFFFFF"/>
-          </a:solidFill>
-          <a:ln w="9525">
-            <a:solidFill>
-              <a:srgbClr val="D5DBE3"/>
-            </a:solidFill>
-            <a:prstDash val="solid"/>
-          </a:ln>
-        </p:spPr>
-      </p:sp>
-      <p:sp>
-        <p:nvSpPr>
-          <p:cNvPr id="17" name="Text 14"/>
-          <p:cNvSpPr/>
-          <p:nvPr/>
-        </p:nvSpPr>
-        <p:spPr>
-          <a:xfrm>
-            <a:off x="7018020" y="1664208"/>
-            <a:ext cx="1485900" cy="777240"/>
-          </a:xfrm>
-          <a:prstGeom prst="rect">
-            <a:avLst/>
-          </a:prstGeom>
-          <a:noFill/>
-          <a:ln/>
-        </p:spPr>
-        <p:txBody>
-          <a:bodyPr wrap="square" lIns="0" tIns="0" rIns="0" bIns="0" rtlCol="0" anchor="ctr"/>
-          <a:lstStyle/>
-          <a:p>
-            <a:pPr indent="0" marL="0">
-              <a:buNone/>
-            </a:pPr>
-            <a:r>
-              <a:rPr lang="en-US" sz="4400" b="1" dirty="0">
-                <a:solidFill>
-                  <a:srgbClr val="C8102E"/>
-                </a:solidFill>
-                <a:latin typeface="Montserrat" pitchFamily="34" charset="0"/>
-                <a:ea typeface="Montserrat" pitchFamily="34" charset="-122"/>
-                <a:cs typeface="Montserrat" pitchFamily="34" charset="-120"/>
-              </a:rPr>
-              <a:t>0</a:t>
-            </a:r>
-            <a:endParaRPr lang="en-US" sz="4400" dirty="0"/>
-          </a:p>
-        </p:txBody>
-      </p:sp>
-      <p:sp>
-        <p:nvSpPr>
-          <p:cNvPr id="18" name="Text 15"/>
-          <p:cNvSpPr/>
-          <p:nvPr/>
-        </p:nvSpPr>
-        <p:spPr>
-          <a:xfrm>
-            <a:off x="7018020" y="2432304"/>
-            <a:ext cx="1485900" cy="411480"/>
-          </a:xfrm>
-          <a:prstGeom prst="rect">
-            <a:avLst/>
-          </a:prstGeom>
-          <a:noFill/>
-          <a:ln/>
-        </p:spPr>
-        <p:txBody>
-          <a:bodyPr wrap="square" lIns="0" tIns="0" rIns="0" bIns="0" rtlCol="0" anchor="t"/>
-          <a:lstStyle/>
-          <a:p>
-            <a:pPr indent="0" marL="0">
-              <a:buNone/>
-            </a:pPr>
-            <a:r>
-              <a:rPr lang="en-US" sz="1200" dirty="0">
-                <a:solidFill>
-                  <a:srgbClr val="4F5E71"/>
-                </a:solidFill>
-                <a:latin typeface="Calibri" pitchFamily="34" charset="0"/>
-                <a:ea typeface="Calibri" pitchFamily="34" charset="-122"/>
-                <a:cs typeface="Calibri" pitchFamily="34" charset="-120"/>
-              </a:rPr>
-              <a:t>raw tokens ever sent to the browser</a:t>
-            </a:r>
-            <a:endParaRPr lang="en-US" sz="1200" dirty="0"/>
-          </a:p>
-        </p:txBody>
-      </p:sp>
-      <p:sp>
-        <p:nvSpPr>
-          <p:cNvPr id="19" name="Shape 16"/>
-          <p:cNvSpPr/>
-          <p:nvPr/>
-        </p:nvSpPr>
-        <p:spPr>
-          <a:xfrm>
-            <a:off x="457200" y="3291840"/>
-            <a:ext cx="8229600" cy="1280160"/>
-          </a:xfrm>
-          <a:prstGeom prst="rect">
-            <a:avLst/>
-          </a:prstGeom>
-          <a:solidFill>
-            <a:srgbClr val="FFFFFF"/>
-          </a:solidFill>
-          <a:ln w="9525">
-            <a:solidFill>
-              <a:srgbClr val="D5DBE3"/>
-            </a:solidFill>
-            <a:prstDash val="solid"/>
-          </a:ln>
-        </p:spPr>
-      </p:sp>
-      <p:sp>
-        <p:nvSpPr>
-          <p:cNvPr id="20" name="Shape 17"/>
-          <p:cNvSpPr/>
-          <p:nvPr/>
-        </p:nvSpPr>
-        <p:spPr>
-          <a:xfrm>
-            <a:off x="658368" y="3474720"/>
-            <a:ext cx="384048" cy="384048"/>
-          </a:xfrm>
-          <a:prstGeom prst="ellipse">
-            <a:avLst/>
-          </a:prstGeom>
-          <a:solidFill>
-            <a:srgbClr val="0B1A2E"/>
-          </a:solidFill>
-          <a:ln/>
-        </p:spPr>
-      </p:sp>
-      <p:pic>
-        <p:nvPicPr>
-          <p:cNvPr id="21" name="Image 0" descr="preencoded.png">    </p:cNvPr>
-          <p:cNvPicPr>
-            <a:picLocks noChangeAspect="1"/>
-          </p:cNvPicPr>
-          <p:nvPr/>
-        </p:nvPicPr>
-        <p:blipFill>
-          <a:blip r:embed="rId1"/>
-          <a:stretch>
-            <a:fillRect/>
-          </a:stretch>
-        </p:blipFill>
-        <p:spPr>
-          <a:xfrm>
-            <a:off x="762061" y="3578413"/>
-            <a:ext cx="176662" cy="176662"/>
-          </a:xfrm>
-          <a:prstGeom prst="rect">
-            <a:avLst/>
-          </a:prstGeom>
-        </p:spPr>
-      </p:pic>
-      <p:sp>
-        <p:nvSpPr>
-          <p:cNvPr id="22" name="Text 18"/>
-          <p:cNvSpPr/>
-          <p:nvPr/>
-        </p:nvSpPr>
-        <p:spPr>
-          <a:xfrm>
-            <a:off x="1188720" y="3474720"/>
-            <a:ext cx="914400" cy="384048"/>
-          </a:xfrm>
-          <a:prstGeom prst="rect">
-            <a:avLst/>
-          </a:prstGeom>
-          <a:noFill/>
-          <a:ln/>
-        </p:spPr>
-        <p:txBody>
-          <a:bodyPr wrap="square" lIns="0" tIns="0" rIns="0" bIns="0" rtlCol="0" anchor="ctr"/>
-          <a:lstStyle/>
-          <a:p>
-            <a:pPr indent="0" marL="0">
-              <a:buNone/>
-            </a:pPr>
-            <a:r>
-              <a:rPr lang="en-US" sz="1150" b="1" dirty="0">
-                <a:solidFill>
-                  <a:srgbClr val="0B1A2E"/>
-                </a:solidFill>
-                <a:latin typeface="Montserrat" pitchFamily="34" charset="0"/>
-                <a:ea typeface="Montserrat" pitchFamily="34" charset="-122"/>
-                <a:cs typeface="Montserrat" pitchFamily="34" charset="-120"/>
-              </a:rPr>
-              <a:t>Built on</a:t>
-            </a:r>
-            <a:endParaRPr lang="en-US" sz="1150" dirty="0"/>
-          </a:p>
-        </p:txBody>
-      </p:sp>
-      <p:sp>
-        <p:nvSpPr>
-          <p:cNvPr id="23" name="Text 19"/>
-          <p:cNvSpPr/>
-          <p:nvPr/>
-        </p:nvSpPr>
-        <p:spPr>
-          <a:xfrm>
-            <a:off x="2103120" y="3474720"/>
-            <a:ext cx="6492240" cy="384048"/>
-          </a:xfrm>
-          <a:prstGeom prst="rect">
-            <a:avLst/>
-          </a:prstGeom>
-          <a:noFill/>
-          <a:ln/>
-        </p:spPr>
-        <p:txBody>
-          <a:bodyPr wrap="square" lIns="0" tIns="0" rIns="0" bIns="0" rtlCol="0" anchor="ctr"/>
-          <a:lstStyle/>
-          <a:p>
-            <a:pPr indent="0" marL="0">
-              <a:buNone/>
-            </a:pPr>
-            <a:r>
-              <a:rPr lang="en-US" sz="1150" dirty="0">
-                <a:solidFill>
-                  <a:srgbClr val="0B1A2E"/>
-                </a:solidFill>
-                <a:latin typeface="Calibri" pitchFamily="34" charset="0"/>
-                <a:ea typeface="Calibri" pitchFamily="34" charset="-122"/>
-                <a:cs typeface="Calibri" pitchFamily="34" charset="-120"/>
-              </a:rPr>
-              <a:t>PingOne SSO and MFA · token exchange · PingOne Authorize · PingOne Privilege · DaVinci</a:t>
-            </a:r>
-            <a:endParaRPr lang="en-US" sz="1150" dirty="0"/>
-          </a:p>
-        </p:txBody>
-      </p:sp>
-      <p:sp>
-        <p:nvSpPr>
-          <p:cNvPr id="24" name="Shape 20"/>
-          <p:cNvSpPr/>
-          <p:nvPr/>
-        </p:nvSpPr>
-        <p:spPr>
-          <a:xfrm>
-            <a:off x="658368" y="4005072"/>
-            <a:ext cx="384048" cy="384048"/>
-          </a:xfrm>
-          <a:prstGeom prst="ellipse">
-            <a:avLst/>
-          </a:prstGeom>
-          <a:solidFill>
-            <a:srgbClr val="0B1A2E"/>
-          </a:solidFill>
-          <a:ln/>
-        </p:spPr>
-      </p:sp>
-      <p:pic>
-        <p:nvPicPr>
-          <p:cNvPr id="25" name="Image 1" descr="preencoded.png">    </p:cNvPr>
-          <p:cNvPicPr>
-            <a:picLocks noChangeAspect="1"/>
-          </p:cNvPicPr>
-          <p:nvPr/>
-        </p:nvPicPr>
-        <p:blipFill>
-          <a:blip r:embed="rId2"/>
-          <a:stretch>
-            <a:fillRect/>
-          </a:stretch>
-        </p:blipFill>
-        <p:spPr>
-          <a:xfrm>
-            <a:off x="762061" y="4108765"/>
-            <a:ext cx="176662" cy="176662"/>
-          </a:xfrm>
-          <a:prstGeom prst="rect">
-            <a:avLst/>
-          </a:prstGeom>
-        </p:spPr>
-      </p:pic>
-      <p:sp>
-        <p:nvSpPr>
-          <p:cNvPr id="26" name="Text 21"/>
-          <p:cNvSpPr/>
-          <p:nvPr/>
-        </p:nvSpPr>
-        <p:spPr>
-          <a:xfrm>
-            <a:off x="1188720" y="4005072"/>
-            <a:ext cx="914400" cy="384048"/>
-          </a:xfrm>
-          <a:prstGeom prst="rect">
-            <a:avLst/>
-          </a:prstGeom>
-          <a:noFill/>
-          <a:ln/>
-        </p:spPr>
-        <p:txBody>
-          <a:bodyPr wrap="square" lIns="0" tIns="0" rIns="0" bIns="0" rtlCol="0" anchor="ctr"/>
-          <a:lstStyle/>
-          <a:p>
-            <a:pPr indent="0" marL="0">
-              <a:buNone/>
-            </a:pPr>
-            <a:r>
-              <a:rPr lang="en-US" sz="1150" b="1" dirty="0">
-                <a:solidFill>
-                  <a:srgbClr val="0B1A2E"/>
-                </a:solidFill>
-                <a:latin typeface="Montserrat" pitchFamily="34" charset="0"/>
-                <a:ea typeface="Montserrat" pitchFamily="34" charset="-122"/>
-                <a:cs typeface="Montserrat" pitchFamily="34" charset="-120"/>
-              </a:rPr>
-              <a:t>Runs on</a:t>
-            </a:r>
-            <a:endParaRPr lang="en-US" sz="1150" dirty="0"/>
-          </a:p>
-        </p:txBody>
-      </p:sp>
-      <p:sp>
-        <p:nvSpPr>
-          <p:cNvPr id="27" name="Text 22"/>
-          <p:cNvSpPr/>
-          <p:nvPr/>
-        </p:nvSpPr>
-        <p:spPr>
-          <a:xfrm>
-            <a:off x="2103120" y="4005072"/>
-            <a:ext cx="6492240" cy="384048"/>
-          </a:xfrm>
-          <a:prstGeom prst="rect">
-            <a:avLst/>
-          </a:prstGeom>
-          <a:noFill/>
-          <a:ln/>
-        </p:spPr>
-        <p:txBody>
-          <a:bodyPr wrap="square" lIns="0" tIns="0" rIns="0" bIns="0" rtlCol="0" anchor="ctr"/>
-          <a:lstStyle/>
-          <a:p>
-            <a:pPr indent="0" marL="0">
-              <a:buNone/>
-            </a:pPr>
-            <a:r>
-              <a:rPr lang="en-US" sz="1150" dirty="0">
-                <a:solidFill>
-                  <a:srgbClr val="0B1A2E"/>
-                </a:solidFill>
-                <a:latin typeface="Calibri" pitchFamily="34" charset="0"/>
-                <a:ea typeface="Calibri" pitchFamily="34" charset="-122"/>
-                <a:cs typeface="Calibri" pitchFamily="34" charset="-120"/>
-              </a:rPr>
-              <a:t>Docker on a laptop · local Kubernetes (OrbStack) · ai-demo.ping-devops.com (Ping SE cluster)</a:t>
-            </a:r>
-            <a:endParaRPr lang="en-US" sz="1150" dirty="0"/>
-          </a:p>
-        </p:txBody>
-      </p:sp>
-    </p:spTree>
-  </p:cSld>
-  <p:clrMapOvr>
-    <a:masterClrMapping/>
-  </p:clrMapOvr>
-</p:sld>
-</file>
-
-<file path=ppt/slides/slide20.xml><?xml version="1.0" encoding="utf-8"?>
-<p:sld xmlns:a="http://schemas.openxmlformats.org/drawingml/2006/main" xmlns:r="http://schemas.openxmlformats.org/officeDocument/2006/relationships" xmlns:p="http://schemas.openxmlformats.org/presentationml/2006/main">
-  <p:cSld name="Slide 20">
+  <p:cSld name="Slide 23">
     <p:bg>
       <p:bgPr>
         <a:solidFill>

--- a/docs/resources/AI-Demo-Overview.pptx
+++ b/docs/resources/AI-Demo-Overview.pptx
@@ -1818,7 +1818,11 @@
           <a:p>
             <a:r>
               <a:rPr lang="en-US" dirty="0"/>
-              <a:t>The three standalone repos run with no PingOne tenant and no demo stack; their canonical source is in this repo (standalone/ and demo_llm_proxy/).</a:t>
+              <a:t>GitHub: https://github.com/curtismu7/AI-DEMO2 (public).
+FAQ: https://github.com/curtismu7/AI-DEMO2/blob/main/docs/FAQ.md
+Install: the FAQ's 'Download and install' section (https://github.com/curtismu7/AI-DEMO2/blob/main/docs/FAQ.md#download-and-install) and docs/user-guide/getting-started.md. The README's one-line install points at a retired repo URL until PR #3247 merges, so send people to the FAQ for now.
+Demo guide: the in-app Guided Demo Track at /demo-track (https://local.ping-devops.com:4000/demo-track locally, or the SE cluster's /demo-track when deployed) and the click-by-click walkthroughs in docs/user-guide/AGENT_SHOWCASE_DEMO_SCENARIOS.md.
+The three standalone tools run with no PingOne tenant and no demo stack; their canonical source is in this repo (standalone/ and demo_llm_proxy/).</a:t>
             </a:r>
             <a:endParaRPr lang="en-US" dirty="0"/>
           </a:p>
@@ -36299,7 +36303,7 @@
         </p:nvSpPr>
         <p:spPr>
           <a:xfrm>
-            <a:off x="914400" y="1143000"/>
+            <a:off x="914400" y="868680"/>
             <a:ext cx="7315200" cy="640080"/>
           </a:xfrm>
           <a:prstGeom prst="rect">
@@ -36316,7 +36320,7 @@
               <a:buNone/>
             </a:pPr>
             <a:r>
-              <a:rPr lang="en-US" sz="3200" b="1" dirty="0">
+              <a:rPr lang="en-US" sz="3000" b="1" dirty="0">
                 <a:solidFill>
                   <a:srgbClr val="FFFFFF"/>
                 </a:solidFill>
@@ -36324,9 +36328,9 @@
                 <a:ea typeface="Montserrat" pitchFamily="34" charset="-122"/>
                 <a:cs typeface="Montserrat" pitchFamily="34" charset="-120"/>
               </a:rPr>
-              <a:t>Go deeper</a:t>
+              <a:t>Where to find everything</a:t>
             </a:r>
-            <a:endParaRPr lang="en-US" sz="3200" dirty="0"/>
+            <a:endParaRPr lang="en-US" sz="3000" dirty="0"/>
           </a:p>
         </p:txBody>
       </p:sp>
@@ -36338,8 +36342,8 @@
         </p:nvSpPr>
         <p:spPr>
           <a:xfrm>
-            <a:off x="914400" y="2103120"/>
-            <a:ext cx="457200" cy="457200"/>
+            <a:off x="914400" y="1737360"/>
+            <a:ext cx="402336" cy="402336"/>
           </a:xfrm>
           <a:prstGeom prst="ellipse">
             <a:avLst/>
@@ -36366,8 +36370,8 @@
         </p:blipFill>
         <p:spPr>
           <a:xfrm>
-            <a:off x="1037844" y="2226564"/>
-            <a:ext cx="210312" cy="210312"/>
+            <a:off x="1023031" y="1845991"/>
+            <a:ext cx="185075" cy="185075"/>
           </a:xfrm>
           <a:prstGeom prst="rect">
             <a:avLst/>
@@ -36382,8 +36386,8 @@
         </p:nvSpPr>
         <p:spPr>
           <a:xfrm>
-            <a:off x="914400" y="2670048"/>
-            <a:ext cx="2514600" cy="329184"/>
+            <a:off x="1481328" y="1737360"/>
+            <a:ext cx="1920240" cy="402336"/>
           </a:xfrm>
           <a:prstGeom prst="rect">
             <a:avLst/>
@@ -36399,7 +36403,7 @@
               <a:buNone/>
             </a:pPr>
             <a:r>
-              <a:rPr lang="en-US" sz="1400" b="1" dirty="0">
+              <a:rPr lang="en-US" sz="1250" b="1" dirty="0">
                 <a:solidFill>
                   <a:srgbClr val="FFFFFF"/>
                 </a:solidFill>
@@ -36407,9 +36411,9 @@
                 <a:ea typeface="Montserrat" pitchFamily="34" charset="-122"/>
                 <a:cs typeface="Montserrat" pitchFamily="34" charset="-120"/>
               </a:rPr>
-              <a:t>Run it</a:t>
+              <a:t>GitHub</a:t>
             </a:r>
-            <a:endParaRPr lang="en-US" sz="1400" dirty="0"/>
+            <a:endParaRPr lang="en-US" sz="1250" dirty="0"/>
           </a:p>
         </p:txBody>
       </p:sp>
@@ -36421,134 +36425,8 @@
         </p:nvSpPr>
         <p:spPr>
           <a:xfrm>
-            <a:off x="914400" y="3054096"/>
-            <a:ext cx="2514600" cy="1005840"/>
-          </a:xfrm>
-          <a:prstGeom prst="rect">
-            <a:avLst/>
-          </a:prstGeom>
-          <a:noFill/>
-          <a:ln/>
-        </p:spPr>
-        <p:txBody>
-          <a:bodyPr wrap="square" lIns="0" tIns="0" rIns="0" bIns="0" rtlCol="0" anchor="t"/>
-          <a:lstStyle/>
-          <a:p>
-            <a:pPr indent="0" marL="0">
-              <a:spcAft>
-                <a:spcPts val="400"/>
-              </a:spcAft>
-              <a:buNone/>
-            </a:pPr>
-            <a:r>
-              <a:rPr lang="en-US" sz="1050" dirty="0">
-                <a:solidFill>
-                  <a:srgbClr val="B9C6D6"/>
-                </a:solidFill>
-                <a:latin typeface="Calibri" pitchFamily="34" charset="0"/>
-                <a:ea typeface="Calibri" pitchFamily="34" charset="-122"/>
-                <a:cs typeface="Calibri" pitchFamily="34" charset="-120"/>
-              </a:rPr>
-              <a:t>docs/FAQ.md</a:t>
-            </a:r>
-            <a:endParaRPr lang="en-US" sz="1050" dirty="0"/>
-          </a:p>
-          <a:p>
-            <a:pPr indent="0" marL="0">
-              <a:spcAft>
-                <a:spcPts val="400"/>
-              </a:spcAft>
-              <a:buNone/>
-            </a:pPr>
-            <a:r>
-              <a:rPr lang="en-US" sz="1050" dirty="0">
-                <a:solidFill>
-                  <a:srgbClr val="B9C6D6"/>
-                </a:solidFill>
-                <a:latin typeface="Calibri" pitchFamily="34" charset="0"/>
-                <a:ea typeface="Calibri" pitchFamily="34" charset="-122"/>
-                <a:cs typeface="Calibri" pitchFamily="34" charset="-120"/>
-              </a:rPr>
-              <a:t>README.md</a:t>
-            </a:r>
-            <a:endParaRPr lang="en-US" sz="1050" dirty="0"/>
-          </a:p>
-          <a:p>
-            <a:pPr indent="0" marL="0">
-              <a:spcAft>
-                <a:spcPts val="400"/>
-              </a:spcAft>
-              <a:buNone/>
-            </a:pPr>
-            <a:r>
-              <a:rPr lang="en-US" sz="1050" dirty="0">
-                <a:solidFill>
-                  <a:srgbClr val="B9C6D6"/>
-                </a:solidFill>
-                <a:latin typeface="Calibri" pitchFamily="34" charset="0"/>
-                <a:ea typeface="Calibri" pitchFamily="34" charset="-122"/>
-                <a:cs typeface="Calibri" pitchFamily="34" charset="-120"/>
-              </a:rPr>
-              <a:t>docs/user-guide/getting-started.md</a:t>
-            </a:r>
-            <a:endParaRPr lang="en-US" sz="1050" dirty="0"/>
-          </a:p>
-        </p:txBody>
-      </p:sp>
-      <p:sp>
-        <p:nvSpPr>
-          <p:cNvPr id="11" name="Shape 8"/>
-          <p:cNvSpPr/>
-          <p:nvPr/>
-        </p:nvSpPr>
-        <p:spPr>
-          <a:xfrm>
-            <a:off x="3520440" y="2103120"/>
-            <a:ext cx="457200" cy="457200"/>
-          </a:xfrm>
-          <a:prstGeom prst="ellipse">
-            <a:avLst/>
-          </a:prstGeom>
-          <a:solidFill>
-            <a:srgbClr val="C8102E"/>
-          </a:solidFill>
-          <a:ln/>
-        </p:spPr>
-      </p:sp>
-      <p:pic>
-        <p:nvPicPr>
-          <p:cNvPr id="12" name="Image 1" descr="preencoded.png">    </p:cNvPr>
-          <p:cNvPicPr>
-            <a:picLocks noChangeAspect="1"/>
-          </p:cNvPicPr>
-          <p:nvPr/>
-        </p:nvPicPr>
-        <p:blipFill>
-          <a:blip r:embed="rId2"/>
-          <a:stretch>
-            <a:fillRect/>
-          </a:stretch>
-        </p:blipFill>
-        <p:spPr>
-          <a:xfrm>
-            <a:off x="3643884" y="2226564"/>
-            <a:ext cx="210312" cy="210312"/>
-          </a:xfrm>
-          <a:prstGeom prst="rect">
-            <a:avLst/>
-          </a:prstGeom>
-        </p:spPr>
-      </p:pic>
-      <p:sp>
-        <p:nvSpPr>
-          <p:cNvPr id="13" name="Text 9"/>
-          <p:cNvSpPr/>
-          <p:nvPr/>
-        </p:nvSpPr>
-        <p:spPr>
-          <a:xfrm>
-            <a:off x="3520440" y="2670048"/>
-            <a:ext cx="2514600" cy="329184"/>
+            <a:off x="3429000" y="1700784"/>
+            <a:ext cx="4846320" cy="475488"/>
           </a:xfrm>
           <a:prstGeom prst="rect">
             <a:avLst/>
@@ -36564,49 +36442,7 @@
               <a:buNone/>
             </a:pPr>
             <a:r>
-              <a:rPr lang="en-US" sz="1400" b="1" dirty="0">
-                <a:solidFill>
-                  <a:srgbClr val="FFFFFF"/>
-                </a:solidFill>
-                <a:latin typeface="Montserrat" pitchFamily="34" charset="0"/>
-                <a:ea typeface="Montserrat" pitchFamily="34" charset="-122"/>
-                <a:cs typeface="Montserrat" pitchFamily="34" charset="-120"/>
-              </a:rPr>
-              <a:t>Know the rules</a:t>
-            </a:r>
-            <a:endParaRPr lang="en-US" sz="1400" dirty="0"/>
-          </a:p>
-        </p:txBody>
-      </p:sp>
-      <p:sp>
-        <p:nvSpPr>
-          <p:cNvPr id="14" name="Text 10"/>
-          <p:cNvSpPr/>
-          <p:nvPr/>
-        </p:nvSpPr>
-        <p:spPr>
-          <a:xfrm>
-            <a:off x="3520440" y="3054096"/>
-            <a:ext cx="2514600" cy="1005840"/>
-          </a:xfrm>
-          <a:prstGeom prst="rect">
-            <a:avLst/>
-          </a:prstGeom>
-          <a:noFill/>
-          <a:ln/>
-        </p:spPr>
-        <p:txBody>
-          <a:bodyPr wrap="square" lIns="0" tIns="0" rIns="0" bIns="0" rtlCol="0" anchor="t"/>
-          <a:lstStyle/>
-          <a:p>
-            <a:pPr indent="0" marL="0">
-              <a:spcAft>
-                <a:spcPts val="400"/>
-              </a:spcAft>
-              <a:buNone/>
-            </a:pPr>
-            <a:r>
-              <a:rPr lang="en-US" sz="1050" dirty="0">
+              <a:rPr lang="en-US" sz="1200" dirty="0">
                 <a:solidFill>
                   <a:srgbClr val="B9C6D6"/>
                 </a:solidFill>
@@ -36614,62 +36450,22 @@
                 <a:ea typeface="Calibri" pitchFamily="34" charset="-122"/>
                 <a:cs typeface="Calibri" pitchFamily="34" charset="-120"/>
               </a:rPr>
-              <a:t>docs/ARCHITECTURE-TRUTHS.md</a:t>
+              <a:t>github.com/curtismu7/AI-DEMO2</a:t>
             </a:r>
-            <a:endParaRPr lang="en-US" sz="1050" dirty="0"/>
-          </a:p>
-          <a:p>
-            <a:pPr indent="0" marL="0">
-              <a:spcAft>
-                <a:spcPts val="400"/>
-              </a:spcAft>
-              <a:buNone/>
-            </a:pPr>
-            <a:r>
-              <a:rPr lang="en-US" sz="1050" dirty="0">
-                <a:solidFill>
-                  <a:srgbClr val="B9C6D6"/>
-                </a:solidFill>
-                <a:latin typeface="Calibri" pitchFamily="34" charset="0"/>
-                <a:ea typeface="Calibri" pitchFamily="34" charset="-122"/>
-                <a:cs typeface="Calibri" pitchFamily="34" charset="-120"/>
-              </a:rPr>
-              <a:t>REGRESSION_PLAN.md</a:t>
-            </a:r>
-            <a:endParaRPr lang="en-US" sz="1050" dirty="0"/>
-          </a:p>
-          <a:p>
-            <a:pPr indent="0" marL="0">
-              <a:spcAft>
-                <a:spcPts val="400"/>
-              </a:spcAft>
-              <a:buNone/>
-            </a:pPr>
-            <a:r>
-              <a:rPr lang="en-US" sz="1050" dirty="0">
-                <a:solidFill>
-                  <a:srgbClr val="B9C6D6"/>
-                </a:solidFill>
-                <a:latin typeface="Calibri" pitchFamily="34" charset="0"/>
-                <a:ea typeface="Calibri" pitchFamily="34" charset="-122"/>
-                <a:cs typeface="Calibri" pitchFamily="34" charset="-120"/>
-              </a:rPr>
-              <a:t>docs/use-cases/</a:t>
-            </a:r>
-            <a:endParaRPr lang="en-US" sz="1050" dirty="0"/>
+            <a:endParaRPr lang="en-US" sz="1200" dirty="0"/>
           </a:p>
         </p:txBody>
       </p:sp>
       <p:sp>
         <p:nvSpPr>
-          <p:cNvPr id="15" name="Shape 11"/>
+          <p:cNvPr id="11" name="Shape 8"/>
           <p:cNvSpPr/>
           <p:nvPr/>
         </p:nvSpPr>
         <p:spPr>
           <a:xfrm>
-            <a:off x="6126480" y="2103120"/>
-            <a:ext cx="457200" cy="457200"/>
+            <a:off x="914400" y="2322576"/>
+            <a:ext cx="402336" cy="402336"/>
           </a:xfrm>
           <a:prstGeom prst="ellipse">
             <a:avLst/>
@@ -36682,22 +36478,22 @@
       </p:sp>
       <p:pic>
         <p:nvPicPr>
-          <p:cNvPr id="16" name="Image 2" descr="preencoded.png">    </p:cNvPr>
+          <p:cNvPr id="12" name="Image 1" descr="preencoded.png">    </p:cNvPr>
           <p:cNvPicPr>
             <a:picLocks noChangeAspect="1"/>
           </p:cNvPicPr>
           <p:nvPr/>
         </p:nvPicPr>
         <p:blipFill>
-          <a:blip r:embed="rId3"/>
+          <a:blip r:embed="rId2"/>
           <a:stretch>
             <a:fillRect/>
           </a:stretch>
         </p:blipFill>
         <p:spPr>
           <a:xfrm>
-            <a:off x="6249924" y="2226564"/>
-            <a:ext cx="210312" cy="210312"/>
+            <a:off x="1023031" y="2431207"/>
+            <a:ext cx="185075" cy="185075"/>
           </a:xfrm>
           <a:prstGeom prst="rect">
             <a:avLst/>
@@ -36706,14 +36502,14 @@
       </p:pic>
       <p:sp>
         <p:nvSpPr>
-          <p:cNvPr id="17" name="Text 12"/>
+          <p:cNvPr id="13" name="Text 9"/>
           <p:cNvSpPr/>
           <p:nvPr/>
         </p:nvSpPr>
         <p:spPr>
           <a:xfrm>
-            <a:off x="6126480" y="2670048"/>
-            <a:ext cx="2514600" cy="329184"/>
+            <a:off x="1481328" y="2322576"/>
+            <a:ext cx="1920240" cy="402336"/>
           </a:xfrm>
           <a:prstGeom prst="rect">
             <a:avLst/>
@@ -36729,7 +36525,7 @@
               <a:buNone/>
             </a:pPr>
             <a:r>
-              <a:rPr lang="en-US" sz="1400" b="1" dirty="0">
+              <a:rPr lang="en-US" sz="1250" b="1" dirty="0">
                 <a:solidFill>
                   <a:srgbClr val="FFFFFF"/>
                 </a:solidFill>
@@ -36737,22 +36533,22 @@
                 <a:ea typeface="Montserrat" pitchFamily="34" charset="-122"/>
                 <a:cs typeface="Montserrat" pitchFamily="34" charset="-120"/>
               </a:rPr>
-              <a:t>Take the tools</a:t>
+              <a:t>FAQ</a:t>
             </a:r>
-            <a:endParaRPr lang="en-US" sz="1400" dirty="0"/>
+            <a:endParaRPr lang="en-US" sz="1250" dirty="0"/>
           </a:p>
         </p:txBody>
       </p:sp>
       <p:sp>
         <p:nvSpPr>
-          <p:cNvPr id="18" name="Text 13"/>
+          <p:cNvPr id="14" name="Text 10"/>
           <p:cNvSpPr/>
           <p:nvPr/>
         </p:nvSpPr>
         <p:spPr>
           <a:xfrm>
-            <a:off x="6126480" y="3054096"/>
-            <a:ext cx="2514600" cy="1005840"/>
+            <a:off x="3429000" y="2286000"/>
+            <a:ext cx="4846320" cy="475488"/>
           </a:xfrm>
           <a:prstGeom prst="rect">
             <a:avLst/>
@@ -36761,17 +36557,14 @@
           <a:ln/>
         </p:spPr>
         <p:txBody>
-          <a:bodyPr wrap="square" lIns="0" tIns="0" rIns="0" bIns="0" rtlCol="0" anchor="t"/>
+          <a:bodyPr wrap="square" lIns="0" tIns="0" rIns="0" bIns="0" rtlCol="0" anchor="ctr"/>
           <a:lstStyle/>
           <a:p>
             <a:pPr indent="0" marL="0">
-              <a:spcAft>
-                <a:spcPts val="400"/>
-              </a:spcAft>
               <a:buNone/>
             </a:pPr>
             <a:r>
-              <a:rPr lang="en-US" sz="1050" dirty="0">
+              <a:rPr lang="en-US" sz="1200" dirty="0">
                 <a:solidFill>
                   <a:srgbClr val="B9C6D6"/>
                 </a:solidFill>
@@ -36779,19 +36572,121 @@
                 <a:ea typeface="Calibri" pitchFamily="34" charset="-122"/>
                 <a:cs typeface="Calibri" pitchFamily="34" charset="-120"/>
               </a:rPr>
-              <a:t>github.com/curtismu7/ai-gateway-client</a:t>
+              <a:t>docs/FAQ.md in the repo</a:t>
             </a:r>
-            <a:endParaRPr lang="en-US" sz="1050" dirty="0"/>
+            <a:endParaRPr lang="en-US" sz="1200" dirty="0"/>
           </a:p>
+        </p:txBody>
+      </p:sp>
+      <p:sp>
+        <p:nvSpPr>
+          <p:cNvPr id="15" name="Shape 11"/>
+          <p:cNvSpPr/>
+          <p:nvPr/>
+        </p:nvSpPr>
+        <p:spPr>
+          <a:xfrm>
+            <a:off x="914400" y="2907792"/>
+            <a:ext cx="402336" cy="402336"/>
+          </a:xfrm>
+          <a:prstGeom prst="ellipse">
+            <a:avLst/>
+          </a:prstGeom>
+          <a:solidFill>
+            <a:srgbClr val="C8102E"/>
+          </a:solidFill>
+          <a:ln/>
+        </p:spPr>
+      </p:sp>
+      <p:pic>
+        <p:nvPicPr>
+          <p:cNvPr id="16" name="Image 2" descr="preencoded.png">    </p:cNvPr>
+          <p:cNvPicPr>
+            <a:picLocks noChangeAspect="1"/>
+          </p:cNvPicPr>
+          <p:nvPr/>
+        </p:nvPicPr>
+        <p:blipFill>
+          <a:blip r:embed="rId3"/>
+          <a:stretch>
+            <a:fillRect/>
+          </a:stretch>
+        </p:blipFill>
+        <p:spPr>
+          <a:xfrm>
+            <a:off x="1023031" y="3016423"/>
+            <a:ext cx="185075" cy="185075"/>
+          </a:xfrm>
+          <a:prstGeom prst="rect">
+            <a:avLst/>
+          </a:prstGeom>
+        </p:spPr>
+      </p:pic>
+      <p:sp>
+        <p:nvSpPr>
+          <p:cNvPr id="17" name="Text 12"/>
+          <p:cNvSpPr/>
+          <p:nvPr/>
+        </p:nvSpPr>
+        <p:spPr>
+          <a:xfrm>
+            <a:off x="1481328" y="2907792"/>
+            <a:ext cx="1920240" cy="402336"/>
+          </a:xfrm>
+          <a:prstGeom prst="rect">
+            <a:avLst/>
+          </a:prstGeom>
+          <a:noFill/>
+          <a:ln/>
+        </p:spPr>
+        <p:txBody>
+          <a:bodyPr wrap="square" lIns="0" tIns="0" rIns="0" bIns="0" rtlCol="0" anchor="ctr"/>
+          <a:lstStyle/>
           <a:p>
             <a:pPr indent="0" marL="0">
-              <a:spcAft>
-                <a:spcPts val="400"/>
-              </a:spcAft>
               <a:buNone/>
             </a:pPr>
             <a:r>
-              <a:rPr lang="en-US" sz="1050" dirty="0">
+              <a:rPr lang="en-US" sz="1250" b="1" dirty="0">
+                <a:solidFill>
+                  <a:srgbClr val="FFFFFF"/>
+                </a:solidFill>
+                <a:latin typeface="Montserrat" pitchFamily="34" charset="0"/>
+                <a:ea typeface="Montserrat" pitchFamily="34" charset="-122"/>
+                <a:cs typeface="Montserrat" pitchFamily="34" charset="-120"/>
+              </a:rPr>
+              <a:t>Install instructions</a:t>
+            </a:r>
+            <a:endParaRPr lang="en-US" sz="1250" dirty="0"/>
+          </a:p>
+        </p:txBody>
+      </p:sp>
+      <p:sp>
+        <p:nvSpPr>
+          <p:cNvPr id="18" name="Text 13"/>
+          <p:cNvSpPr/>
+          <p:nvPr/>
+        </p:nvSpPr>
+        <p:spPr>
+          <a:xfrm>
+            <a:off x="3429000" y="2871216"/>
+            <a:ext cx="4846320" cy="475488"/>
+          </a:xfrm>
+          <a:prstGeom prst="rect">
+            <a:avLst/>
+          </a:prstGeom>
+          <a:noFill/>
+          <a:ln/>
+        </p:spPr>
+        <p:txBody>
+          <a:bodyPr wrap="square" lIns="0" tIns="0" rIns="0" bIns="0" rtlCol="0" anchor="ctr"/>
+          <a:lstStyle/>
+          <a:p>
+            <a:pPr indent="0" marL="0">
+              <a:buNone/>
+            </a:pPr>
+            <a:r>
+              <a:rPr lang="en-US" sz="1200" dirty="0">
                 <a:solidFill>
                   <a:srgbClr val="B9C6D6"/>
                 </a:solidFill>
@@ -36799,19 +36694,121 @@
                 <a:ea typeface="Calibri" pitchFamily="34" charset="-122"/>
                 <a:cs typeface="Calibri" pitchFamily="34" charset="-120"/>
               </a:rPr>
-              <a:t>github.com/curtismu7/mcp-inspector</a:t>
+              <a:t>docs/FAQ.md, "Download and install" · docs/user-guide/getting-started.md</a:t>
             </a:r>
-            <a:endParaRPr lang="en-US" sz="1050" dirty="0"/>
+            <a:endParaRPr lang="en-US" sz="1200" dirty="0"/>
           </a:p>
+        </p:txBody>
+      </p:sp>
+      <p:sp>
+        <p:nvSpPr>
+          <p:cNvPr id="19" name="Shape 14"/>
+          <p:cNvSpPr/>
+          <p:nvPr/>
+        </p:nvSpPr>
+        <p:spPr>
+          <a:xfrm>
+            <a:off x="914400" y="3493008"/>
+            <a:ext cx="402336" cy="402336"/>
+          </a:xfrm>
+          <a:prstGeom prst="ellipse">
+            <a:avLst/>
+          </a:prstGeom>
+          <a:solidFill>
+            <a:srgbClr val="C8102E"/>
+          </a:solidFill>
+          <a:ln/>
+        </p:spPr>
+      </p:sp>
+      <p:pic>
+        <p:nvPicPr>
+          <p:cNvPr id="20" name="Image 3" descr="preencoded.png">    </p:cNvPr>
+          <p:cNvPicPr>
+            <a:picLocks noChangeAspect="1"/>
+          </p:cNvPicPr>
+          <p:nvPr/>
+        </p:nvPicPr>
+        <p:blipFill>
+          <a:blip r:embed="rId4"/>
+          <a:stretch>
+            <a:fillRect/>
+          </a:stretch>
+        </p:blipFill>
+        <p:spPr>
+          <a:xfrm>
+            <a:off x="1023031" y="3601639"/>
+            <a:ext cx="185075" cy="185075"/>
+          </a:xfrm>
+          <a:prstGeom prst="rect">
+            <a:avLst/>
+          </a:prstGeom>
+        </p:spPr>
+      </p:pic>
+      <p:sp>
+        <p:nvSpPr>
+          <p:cNvPr id="21" name="Text 15"/>
+          <p:cNvSpPr/>
+          <p:nvPr/>
+        </p:nvSpPr>
+        <p:spPr>
+          <a:xfrm>
+            <a:off x="1481328" y="3493008"/>
+            <a:ext cx="1920240" cy="402336"/>
+          </a:xfrm>
+          <a:prstGeom prst="rect">
+            <a:avLst/>
+          </a:prstGeom>
+          <a:noFill/>
+          <a:ln/>
+        </p:spPr>
+        <p:txBody>
+          <a:bodyPr wrap="square" lIns="0" tIns="0" rIns="0" bIns="0" rtlCol="0" anchor="ctr"/>
+          <a:lstStyle/>
           <a:p>
             <a:pPr indent="0" marL="0">
-              <a:spcAft>
-                <a:spcPts val="400"/>
-              </a:spcAft>
               <a:buNone/>
             </a:pPr>
             <a:r>
-              <a:rPr lang="en-US" sz="1050" dirty="0">
+              <a:rPr lang="en-US" sz="1250" b="1" dirty="0">
+                <a:solidFill>
+                  <a:srgbClr val="FFFFFF"/>
+                </a:solidFill>
+                <a:latin typeface="Montserrat" pitchFamily="34" charset="0"/>
+                <a:ea typeface="Montserrat" pitchFamily="34" charset="-122"/>
+                <a:cs typeface="Montserrat" pitchFamily="34" charset="-120"/>
+              </a:rPr>
+              <a:t>Demo guide</a:t>
+            </a:r>
+            <a:endParaRPr lang="en-US" sz="1250" dirty="0"/>
+          </a:p>
+        </p:txBody>
+      </p:sp>
+      <p:sp>
+        <p:nvSpPr>
+          <p:cNvPr id="22" name="Text 16"/>
+          <p:cNvSpPr/>
+          <p:nvPr/>
+        </p:nvSpPr>
+        <p:spPr>
+          <a:xfrm>
+            <a:off x="3429000" y="3456432"/>
+            <a:ext cx="4846320" cy="475488"/>
+          </a:xfrm>
+          <a:prstGeom prst="rect">
+            <a:avLst/>
+          </a:prstGeom>
+          <a:noFill/>
+          <a:ln/>
+        </p:spPr>
+        <p:txBody>
+          <a:bodyPr wrap="square" lIns="0" tIns="0" rIns="0" bIns="0" rtlCol="0" anchor="ctr"/>
+          <a:lstStyle/>
+          <a:p>
+            <a:pPr indent="0" marL="0">
+              <a:buNone/>
+            </a:pPr>
+            <a:r>
+              <a:rPr lang="en-US" sz="1200" dirty="0">
                 <a:solidFill>
                   <a:srgbClr val="B9C6D6"/>
                 </a:solidFill>
@@ -36819,9 +36816,79 @@
                 <a:ea typeface="Calibri" pitchFamily="34" charset="-122"/>
                 <a:cs typeface="Calibri" pitchFamily="34" charset="-120"/>
               </a:rPr>
-              <a:t>github.com/curtismu7/llm-gateway</a:t>
+              <a:t>In the app: /demo-track (Guided Demo Track)</a:t>
             </a:r>
-            <a:endParaRPr lang="en-US" sz="1050" dirty="0"/>
+            <a:endParaRPr lang="en-US" sz="1200" dirty="0"/>
+          </a:p>
+          <a:p>
+            <a:pPr indent="0" marL="0">
+              <a:buNone/>
+            </a:pPr>
+            <a:r>
+              <a:rPr lang="en-US" sz="1200" dirty="0">
+                <a:solidFill>
+                  <a:srgbClr val="B9C6D6"/>
+                </a:solidFill>
+                <a:latin typeface="Calibri" pitchFamily="34" charset="0"/>
+                <a:ea typeface="Calibri" pitchFamily="34" charset="-122"/>
+                <a:cs typeface="Calibri" pitchFamily="34" charset="-120"/>
+              </a:rPr>
+              <a:t>docs/user-guide/AGENT_SHOWCASE_DEMO_SCENARIOS.md</a:t>
+            </a:r>
+            <a:endParaRPr lang="en-US" sz="1200" dirty="0"/>
+          </a:p>
+        </p:txBody>
+      </p:sp>
+      <p:sp>
+        <p:nvSpPr>
+          <p:cNvPr id="23" name="Text 17"/>
+          <p:cNvSpPr/>
+          <p:nvPr/>
+        </p:nvSpPr>
+        <p:spPr>
+          <a:xfrm>
+            <a:off x="914400" y="4114800"/>
+            <a:ext cx="7315200" cy="292608"/>
+          </a:xfrm>
+          <a:prstGeom prst="rect">
+            <a:avLst/>
+          </a:prstGeom>
+          <a:noFill/>
+          <a:ln/>
+        </p:spPr>
+        <p:txBody>
+          <a:bodyPr wrap="square" lIns="0" tIns="0" rIns="0" bIns="0" rtlCol="0" anchor="ctr"/>
+          <a:lstStyle/>
+          <a:p>
+            <a:pPr indent="0" marL="0">
+              <a:buNone/>
+            </a:pPr>
+            <a:r>
+              <a:rPr lang="en-US" sz="1100" b="1" dirty="0">
+                <a:solidFill>
+                  <a:srgbClr val="FFFFFF"/>
+                </a:solidFill>
+                <a:latin typeface="Calibri" pitchFamily="34" charset="0"/>
+                <a:ea typeface="Calibri" pitchFamily="34" charset="-122"/>
+                <a:cs typeface="Calibri" pitchFamily="34" charset="-120"/>
+              </a:rPr>
+              <a:t>Take the tools:  </a:t>
+            </a:r>
+            <a:pPr indent="0" marL="0">
+              <a:buNone/>
+            </a:pPr>
+            <a:r>
+              <a:rPr lang="en-US" sz="1100" dirty="0">
+                <a:solidFill>
+                  <a:srgbClr val="B9C6D6"/>
+                </a:solidFill>
+                <a:latin typeface="Calibri" pitchFamily="34" charset="0"/>
+                <a:ea typeface="Calibri" pitchFamily="34" charset="-122"/>
+                <a:cs typeface="Calibri" pitchFamily="34" charset="-120"/>
+              </a:rPr>
+              <a:t>github.com/curtismu7/ai-gateway-client · mcp-inspector · llm-gateway</a:t>
+            </a:r>
+            <a:endParaRPr lang="en-US" sz="1100" dirty="0"/>
           </a:p>
         </p:txBody>
       </p:sp>

--- a/docs/resources/AI-Demo-Overview.pptx
+++ b/docs/resources/AI-Demo-Overview.pptx
@@ -615,7 +615,7 @@
               <a:t>Simulator: demo_api_server/services/attackSimulatorService.js (sim IDs mapped to use cases at lines 54-65), run via POST /api/demo/attack-sim/run (routes/attackSimulator.js). The route returns 403 when NODE_ENV=production or ff_use_cases_launcher is false, and always answers HTTP 200 with the sim's real status in the body.
 Only rogue-actor (UC13) and cross-owner-account (UC10) run the full BFF pipeline; the others probe the gateway perimeter. UC5 and UC18 always target the Node Demo Agent Gateway, even when PingGateway is active, so they need that container up.
 Caveats: UC12 tests audience binding only, never DPoP, even though its flag is ff_dpop. UC14 needs ff_rar. UC16 returns 403 by design while the catalog still expects 401. The simulator leaves ff_mcp_rate_limit and ff_rar switched on afterwards.
-AI layer: the BFF prompt guard (services/promptGuard.js, promptSanitizer.js, 7 regexes, default on) is keyword-based and easy to phrase around. The Privilege AI Gateway is the stronger layer: prompt injection and jailbreak return HTTP 400; PII and exfiltration are redacted in a 200. Malicious content, tool abuse, tool poisoning, schema violation and inter-agent abuse presets get no verdict there (demo_api_ui/src/config/guardrailAttackCatalog.js). The ML promptguard sidecar runs only in the SE cluster.
+AI layer: the BFF prompt guard (services/promptGuard.js, promptSanitizer.js, 7 regexes, default on) is keyword-based and easy to phrase around. The Agent Privilege is the stronger layer: prompt injection and jailbreak return HTTP 400; PII and exfiltration are redacted in a 200. Malicious content, tool abuse, tool poisoning, schema violation and inter-agent abuse presets get no verdict there (demo_api_ui/src/config/guardrailAttackCatalog.js). The ML promptguard sidecar runs only in the SE cluster.
 Red team, nothing blocks: argument-level tool poisoning (only the normal 428 approval gate, confirmed live on 2026-09-13 with nothing flagging the injected text; approving executes it, toolAttackCatalog.js), the hostile MCP server (standalone/hostile-mcp-server, deliberately not behind the gateway), and the ungoverned OpenCLI agent (UC-LEARN7, compose profile demo-attack). Present these as the contrast, not as blocked.
 Framework mapping: every use case carries OWASP Agentic (ASI) threat tags; see OwaspLearnerPage.js. MITRE ATLAS and NIST labels appear only in Privilege's own verdict log.</a:t>
             </a:r>
@@ -806,7 +806,7 @@
             <a:r>
               <a:rPr lang="en-US" dirty="0"/>
               <a:t>Tool registries: oauth-mcp/src/tools/BankingToolRegistry.ts; demo_mcp_resource_server/src/tools/*Tools.ts; demo_mcp_gateway/src/router.ts (weather, Brave, audit). mcp-tool-schemas.json is the generated union of 252 tools (copy in ping-gateway/config/).
-Gateways: PingGateway is the default (host :3036). Its main routes introspect tokens; the *-jwks.json twins are used when a request sends X-Token-Validation: jwks. Every route runs request validation, audit and the P1AZ decision script. The Node gateway (:3005, demo-auth group) validates with JWKS only. The Privilege AI Gateway runs as Agentic Apps on the SE cluster (local ping-mcpgw is the opt-in mcpgw group).
+Gateways: PingGateway is the default (host :3036). Its main routes introspect tokens; the *-jwks.json twins are used when a request sends X-Token-Validation: jwks. Every route runs request validation, audit and the P1AZ decision script. The Node gateway (:3005, demo-auth group) validates with JWKS only. The Agent Privilege runs as Agentic Apps on the SE cluster (local ping-mcpgw is the opt-in mcpgw group).
 Transports: oauth-mcp speaks WebSocket and Streamable HTTP /mcp; Brave, Grafana and the PingOne bridge also answer the SSE handshake Privilege uses for discovery; weather and the PingOne bridge wrap stdio-only upstreams. MCP_MTLS_ON is unset in the root .env, so the gateway to oauth-mcp hop is plaintext.
 Start-up: oauth-mcp, resource server, weather, Brave and the MCP proxy are core; code search is the rag group (on by default) and is plain REST, not MCP; jwt-verifier is demo-auth; opensearch is mcpgw; the hostile server runs with npm start, outside compose. mcp-audit has no compose profile but isn't in run-docker.sh's core list.
 Also: the BFF MCP facade (:3002, routes/mcpFacade.js) is a recording proxy with doors for outside clients such as LM Studio and LibreChat. demo_mcp_proxy (:8895) turns REST calls into MCP calls for simple agents.
@@ -1361,7 +1361,7 @@
 Two traps:
 - The live environment has no dedicated 'Demo AI App - CIBA' app, so CIBA falls back to the Admin Login app.
 - Management API calls try PINGONE_MGMT_* and PINGONE_MANAGEMENT_* first, then the Admin Login app, and only then the worker (services/configStore.js). A Management API failure can therefore be the Admin Login app.
-Privilege AI Gateway sign-in uses a client in the Privilege tenant (0428ba4f), not this environment; its secret lives in the vault.</a:t>
+Agent Privilege sign-in uses a client in the Privilege tenant (0428ba4f), not this environment; its secret lives in the vault.</a:t>
             </a:r>
             <a:endParaRPr lang="en-US" dirty="0"/>
           </a:p>
@@ -2389,7 +2389,7 @@
 - Gateway default is PingGateway; the Node gateway (demo_mcp_gateway, :3005) is the opt-in alternative.
 - Authorize answers PERMIT, DENY or INDETERMINATE; INDETERMINATE from the demo engine means pause for consent or step-up.
 - MCP servers re-check audience and scope as the last line. The mortgage backend takes an API key instead.
-- Optional: the PingOne Privilege AI Gateway can sit in front of the Agent Gateway (ff_mcp_gateway_privilege_first, SE cluster only).</a:t>
+- Optional: the PingOne Agent Privilege can sit in front of the Agent Gateway (ff_mcp_gateway_privilege_first, SE cluster only).</a:t>
             </a:r>
             <a:endParaRPr lang="en-US" dirty="0"/>
           </a:p>
@@ -2477,7 +2477,7 @@
           <a:p>
             <a:r>
               <a:rPr lang="en-US" dirty="0"/>
-              <a:t>Where it runs: one agentless AI Gateway (Helm release agentless-mcpgw, namespace ping-devops-curtismuir) on the Ping SE cluster, in PingOne tenant 0428ba4f, federated into the demo tenant. MCP doors: https://mcpgw.ai-demo.ping-devops.com/&lt;App&gt;/mcp; LLM lanes /llm/{openai,anthropic,google}/v1 on the same host (privilege/CURRENT-CONFIGURATION.md).
+              <a:t>Where it runs: one agentless Agent Privilege (Helm release agentless-mcpgw, namespace ping-devops-curtismuir) on the Ping SE cluster, in PingOne tenant 0428ba4f, federated into the demo tenant. MCP doors: https://mcpgw.ai-demo.ping-devops.com/&lt;App&gt;/mcp; LLM lanes /llm/{openai,anthropic,google}/v1 on the same host (privilege/CURRENT-CONFIGURATION.md).
 MCP gateway: a JSON-RPC POST gets a 401 pointing at RFC 9728 metadata; the client registers (POST /&lt;app&gt;/register) and runs PKCE. The gateway keeps registrations in memory, so a restart forgets them; the BFF re-registers via isDcrClientStillKnown (routes/privilegeMcpClient.js). Doors on /privilege-mcp-client: Direct (no Privilege), Privilege (policy enforced), Facade (same policy, client registered with the demo's own auth server).
 Policy traps (privilege/LESSONS-LEARNED.md): policies union, so delete extras instead of editing; a new app denies everything; an expired policy looks like a missing one; clients only see a bare 403.
 Privilege first: ff_mcp_gateway_privilege_first puts Privilege in front of the Agent Gateway, with the user token in X-Subject-Token (services/mcpGatewayTransport.js). ff_privilege_llm_first sends google and anthropic calls through Privilege virtual keys (services/llmProviderResolver.js, privilegeLlmProxyService.js).
@@ -9518,7 +9518,7 @@
                 <a:ea typeface="Calibri" pitchFamily="34" charset="-122"/>
                 <a:cs typeface="Calibri" pitchFamily="34" charset="-120"/>
               </a:rPr>
-              <a:t>Not in the app:  </a:t>
+              <a:t xml:space="preserve">Not in the app:  </a:t>
             </a:r>
             <a:pPr indent="0" marL="0">
               <a:buNone/>
@@ -11875,7 +11875,7 @@
                           <a:ea typeface="Calibri" pitchFamily="34" charset="-122"/>
                           <a:cs typeface="Calibri" pitchFamily="34" charset="-120"/>
                         </a:rPr>
-                        <a:t>Privilege AI Gateway</a:t>
+                        <a:t>Agent Privilege</a:t>
                       </a:r>
                       <a:endParaRPr lang="en-US" sz="950" dirty="0">
                         <a:latin typeface="Calibri" charset="0"/>
@@ -12149,7 +12149,7 @@
                           <a:ea typeface="Calibri" pitchFamily="34" charset="-122"/>
                           <a:cs typeface="Calibri" pitchFamily="34" charset="-120"/>
                         </a:rPr>
-                        <a:t>Privilege AI Gateway (SE)</a:t>
+                        <a:t>Agent Privilege (SE)</a:t>
                       </a:r>
                       <a:endParaRPr lang="en-US" sz="950" dirty="0">
                         <a:latin typeface="Calibri" charset="0"/>
@@ -12811,7 +12811,7 @@
                 <a:ea typeface="Calibri" pitchFamily="34" charset="-122"/>
                 <a:cs typeface="Calibri" pitchFamily="34" charset="-120"/>
               </a:rPr>
-              <a:t>Front doors:  </a:t>
+              <a:t xml:space="preserve">Front doors:  </a:t>
             </a:r>
             <a:pPr indent="0" marL="0">
               <a:buNone/>
@@ -12825,7 +12825,7 @@
                 <a:ea typeface="Calibri" pitchFamily="34" charset="-122"/>
                 <a:cs typeface="Calibri" pitchFamily="34" charset="-120"/>
               </a:rPr>
-              <a:t>PingGateway (default) · Node gateway (opt-in) · Privilege AI Gateway (SE) · BFF facade for outside MCP clients</a:t>
+              <a:t>PingGateway (default) · Node gateway (opt-in) · Agent Privilege (SE) · BFF facade for outside MCP clients</a:t>
             </a:r>
             <a:endParaRPr lang="en-US" sz="1050" dirty="0"/>
           </a:p>
@@ -13047,7 +13047,7 @@
       </p:sp>
       <p:pic>
         <p:nvPicPr>
-          <p:cNvPr id="9" name="Image 0" descr="preencoded.png">    </p:cNvPr>
+          <p:cNvPr id="9" name="Image 0" descr="preencoded.png"/>
           <p:cNvPicPr>
             <a:picLocks noChangeAspect="1"/>
           </p:cNvPicPr>
@@ -13363,7 +13363,7 @@
       </p:sp>
       <p:pic>
         <p:nvPicPr>
-          <p:cNvPr id="18" name="Image 1" descr="preencoded.png">    </p:cNvPr>
+          <p:cNvPr id="18" name="Image 1" descr="preencoded.png"/>
           <p:cNvPicPr>
             <a:picLocks noChangeAspect="1"/>
           </p:cNvPicPr>
@@ -13679,7 +13679,7 @@
       </p:sp>
       <p:pic>
         <p:nvPicPr>
-          <p:cNvPr id="27" name="Image 2" descr="preencoded.png">    </p:cNvPr>
+          <p:cNvPr id="27" name="Image 2" descr="preencoded.png"/>
           <p:cNvPicPr>
             <a:picLocks noChangeAspect="1"/>
           </p:cNvPicPr>
@@ -14006,7 +14006,7 @@
                 <a:ea typeface="Calibri" pitchFamily="34" charset="-122"/>
                 <a:cs typeface="Calibri" pitchFamily="34" charset="-120"/>
               </a:rPr>
-              <a:t>Also:  </a:t>
+              <a:t xml:space="preserve">Also:  </a:t>
             </a:r>
             <a:pPr indent="0" marL="0">
               <a:buNone/>
@@ -14242,7 +14242,7 @@
       </p:sp>
       <p:pic>
         <p:nvPicPr>
-          <p:cNvPr id="9" name="Image 0" descr="preencoded.png">    </p:cNvPr>
+          <p:cNvPr id="9" name="Image 0" descr="preencoded.png"/>
           <p:cNvPicPr>
             <a:picLocks noChangeAspect="1"/>
           </p:cNvPicPr>
@@ -14497,7 +14497,7 @@
       </p:sp>
       <p:pic>
         <p:nvPicPr>
-          <p:cNvPr id="16" name="Image 1" descr="preencoded.png">    </p:cNvPr>
+          <p:cNvPr id="16" name="Image 1" descr="preencoded.png"/>
           <p:cNvPicPr>
             <a:picLocks noChangeAspect="1"/>
           </p:cNvPicPr>
@@ -14752,7 +14752,7 @@
       </p:sp>
       <p:pic>
         <p:nvPicPr>
-          <p:cNvPr id="23" name="Image 2" descr="preencoded.png">    </p:cNvPr>
+          <p:cNvPr id="23" name="Image 2" descr="preencoded.png"/>
           <p:cNvPicPr>
             <a:picLocks noChangeAspect="1"/>
           </p:cNvPicPr>
@@ -15007,7 +15007,7 @@
       </p:sp>
       <p:pic>
         <p:nvPicPr>
-          <p:cNvPr id="30" name="Image 3" descr="preencoded.png">    </p:cNvPr>
+          <p:cNvPr id="30" name="Image 3" descr="preencoded.png"/>
           <p:cNvPicPr>
             <a:picLocks noChangeAspect="1"/>
           </p:cNvPicPr>
@@ -15262,7 +15262,7 @@
       </p:sp>
       <p:pic>
         <p:nvPicPr>
-          <p:cNvPr id="37" name="Image 4" descr="preencoded.png">    </p:cNvPr>
+          <p:cNvPr id="37" name="Image 4" descr="preencoded.png"/>
           <p:cNvPicPr>
             <a:picLocks noChangeAspect="1"/>
           </p:cNvPicPr>
@@ -15517,7 +15517,7 @@
       </p:sp>
       <p:pic>
         <p:nvPicPr>
-          <p:cNvPr id="44" name="Image 5" descr="preencoded.png">    </p:cNvPr>
+          <p:cNvPr id="44" name="Image 5" descr="preencoded.png"/>
           <p:cNvPicPr>
             <a:picLocks noChangeAspect="1"/>
           </p:cNvPicPr>
@@ -30263,7 +30263,7 @@
       </p:sp>
       <p:pic>
         <p:nvPicPr>
-          <p:cNvPr id="21" name="Image 0" descr="preencoded.png">    </p:cNvPr>
+          <p:cNvPr id="21" name="Image 0" descr="preencoded.png"/>
           <p:cNvPicPr>
             <a:picLocks noChangeAspect="1"/>
           </p:cNvPicPr>
@@ -30385,7 +30385,7 @@
       </p:sp>
       <p:pic>
         <p:nvPicPr>
-          <p:cNvPr id="25" name="Image 1" descr="preencoded.png">    </p:cNvPr>
+          <p:cNvPr id="25" name="Image 1" descr="preencoded.png"/>
           <p:cNvPicPr>
             <a:picLocks noChangeAspect="1"/>
           </p:cNvPicPr>
@@ -36356,7 +36356,7 @@
       </p:sp>
       <p:pic>
         <p:nvPicPr>
-          <p:cNvPr id="8" name="Image 0" descr="preencoded.png">    </p:cNvPr>
+          <p:cNvPr id="8" name="Image 0" descr="preencoded.png"/>
           <p:cNvPicPr>
             <a:picLocks noChangeAspect="1"/>
           </p:cNvPicPr>
@@ -36478,7 +36478,7 @@
       </p:sp>
       <p:pic>
         <p:nvPicPr>
-          <p:cNvPr id="12" name="Image 1" descr="preencoded.png">    </p:cNvPr>
+          <p:cNvPr id="12" name="Image 1" descr="preencoded.png"/>
           <p:cNvPicPr>
             <a:picLocks noChangeAspect="1"/>
           </p:cNvPicPr>
@@ -36600,7 +36600,7 @@
       </p:sp>
       <p:pic>
         <p:nvPicPr>
-          <p:cNvPr id="16" name="Image 2" descr="preencoded.png">    </p:cNvPr>
+          <p:cNvPr id="16" name="Image 2" descr="preencoded.png"/>
           <p:cNvPicPr>
             <a:picLocks noChangeAspect="1"/>
           </p:cNvPicPr>
@@ -36722,7 +36722,7 @@
       </p:sp>
       <p:pic>
         <p:nvPicPr>
-          <p:cNvPr id="20" name="Image 3" descr="preencoded.png">    </p:cNvPr>
+          <p:cNvPr id="20" name="Image 3" descr="preencoded.png"/>
           <p:cNvPicPr>
             <a:picLocks noChangeAspect="1"/>
           </p:cNvPicPr>
@@ -36872,7 +36872,7 @@
                 <a:ea typeface="Calibri" pitchFamily="34" charset="-122"/>
                 <a:cs typeface="Calibri" pitchFamily="34" charset="-120"/>
               </a:rPr>
-              <a:t>Take the tools:  </a:t>
+              <a:t xml:space="preserve">Take the tools:  </a:t>
             </a:r>
             <a:pPr indent="0" marL="0">
               <a:buNone/>
@@ -37108,7 +37108,7 @@
       </p:sp>
       <p:pic>
         <p:nvPicPr>
-          <p:cNvPr id="9" name="Image 0" descr="preencoded.png">    </p:cNvPr>
+          <p:cNvPr id="9" name="Image 0" descr="preencoded.png"/>
           <p:cNvPicPr>
             <a:picLocks noChangeAspect="1"/>
           </p:cNvPicPr>
@@ -37216,7 +37216,7 @@
                 <a:ea typeface="Calibri" pitchFamily="34" charset="-122"/>
                 <a:cs typeface="Calibri" pitchFamily="34" charset="-120"/>
               </a:rPr>
-              <a:t>  :4000</a:t>
+              <a:t xml:space="preserve">  :4000</a:t>
             </a:r>
             <a:endParaRPr lang="en-US" sz="1050" dirty="0"/>
           </a:p>
@@ -37308,7 +37308,7 @@
                 <a:ea typeface="Calibri" pitchFamily="34" charset="-122"/>
                 <a:cs typeface="Calibri" pitchFamily="34" charset="-120"/>
               </a:rPr>
-              <a:t>  :3001</a:t>
+              <a:t xml:space="preserve">  :3001</a:t>
             </a:r>
             <a:endParaRPr lang="en-US" sz="1050" dirty="0"/>
           </a:p>
@@ -37400,7 +37400,7 @@
       </p:sp>
       <p:pic>
         <p:nvPicPr>
-          <p:cNvPr id="17" name="Image 1" descr="preencoded.png">    </p:cNvPr>
+          <p:cNvPr id="17" name="Image 1" descr="preencoded.png"/>
           <p:cNvPicPr>
             <a:picLocks noChangeAspect="1"/>
           </p:cNvPicPr>
@@ -37508,7 +37508,7 @@
                 <a:ea typeface="Calibri" pitchFamily="34" charset="-122"/>
                 <a:cs typeface="Calibri" pitchFamily="34" charset="-120"/>
               </a:rPr>
-              <a:t>  :3036</a:t>
+              <a:t xml:space="preserve">  :3036</a:t>
             </a:r>
             <a:endParaRPr lang="en-US" sz="1050" dirty="0"/>
           </a:p>
@@ -37600,7 +37600,7 @@
                 <a:ea typeface="Calibri" pitchFamily="34" charset="-122"/>
                 <a:cs typeface="Calibri" pitchFamily="34" charset="-120"/>
               </a:rPr>
-              <a:t>  cloud</a:t>
+              <a:t xml:space="preserve">  cloud</a:t>
             </a:r>
             <a:endParaRPr lang="en-US" sz="1050" dirty="0"/>
           </a:p>
@@ -37692,7 +37692,7 @@
                 <a:ea typeface="Calibri" pitchFamily="34" charset="-122"/>
                 <a:cs typeface="Calibri" pitchFamily="34" charset="-120"/>
               </a:rPr>
-              <a:t>  :3009</a:t>
+              <a:t xml:space="preserve">  :3009</a:t>
             </a:r>
             <a:endParaRPr lang="en-US" sz="1050" dirty="0"/>
           </a:p>
@@ -37784,7 +37784,7 @@
                 <a:ea typeface="Calibri" pitchFamily="34" charset="-122"/>
                 <a:cs typeface="Calibri" pitchFamily="34" charset="-120"/>
               </a:rPr>
-              <a:t>  :3005</a:t>
+              <a:t xml:space="preserve">  :3005</a:t>
             </a:r>
             <a:endParaRPr lang="en-US" sz="1050" dirty="0"/>
           </a:p>
@@ -37876,7 +37876,7 @@
                 <a:ea typeface="Calibri" pitchFamily="34" charset="-122"/>
                 <a:cs typeface="Calibri" pitchFamily="34" charset="-120"/>
               </a:rPr>
-              <a:t>  :9001</a:t>
+              <a:t xml:space="preserve">  :9001</a:t>
             </a:r>
             <a:endParaRPr lang="en-US" sz="1050" dirty="0"/>
           </a:p>
@@ -37968,7 +37968,7 @@
       </p:sp>
       <p:pic>
         <p:nvPicPr>
-          <p:cNvPr id="31" name="Image 2" descr="preencoded.png">    </p:cNvPr>
+          <p:cNvPr id="31" name="Image 2" descr="preencoded.png"/>
           <p:cNvPicPr>
             <a:picLocks noChangeAspect="1"/>
           </p:cNvPicPr>
@@ -38076,7 +38076,7 @@
                 <a:ea typeface="Calibri" pitchFamily="34" charset="-122"/>
                 <a:cs typeface="Calibri" pitchFamily="34" charset="-120"/>
               </a:rPr>
-              <a:t>  :8080</a:t>
+              <a:t xml:space="preserve">  :8080</a:t>
             </a:r>
             <a:endParaRPr lang="en-US" sz="1050" dirty="0"/>
           </a:p>
@@ -38168,7 +38168,7 @@
                 <a:ea typeface="Calibri" pitchFamily="34" charset="-122"/>
                 <a:cs typeface="Calibri" pitchFamily="34" charset="-120"/>
               </a:rPr>
-              <a:t>  :8081</a:t>
+              <a:t xml:space="preserve">  :8081</a:t>
             </a:r>
             <a:endParaRPr lang="en-US" sz="1050" dirty="0"/>
           </a:p>
@@ -38260,7 +38260,7 @@
                 <a:ea typeface="Calibri" pitchFamily="34" charset="-122"/>
                 <a:cs typeface="Calibri" pitchFamily="34" charset="-120"/>
               </a:rPr>
-              <a:t>  :8082</a:t>
+              <a:t xml:space="preserve">  :8082</a:t>
             </a:r>
             <a:endParaRPr lang="en-US" sz="1050" dirty="0"/>
           </a:p>
@@ -38352,7 +38352,7 @@
                 <a:ea typeface="Calibri" pitchFamily="34" charset="-122"/>
                 <a:cs typeface="Calibri" pitchFamily="34" charset="-120"/>
               </a:rPr>
-              <a:t>  :8896/7</a:t>
+              <a:t xml:space="preserve">  :8896/7</a:t>
             </a:r>
             <a:endParaRPr lang="en-US" sz="1050" dirty="0"/>
           </a:p>
@@ -38444,7 +38444,7 @@
                 <a:ea typeface="Calibri" pitchFamily="34" charset="-122"/>
                 <a:cs typeface="Calibri" pitchFamily="34" charset="-120"/>
               </a:rPr>
-              <a:t>  :8895</a:t>
+              <a:t xml:space="preserve">  :8895</a:t>
             </a:r>
             <a:endParaRPr lang="en-US" sz="1050" dirty="0"/>
           </a:p>
@@ -38536,7 +38536,7 @@
       </p:sp>
       <p:pic>
         <p:nvPicPr>
-          <p:cNvPr id="45" name="Image 3" descr="preencoded.png">    </p:cNvPr>
+          <p:cNvPr id="45" name="Image 3" descr="preencoded.png"/>
           <p:cNvPicPr>
             <a:picLocks noChangeAspect="1"/>
           </p:cNvPicPr>
@@ -38644,7 +38644,7 @@
                 <a:ea typeface="Calibri" pitchFamily="34" charset="-122"/>
                 <a:cs typeface="Calibri" pitchFamily="34" charset="-120"/>
               </a:rPr>
-              <a:t>  :3016</a:t>
+              <a:t xml:space="preserve">  :3016</a:t>
             </a:r>
             <a:endParaRPr lang="en-US" sz="1050" dirty="0"/>
           </a:p>
@@ -38736,7 +38736,7 @@
                 <a:ea typeface="Calibri" pitchFamily="34" charset="-122"/>
                 <a:cs typeface="Calibri" pitchFamily="34" charset="-120"/>
               </a:rPr>
-              <a:t>  :8888</a:t>
+              <a:t xml:space="preserve">  :8888</a:t>
             </a:r>
             <a:endParaRPr lang="en-US" sz="1050" dirty="0"/>
           </a:p>
@@ -38828,7 +38828,7 @@
                 <a:ea typeface="Calibri" pitchFamily="34" charset="-122"/>
                 <a:cs typeface="Calibri" pitchFamily="34" charset="-120"/>
               </a:rPr>
-              <a:t>  :8090</a:t>
+              <a:t xml:space="preserve">  :8090</a:t>
             </a:r>
             <a:endParaRPr lang="en-US" sz="1050" dirty="0"/>
           </a:p>
@@ -38920,7 +38920,7 @@
                 <a:ea typeface="Calibri" pitchFamily="34" charset="-122"/>
                 <a:cs typeface="Calibri" pitchFamily="34" charset="-120"/>
               </a:rPr>
-              <a:t>  :8095</a:t>
+              <a:t xml:space="preserve">  :8095</a:t>
             </a:r>
             <a:endParaRPr lang="en-US" sz="1050" dirty="0"/>
           </a:p>
@@ -39023,7 +39023,7 @@
                 <a:ea typeface="Calibri" pitchFamily="34" charset="-122"/>
                 <a:cs typeface="Calibri" pitchFamily="34" charset="-120"/>
               </a:rPr>
-              <a:t>Hosted by Ping:  </a:t>
+              <a:t xml:space="preserve">Hosted by Ping:  </a:t>
             </a:r>
             <a:pPr indent="0" marL="0">
               <a:buNone/>
@@ -39051,7 +39051,7 @@
                 <a:ea typeface="Calibri" pitchFamily="34" charset="-122"/>
                 <a:cs typeface="Calibri" pitchFamily="34" charset="-120"/>
               </a:rPr>
-              <a:t>          Opt-in:  </a:t>
+              <a:t xml:space="preserve">          Opt-in:  </a:t>
             </a:r>
             <a:pPr indent="0" marL="0">
               <a:buNone/>
@@ -40109,7 +40109,7 @@
                           <a:ea typeface="Calibri" pitchFamily="34" charset="-122"/>
                           <a:cs typeface="Calibri" pitchFamily="34" charset="-120"/>
                         </a:rPr>
-                        <a:t>AI Gateway Client</a:t>
+                        <a:t>Agent Privilege Client</a:t>
                       </a:r>
                       <a:endParaRPr lang="en-US" sz="1050" dirty="0">
                         <a:latin typeface="Calibri" charset="0"/>
@@ -41341,7 +41341,7 @@
       </p:sp>
       <p:pic>
         <p:nvPicPr>
-          <p:cNvPr id="9" name="Image 0" descr="preencoded.png">    </p:cNvPr>
+          <p:cNvPr id="9" name="Image 0" descr="preencoded.png"/>
           <p:cNvPicPr>
             <a:picLocks noChangeAspect="1"/>
           </p:cNvPicPr>
@@ -41589,7 +41589,7 @@
       </p:sp>
       <p:pic>
         <p:nvPicPr>
-          <p:cNvPr id="17" name="Image 1" descr="preencoded.png">    </p:cNvPr>
+          <p:cNvPr id="17" name="Image 1" descr="preencoded.png"/>
           <p:cNvPicPr>
             <a:picLocks noChangeAspect="1"/>
           </p:cNvPicPr>
@@ -41837,7 +41837,7 @@
       </p:sp>
       <p:pic>
         <p:nvPicPr>
-          <p:cNvPr id="25" name="Image 2" descr="preencoded.png">    </p:cNvPr>
+          <p:cNvPr id="25" name="Image 2" descr="preencoded.png"/>
           <p:cNvPicPr>
             <a:picLocks noChangeAspect="1"/>
           </p:cNvPicPr>
@@ -42085,7 +42085,7 @@
       </p:sp>
       <p:pic>
         <p:nvPicPr>
-          <p:cNvPr id="33" name="Image 3" descr="preencoded.png">    </p:cNvPr>
+          <p:cNvPr id="33" name="Image 3" descr="preencoded.png"/>
           <p:cNvPicPr>
             <a:picLocks noChangeAspect="1"/>
           </p:cNvPicPr>
@@ -42333,7 +42333,7 @@
       </p:sp>
       <p:pic>
         <p:nvPicPr>
-          <p:cNvPr id="41" name="Image 4" descr="preencoded.png">    </p:cNvPr>
+          <p:cNvPr id="41" name="Image 4" descr="preencoded.png"/>
           <p:cNvPicPr>
             <a:picLocks noChangeAspect="1"/>
           </p:cNvPicPr>
@@ -42581,7 +42581,7 @@
       </p:sp>
       <p:pic>
         <p:nvPicPr>
-          <p:cNvPr id="49" name="Image 5" descr="preencoded.png">    </p:cNvPr>
+          <p:cNvPr id="49" name="Image 5" descr="preencoded.png"/>
           <p:cNvPicPr>
             <a:picLocks noChangeAspect="1"/>
           </p:cNvPicPr>
@@ -42973,7 +42973,7 @@
       </p:sp>
       <p:pic>
         <p:nvPicPr>
-          <p:cNvPr id="8" name="Image 0" descr="preencoded.png">    </p:cNvPr>
+          <p:cNvPr id="8" name="Image 0" descr="preencoded.png"/>
           <p:cNvPicPr>
             <a:picLocks noChangeAspect="1"/>
           </p:cNvPicPr>
@@ -43042,7 +43042,7 @@
                 <a:ea typeface="Calibri" pitchFamily="34" charset="-122"/>
                 <a:cs typeface="Calibri" pitchFamily="34" charset="-120"/>
               </a:rPr>
-              <a:t>   UC1 · UC33 · UC34</a:t>
+              <a:t xml:space="preserve">   UC1 · UC33 · UC34</a:t>
             </a:r>
             <a:endParaRPr lang="en-US" sz="1100" dirty="0"/>
           </a:p>
@@ -43109,7 +43109,7 @@
       </p:sp>
       <p:pic>
         <p:nvPicPr>
-          <p:cNvPr id="12" name="Image 1" descr="preencoded.png">    </p:cNvPr>
+          <p:cNvPr id="12" name="Image 1" descr="preencoded.png"/>
           <p:cNvPicPr>
             <a:picLocks noChangeAspect="1"/>
           </p:cNvPicPr>
@@ -43178,7 +43178,7 @@
                 <a:ea typeface="Calibri" pitchFamily="34" charset="-122"/>
                 <a:cs typeface="Calibri" pitchFamily="34" charset="-120"/>
               </a:rPr>
-              <a:t>   UC8 · UC23 · UC27</a:t>
+              <a:t xml:space="preserve">   UC8 · UC23 · UC27</a:t>
             </a:r>
             <a:endParaRPr lang="en-US" sz="1100" dirty="0"/>
           </a:p>
@@ -43245,7 +43245,7 @@
       </p:sp>
       <p:pic>
         <p:nvPicPr>
-          <p:cNvPr id="16" name="Image 2" descr="preencoded.png">    </p:cNvPr>
+          <p:cNvPr id="16" name="Image 2" descr="preencoded.png"/>
           <p:cNvPicPr>
             <a:picLocks noChangeAspect="1"/>
           </p:cNvPicPr>
@@ -43314,7 +43314,7 @@
                 <a:ea typeface="Calibri" pitchFamily="34" charset="-122"/>
                 <a:cs typeface="Calibri" pitchFamily="34" charset="-120"/>
               </a:rPr>
-              <a:t>   UC2 · 2.5 · 2.6 · 2.7</a:t>
+              <a:t xml:space="preserve">   UC2 · 2.5 · 2.6 · 2.7</a:t>
             </a:r>
             <a:endParaRPr lang="en-US" sz="1100" dirty="0"/>
           </a:p>
@@ -43381,7 +43381,7 @@
       </p:sp>
       <p:pic>
         <p:nvPicPr>
-          <p:cNvPr id="20" name="Image 3" descr="preencoded.png">    </p:cNvPr>
+          <p:cNvPr id="20" name="Image 3" descr="preencoded.png"/>
           <p:cNvPicPr>
             <a:picLocks noChangeAspect="1"/>
           </p:cNvPicPr>
@@ -43450,7 +43450,7 @@
                 <a:ea typeface="Calibri" pitchFamily="34" charset="-122"/>
                 <a:cs typeface="Calibri" pitchFamily="34" charset="-120"/>
               </a:rPr>
-              <a:t>   UC30–32 · UC41–42</a:t>
+              <a:t xml:space="preserve">   UC30–32 · UC41–42</a:t>
             </a:r>
             <a:endParaRPr lang="en-US" sz="1100" dirty="0"/>
           </a:p>
@@ -43517,7 +43517,7 @@
       </p:sp>
       <p:pic>
         <p:nvPicPr>
-          <p:cNvPr id="24" name="Image 4" descr="preencoded.png">    </p:cNvPr>
+          <p:cNvPr id="24" name="Image 4" descr="preencoded.png"/>
           <p:cNvPicPr>
             <a:picLocks noChangeAspect="1"/>
           </p:cNvPicPr>
@@ -43586,7 +43586,7 @@
                 <a:ea typeface="Calibri" pitchFamily="34" charset="-122"/>
                 <a:cs typeface="Calibri" pitchFamily="34" charset="-120"/>
               </a:rPr>
-              <a:t>   UC26 · UC35</a:t>
+              <a:t xml:space="preserve">   UC26 · UC35</a:t>
             </a:r>
             <a:endParaRPr lang="en-US" sz="1100" dirty="0"/>
           </a:p>
@@ -43653,7 +43653,7 @@
       </p:sp>
       <p:pic>
         <p:nvPicPr>
-          <p:cNvPr id="28" name="Image 5" descr="preencoded.png">    </p:cNvPr>
+          <p:cNvPr id="28" name="Image 5" descr="preencoded.png"/>
           <p:cNvPicPr>
             <a:picLocks noChangeAspect="1"/>
           </p:cNvPicPr>
@@ -43722,7 +43722,7 @@
                 <a:ea typeface="Calibri" pitchFamily="34" charset="-122"/>
                 <a:cs typeface="Calibri" pitchFamily="34" charset="-120"/>
               </a:rPr>
-              <a:t>   UC-NHI1–2 · UC19</a:t>
+              <a:t xml:space="preserve">   UC-NHI1–2 · UC19</a:t>
             </a:r>
             <a:endParaRPr lang="en-US" sz="1100" dirty="0"/>
           </a:p>
@@ -44767,7 +44767,7 @@
       </p:sp>
       <p:pic>
         <p:nvPicPr>
-          <p:cNvPr id="11" name="Image 0" descr="preencoded.png">    </p:cNvPr>
+          <p:cNvPr id="11" name="Image 0" descr="preencoded.png"/>
           <p:cNvPicPr>
             <a:picLocks noChangeAspect="1"/>
           </p:cNvPicPr>
@@ -44934,7 +44934,7 @@
       </p:sp>
       <p:pic>
         <p:nvPicPr>
-          <p:cNvPr id="17" name="Image 1" descr="preencoded.png">    </p:cNvPr>
+          <p:cNvPr id="17" name="Image 1" descr="preencoded.png"/>
           <p:cNvPicPr>
             <a:picLocks noChangeAspect="1"/>
           </p:cNvPicPr>
@@ -45101,7 +45101,7 @@
       </p:sp>
       <p:pic>
         <p:nvPicPr>
-          <p:cNvPr id="23" name="Image 2" descr="preencoded.png">    </p:cNvPr>
+          <p:cNvPr id="23" name="Image 2" descr="preencoded.png"/>
           <p:cNvPicPr>
             <a:picLocks noChangeAspect="1"/>
           </p:cNvPicPr>
@@ -45268,7 +45268,7 @@
       </p:sp>
       <p:pic>
         <p:nvPicPr>
-          <p:cNvPr id="29" name="Image 3" descr="preencoded.png">    </p:cNvPr>
+          <p:cNvPr id="29" name="Image 3" descr="preencoded.png"/>
           <p:cNvPicPr>
             <a:picLocks noChangeAspect="1"/>
           </p:cNvPicPr>
@@ -45435,7 +45435,7 @@
       </p:sp>
       <p:pic>
         <p:nvPicPr>
-          <p:cNvPr id="35" name="Image 4" descr="preencoded.png">    </p:cNvPr>
+          <p:cNvPr id="35" name="Image 4" descr="preencoded.png"/>
           <p:cNvPicPr>
             <a:picLocks noChangeAspect="1"/>
           </p:cNvPicPr>
@@ -45602,7 +45602,7 @@
       </p:sp>
       <p:pic>
         <p:nvPicPr>
-          <p:cNvPr id="41" name="Image 5" descr="preencoded.png">    </p:cNvPr>
+          <p:cNvPr id="41" name="Image 5" descr="preencoded.png"/>
           <p:cNvPicPr>
             <a:picLocks noChangeAspect="1"/>
           </p:cNvPicPr>
@@ -45721,7 +45721,7 @@
                 <a:ea typeface="Calibri" pitchFamily="34" charset="-122"/>
                 <a:cs typeface="Calibri" pitchFamily="34" charset="-120"/>
               </a:rPr>
-              <a:t>Optional outer ring:  </a:t>
+              <a:t xml:space="preserve">Optional outer ring:  </a:t>
             </a:r>
             <a:pPr indent="0" marL="0">
               <a:buNone/>
@@ -45735,7 +45735,7 @@
                 <a:ea typeface="Calibri" pitchFamily="34" charset="-122"/>
                 <a:cs typeface="Calibri" pitchFamily="34" charset="-120"/>
               </a:rPr>
-              <a:t>the PingOne Privilege AI Gateway scans prompts for injection and jailbreaks before they reach the model or tools.</a:t>
+              <a:t>the PingOne Agent Privilege scans prompts for injection and jailbreaks before they reach the model or tools.</a:t>
             </a:r>
             <a:endParaRPr lang="en-US" sz="1050" dirty="0"/>
           </a:p>
@@ -47038,7 +47038,7 @@
                 <a:ea typeface="Calibri" pitchFamily="34" charset="-122"/>
                 <a:cs typeface="Calibri" pitchFamily="34" charset="-120"/>
               </a:rPr>
-              <a:t>Optional: PingOne Privilege AI Gateway in front of the agent gateway</a:t>
+              <a:t>Optional: PingOne Agent Privilege in front of the agent gateway</a:t>
             </a:r>
             <a:endParaRPr lang="en-US" sz="950" dirty="0"/>
           </a:p>
@@ -47260,7 +47260,7 @@
       </p:sp>
       <p:pic>
         <p:nvPicPr>
-          <p:cNvPr id="9" name="Image 0" descr="preencoded.png">    </p:cNvPr>
+          <p:cNvPr id="9" name="Image 0" descr="preencoded.png"/>
           <p:cNvPicPr>
             <a:picLocks noChangeAspect="1"/>
           </p:cNvPicPr>
@@ -47315,7 +47315,7 @@
                 <a:ea typeface="Montserrat" pitchFamily="34" charset="-122"/>
                 <a:cs typeface="Montserrat" pitchFamily="34" charset="-120"/>
               </a:rPr>
-              <a:t>AI Gateway for MCP tools</a:t>
+              <a:t>Agent Privilege for MCP tools</a:t>
             </a:r>
             <a:endParaRPr lang="en-US" sz="1300" dirty="0"/>
           </a:p>
@@ -47536,7 +47536,7 @@
       </p:sp>
       <p:pic>
         <p:nvPicPr>
-          <p:cNvPr id="16" name="Image 1" descr="preencoded.png">    </p:cNvPr>
+          <p:cNvPr id="16" name="Image 1" descr="preencoded.png"/>
           <p:cNvPicPr>
             <a:picLocks noChangeAspect="1"/>
           </p:cNvPicPr>
@@ -47823,7 +47823,7 @@
                 <a:ea typeface="Calibri" pitchFamily="34" charset="-122"/>
                 <a:cs typeface="Calibri" pitchFamily="34" charset="-120"/>
               </a:rPr>
-              <a:t>Also:  </a:t>
+              <a:t xml:space="preserve">Also:  </a:t>
             </a:r>
             <a:pPr indent="0" marL="0">
               <a:buNone/>
